--- a/site/tema6/diapositivas/interaccion.pptx
+++ b/site/tema6/diapositivas/interaccion.pptx
@@ -14,9 +14,19 @@
     <p:sldId id="262" r:id="rId8"/>
     <p:sldId id="263" r:id="rId9"/>
     <p:sldId id="264" r:id="rId10"/>
+    <p:sldId id="265" r:id="rId11"/>
+    <p:sldId id="266" r:id="rId12"/>
+    <p:sldId id="267" r:id="rId13"/>
+    <p:sldId id="268" r:id="rId14"/>
+    <p:sldId id="269" r:id="rId15"/>
+    <p:sldId id="270" r:id="rId16"/>
+    <p:sldId id="271" r:id="rId17"/>
+    <p:sldId id="272" r:id="rId18"/>
+    <p:sldId id="273" r:id="rId19"/>
+    <p:sldId id="274" r:id="rId20"/>
   </p:sldIdLst>
   <p:notesMasterIdLst>
-    <p:notesMasterId r:id="rId11"/>
+    <p:notesMasterId r:id="rId21"/>
   </p:notesMasterIdLst>
   <p:sldSz cx="12192000" cy="6858000"/>
   <p:notesSz cx="6858000" cy="12192000"/>
@@ -534,6 +544,886 @@
             <a:fld id="{F7021451-1387-4CA6-816F-3879F97B5CBC}" type="slidenum">
               <a:rPr lang="en-US"/>
               <a:t>1</a:t>
+            </a:fld>
+            <a:endParaRPr lang="en-US"/>
+          </a:p>
+        </p:txBody>
+      </p:sp>
+    </p:spTree>
+    <p:extLst>
+      <p:ext uri="{BB962C8B-B14F-4D97-AF65-F5344CB8AC3E}">
+        <p14:creationId xmlns:p14="http://schemas.microsoft.com/office/powerpoint/2010/main" val="1024086991"/>
+      </p:ext>
+    </p:extLst>
+  </p:cSld>
+  <p:clrMapOvr>
+    <a:masterClrMapping/>
+  </p:clrMapOvr>
+</p:notes>
+</file>
+
+<file path=ppt/notesSlides/notesSlide10.xml><?xml version="1.0" encoding="utf-8"?>
+<p:notes xmlns:a="http://schemas.openxmlformats.org/drawingml/2006/main" xmlns:r="http://schemas.openxmlformats.org/officeDocument/2006/relationships" xmlns:p="http://schemas.openxmlformats.org/presentationml/2006/main">
+  <p:cSld>
+    <p:spTree>
+      <p:nvGrpSpPr>
+        <p:cNvPr id="1" name=""/>
+        <p:cNvGrpSpPr/>
+        <p:nvPr/>
+      </p:nvGrpSpPr>
+      <p:grpSpPr>
+        <a:xfrm>
+          <a:off x="0" y="0"/>
+          <a:ext cx="0" cy="0"/>
+          <a:chOff x="0" y="0"/>
+          <a:chExt cx="0" cy="0"/>
+        </a:xfrm>
+      </p:grpSpPr>
+      <p:sp>
+        <p:nvSpPr>
+          <p:cNvPr id="2" name="Slide Image Placeholder 1"/>
+          <p:cNvSpPr>
+            <a:spLocks noGrp="1" noRot="1" noChangeAspect="1"/>
+          </p:cNvSpPr>
+          <p:nvPr>
+            <p:ph type="sldImg"/>
+          </p:nvPr>
+        </p:nvSpPr>
+        <p:spPr/>
+      </p:sp>
+      <p:sp>
+        <p:nvSpPr>
+          <p:cNvPr id="3" name="Notes Placeholder 2"/>
+          <p:cNvSpPr>
+            <a:spLocks noGrp="1"/>
+          </p:cNvSpPr>
+          <p:nvPr>
+            <p:ph type="body" idx="1"/>
+          </p:nvPr>
+        </p:nvSpPr>
+        <p:spPr/>
+        <p:txBody>
+          <a:bodyPr/>
+          <a:lstStyle/>
+          <a:p>
+            <a:r>
+              <a:rPr lang="en-US" dirty="0"/>
+              <a:t/>
+            </a:r>
+            <a:endParaRPr lang="en-US" dirty="0"/>
+          </a:p>
+        </p:txBody>
+      </p:sp>
+      <p:sp>
+        <p:nvSpPr>
+          <p:cNvPr id="4" name="Slide Number Placeholder 3"/>
+          <p:cNvSpPr>
+            <a:spLocks noGrp="1"/>
+          </p:cNvSpPr>
+          <p:nvPr>
+            <p:ph type="sldNum" sz="quarter" idx="10"/>
+          </p:nvPr>
+        </p:nvSpPr>
+        <p:spPr/>
+        <p:txBody>
+          <a:bodyPr/>
+          <a:lstStyle/>
+          <a:p>
+            <a:fld id="{F7021451-1387-4CA6-816F-3879F97B5CBC}" type="slidenum">
+              <a:rPr lang="en-US"/>
+              <a:t>10</a:t>
+            </a:fld>
+            <a:endParaRPr lang="en-US"/>
+          </a:p>
+        </p:txBody>
+      </p:sp>
+    </p:spTree>
+    <p:extLst>
+      <p:ext uri="{BB962C8B-B14F-4D97-AF65-F5344CB8AC3E}">
+        <p14:creationId xmlns:p14="http://schemas.microsoft.com/office/powerpoint/2010/main" val="1024086991"/>
+      </p:ext>
+    </p:extLst>
+  </p:cSld>
+  <p:clrMapOvr>
+    <a:masterClrMapping/>
+  </p:clrMapOvr>
+</p:notes>
+</file>
+
+<file path=ppt/notesSlides/notesSlide11.xml><?xml version="1.0" encoding="utf-8"?>
+<p:notes xmlns:a="http://schemas.openxmlformats.org/drawingml/2006/main" xmlns:r="http://schemas.openxmlformats.org/officeDocument/2006/relationships" xmlns:p="http://schemas.openxmlformats.org/presentationml/2006/main">
+  <p:cSld>
+    <p:spTree>
+      <p:nvGrpSpPr>
+        <p:cNvPr id="1" name=""/>
+        <p:cNvGrpSpPr/>
+        <p:nvPr/>
+      </p:nvGrpSpPr>
+      <p:grpSpPr>
+        <a:xfrm>
+          <a:off x="0" y="0"/>
+          <a:ext cx="0" cy="0"/>
+          <a:chOff x="0" y="0"/>
+          <a:chExt cx="0" cy="0"/>
+        </a:xfrm>
+      </p:grpSpPr>
+      <p:sp>
+        <p:nvSpPr>
+          <p:cNvPr id="2" name="Slide Image Placeholder 1"/>
+          <p:cNvSpPr>
+            <a:spLocks noGrp="1" noRot="1" noChangeAspect="1"/>
+          </p:cNvSpPr>
+          <p:nvPr>
+            <p:ph type="sldImg"/>
+          </p:nvPr>
+        </p:nvSpPr>
+        <p:spPr/>
+      </p:sp>
+      <p:sp>
+        <p:nvSpPr>
+          <p:cNvPr id="3" name="Notes Placeholder 2"/>
+          <p:cNvSpPr>
+            <a:spLocks noGrp="1"/>
+          </p:cNvSpPr>
+          <p:nvPr>
+            <p:ph type="body" idx="1"/>
+          </p:nvPr>
+        </p:nvSpPr>
+        <p:spPr/>
+        <p:txBody>
+          <a:bodyPr/>
+          <a:lstStyle/>
+          <a:p>
+            <a:r>
+              <a:rPr lang="en-US" dirty="0"/>
+              <a:t/>
+            </a:r>
+            <a:endParaRPr lang="en-US" dirty="0"/>
+          </a:p>
+        </p:txBody>
+      </p:sp>
+      <p:sp>
+        <p:nvSpPr>
+          <p:cNvPr id="4" name="Slide Number Placeholder 3"/>
+          <p:cNvSpPr>
+            <a:spLocks noGrp="1"/>
+          </p:cNvSpPr>
+          <p:nvPr>
+            <p:ph type="sldNum" sz="quarter" idx="10"/>
+          </p:nvPr>
+        </p:nvSpPr>
+        <p:spPr/>
+        <p:txBody>
+          <a:bodyPr/>
+          <a:lstStyle/>
+          <a:p>
+            <a:fld id="{F7021451-1387-4CA6-816F-3879F97B5CBC}" type="slidenum">
+              <a:rPr lang="en-US"/>
+              <a:t>11</a:t>
+            </a:fld>
+            <a:endParaRPr lang="en-US"/>
+          </a:p>
+        </p:txBody>
+      </p:sp>
+    </p:spTree>
+    <p:extLst>
+      <p:ext uri="{BB962C8B-B14F-4D97-AF65-F5344CB8AC3E}">
+        <p14:creationId xmlns:p14="http://schemas.microsoft.com/office/powerpoint/2010/main" val="1024086991"/>
+      </p:ext>
+    </p:extLst>
+  </p:cSld>
+  <p:clrMapOvr>
+    <a:masterClrMapping/>
+  </p:clrMapOvr>
+</p:notes>
+</file>
+
+<file path=ppt/notesSlides/notesSlide12.xml><?xml version="1.0" encoding="utf-8"?>
+<p:notes xmlns:a="http://schemas.openxmlformats.org/drawingml/2006/main" xmlns:r="http://schemas.openxmlformats.org/officeDocument/2006/relationships" xmlns:p="http://schemas.openxmlformats.org/presentationml/2006/main">
+  <p:cSld>
+    <p:spTree>
+      <p:nvGrpSpPr>
+        <p:cNvPr id="1" name=""/>
+        <p:cNvGrpSpPr/>
+        <p:nvPr/>
+      </p:nvGrpSpPr>
+      <p:grpSpPr>
+        <a:xfrm>
+          <a:off x="0" y="0"/>
+          <a:ext cx="0" cy="0"/>
+          <a:chOff x="0" y="0"/>
+          <a:chExt cx="0" cy="0"/>
+        </a:xfrm>
+      </p:grpSpPr>
+      <p:sp>
+        <p:nvSpPr>
+          <p:cNvPr id="2" name="Slide Image Placeholder 1"/>
+          <p:cNvSpPr>
+            <a:spLocks noGrp="1" noRot="1" noChangeAspect="1"/>
+          </p:cNvSpPr>
+          <p:nvPr>
+            <p:ph type="sldImg"/>
+          </p:nvPr>
+        </p:nvSpPr>
+        <p:spPr/>
+      </p:sp>
+      <p:sp>
+        <p:nvSpPr>
+          <p:cNvPr id="3" name="Notes Placeholder 2"/>
+          <p:cNvSpPr>
+            <a:spLocks noGrp="1"/>
+          </p:cNvSpPr>
+          <p:nvPr>
+            <p:ph type="body" idx="1"/>
+          </p:nvPr>
+        </p:nvSpPr>
+        <p:spPr/>
+        <p:txBody>
+          <a:bodyPr/>
+          <a:lstStyle/>
+          <a:p>
+            <a:r>
+              <a:rPr lang="en-US" dirty="0"/>
+              <a:t/>
+            </a:r>
+            <a:endParaRPr lang="en-US" dirty="0"/>
+          </a:p>
+        </p:txBody>
+      </p:sp>
+      <p:sp>
+        <p:nvSpPr>
+          <p:cNvPr id="4" name="Slide Number Placeholder 3"/>
+          <p:cNvSpPr>
+            <a:spLocks noGrp="1"/>
+          </p:cNvSpPr>
+          <p:nvPr>
+            <p:ph type="sldNum" sz="quarter" idx="10"/>
+          </p:nvPr>
+        </p:nvSpPr>
+        <p:spPr/>
+        <p:txBody>
+          <a:bodyPr/>
+          <a:lstStyle/>
+          <a:p>
+            <a:fld id="{F7021451-1387-4CA6-816F-3879F97B5CBC}" type="slidenum">
+              <a:rPr lang="en-US"/>
+              <a:t>12</a:t>
+            </a:fld>
+            <a:endParaRPr lang="en-US"/>
+          </a:p>
+        </p:txBody>
+      </p:sp>
+    </p:spTree>
+    <p:extLst>
+      <p:ext uri="{BB962C8B-B14F-4D97-AF65-F5344CB8AC3E}">
+        <p14:creationId xmlns:p14="http://schemas.microsoft.com/office/powerpoint/2010/main" val="1024086991"/>
+      </p:ext>
+    </p:extLst>
+  </p:cSld>
+  <p:clrMapOvr>
+    <a:masterClrMapping/>
+  </p:clrMapOvr>
+</p:notes>
+</file>
+
+<file path=ppt/notesSlides/notesSlide13.xml><?xml version="1.0" encoding="utf-8"?>
+<p:notes xmlns:a="http://schemas.openxmlformats.org/drawingml/2006/main" xmlns:r="http://schemas.openxmlformats.org/officeDocument/2006/relationships" xmlns:p="http://schemas.openxmlformats.org/presentationml/2006/main">
+  <p:cSld>
+    <p:spTree>
+      <p:nvGrpSpPr>
+        <p:cNvPr id="1" name=""/>
+        <p:cNvGrpSpPr/>
+        <p:nvPr/>
+      </p:nvGrpSpPr>
+      <p:grpSpPr>
+        <a:xfrm>
+          <a:off x="0" y="0"/>
+          <a:ext cx="0" cy="0"/>
+          <a:chOff x="0" y="0"/>
+          <a:chExt cx="0" cy="0"/>
+        </a:xfrm>
+      </p:grpSpPr>
+      <p:sp>
+        <p:nvSpPr>
+          <p:cNvPr id="2" name="Slide Image Placeholder 1"/>
+          <p:cNvSpPr>
+            <a:spLocks noGrp="1" noRot="1" noChangeAspect="1"/>
+          </p:cNvSpPr>
+          <p:nvPr>
+            <p:ph type="sldImg"/>
+          </p:nvPr>
+        </p:nvSpPr>
+        <p:spPr/>
+      </p:sp>
+      <p:sp>
+        <p:nvSpPr>
+          <p:cNvPr id="3" name="Notes Placeholder 2"/>
+          <p:cNvSpPr>
+            <a:spLocks noGrp="1"/>
+          </p:cNvSpPr>
+          <p:nvPr>
+            <p:ph type="body" idx="1"/>
+          </p:nvPr>
+        </p:nvSpPr>
+        <p:spPr/>
+        <p:txBody>
+          <a:bodyPr/>
+          <a:lstStyle/>
+          <a:p>
+            <a:r>
+              <a:rPr lang="en-US" dirty="0"/>
+              <a:t/>
+            </a:r>
+            <a:endParaRPr lang="en-US" dirty="0"/>
+          </a:p>
+        </p:txBody>
+      </p:sp>
+      <p:sp>
+        <p:nvSpPr>
+          <p:cNvPr id="4" name="Slide Number Placeholder 3"/>
+          <p:cNvSpPr>
+            <a:spLocks noGrp="1"/>
+          </p:cNvSpPr>
+          <p:nvPr>
+            <p:ph type="sldNum" sz="quarter" idx="10"/>
+          </p:nvPr>
+        </p:nvSpPr>
+        <p:spPr/>
+        <p:txBody>
+          <a:bodyPr/>
+          <a:lstStyle/>
+          <a:p>
+            <a:fld id="{F7021451-1387-4CA6-816F-3879F97B5CBC}" type="slidenum">
+              <a:rPr lang="en-US"/>
+              <a:t>13</a:t>
+            </a:fld>
+            <a:endParaRPr lang="en-US"/>
+          </a:p>
+        </p:txBody>
+      </p:sp>
+    </p:spTree>
+    <p:extLst>
+      <p:ext uri="{BB962C8B-B14F-4D97-AF65-F5344CB8AC3E}">
+        <p14:creationId xmlns:p14="http://schemas.microsoft.com/office/powerpoint/2010/main" val="1024086991"/>
+      </p:ext>
+    </p:extLst>
+  </p:cSld>
+  <p:clrMapOvr>
+    <a:masterClrMapping/>
+  </p:clrMapOvr>
+</p:notes>
+</file>
+
+<file path=ppt/notesSlides/notesSlide14.xml><?xml version="1.0" encoding="utf-8"?>
+<p:notes xmlns:a="http://schemas.openxmlformats.org/drawingml/2006/main" xmlns:r="http://schemas.openxmlformats.org/officeDocument/2006/relationships" xmlns:p="http://schemas.openxmlformats.org/presentationml/2006/main">
+  <p:cSld>
+    <p:spTree>
+      <p:nvGrpSpPr>
+        <p:cNvPr id="1" name=""/>
+        <p:cNvGrpSpPr/>
+        <p:nvPr/>
+      </p:nvGrpSpPr>
+      <p:grpSpPr>
+        <a:xfrm>
+          <a:off x="0" y="0"/>
+          <a:ext cx="0" cy="0"/>
+          <a:chOff x="0" y="0"/>
+          <a:chExt cx="0" cy="0"/>
+        </a:xfrm>
+      </p:grpSpPr>
+      <p:sp>
+        <p:nvSpPr>
+          <p:cNvPr id="2" name="Slide Image Placeholder 1"/>
+          <p:cNvSpPr>
+            <a:spLocks noGrp="1" noRot="1" noChangeAspect="1"/>
+          </p:cNvSpPr>
+          <p:nvPr>
+            <p:ph type="sldImg"/>
+          </p:nvPr>
+        </p:nvSpPr>
+        <p:spPr/>
+      </p:sp>
+      <p:sp>
+        <p:nvSpPr>
+          <p:cNvPr id="3" name="Notes Placeholder 2"/>
+          <p:cNvSpPr>
+            <a:spLocks noGrp="1"/>
+          </p:cNvSpPr>
+          <p:nvPr>
+            <p:ph type="body" idx="1"/>
+          </p:nvPr>
+        </p:nvSpPr>
+        <p:spPr/>
+        <p:txBody>
+          <a:bodyPr/>
+          <a:lstStyle/>
+          <a:p>
+            <a:r>
+              <a:rPr lang="en-US" dirty="0"/>
+              <a:t/>
+            </a:r>
+            <a:endParaRPr lang="en-US" dirty="0"/>
+          </a:p>
+        </p:txBody>
+      </p:sp>
+      <p:sp>
+        <p:nvSpPr>
+          <p:cNvPr id="4" name="Slide Number Placeholder 3"/>
+          <p:cNvSpPr>
+            <a:spLocks noGrp="1"/>
+          </p:cNvSpPr>
+          <p:nvPr>
+            <p:ph type="sldNum" sz="quarter" idx="10"/>
+          </p:nvPr>
+        </p:nvSpPr>
+        <p:spPr/>
+        <p:txBody>
+          <a:bodyPr/>
+          <a:lstStyle/>
+          <a:p>
+            <a:fld id="{F7021451-1387-4CA6-816F-3879F97B5CBC}" type="slidenum">
+              <a:rPr lang="en-US"/>
+              <a:t>14</a:t>
+            </a:fld>
+            <a:endParaRPr lang="en-US"/>
+          </a:p>
+        </p:txBody>
+      </p:sp>
+    </p:spTree>
+    <p:extLst>
+      <p:ext uri="{BB962C8B-B14F-4D97-AF65-F5344CB8AC3E}">
+        <p14:creationId xmlns:p14="http://schemas.microsoft.com/office/powerpoint/2010/main" val="1024086991"/>
+      </p:ext>
+    </p:extLst>
+  </p:cSld>
+  <p:clrMapOvr>
+    <a:masterClrMapping/>
+  </p:clrMapOvr>
+</p:notes>
+</file>
+
+<file path=ppt/notesSlides/notesSlide15.xml><?xml version="1.0" encoding="utf-8"?>
+<p:notes xmlns:a="http://schemas.openxmlformats.org/drawingml/2006/main" xmlns:r="http://schemas.openxmlformats.org/officeDocument/2006/relationships" xmlns:p="http://schemas.openxmlformats.org/presentationml/2006/main">
+  <p:cSld>
+    <p:spTree>
+      <p:nvGrpSpPr>
+        <p:cNvPr id="1" name=""/>
+        <p:cNvGrpSpPr/>
+        <p:nvPr/>
+      </p:nvGrpSpPr>
+      <p:grpSpPr>
+        <a:xfrm>
+          <a:off x="0" y="0"/>
+          <a:ext cx="0" cy="0"/>
+          <a:chOff x="0" y="0"/>
+          <a:chExt cx="0" cy="0"/>
+        </a:xfrm>
+      </p:grpSpPr>
+      <p:sp>
+        <p:nvSpPr>
+          <p:cNvPr id="2" name="Slide Image Placeholder 1"/>
+          <p:cNvSpPr>
+            <a:spLocks noGrp="1" noRot="1" noChangeAspect="1"/>
+          </p:cNvSpPr>
+          <p:nvPr>
+            <p:ph type="sldImg"/>
+          </p:nvPr>
+        </p:nvSpPr>
+        <p:spPr/>
+      </p:sp>
+      <p:sp>
+        <p:nvSpPr>
+          <p:cNvPr id="3" name="Notes Placeholder 2"/>
+          <p:cNvSpPr>
+            <a:spLocks noGrp="1"/>
+          </p:cNvSpPr>
+          <p:nvPr>
+            <p:ph type="body" idx="1"/>
+          </p:nvPr>
+        </p:nvSpPr>
+        <p:spPr/>
+        <p:txBody>
+          <a:bodyPr/>
+          <a:lstStyle/>
+          <a:p>
+            <a:r>
+              <a:rPr lang="en-US" dirty="0"/>
+              <a:t/>
+            </a:r>
+            <a:endParaRPr lang="en-US" dirty="0"/>
+          </a:p>
+        </p:txBody>
+      </p:sp>
+      <p:sp>
+        <p:nvSpPr>
+          <p:cNvPr id="4" name="Slide Number Placeholder 3"/>
+          <p:cNvSpPr>
+            <a:spLocks noGrp="1"/>
+          </p:cNvSpPr>
+          <p:nvPr>
+            <p:ph type="sldNum" sz="quarter" idx="10"/>
+          </p:nvPr>
+        </p:nvSpPr>
+        <p:spPr/>
+        <p:txBody>
+          <a:bodyPr/>
+          <a:lstStyle/>
+          <a:p>
+            <a:fld id="{F7021451-1387-4CA6-816F-3879F97B5CBC}" type="slidenum">
+              <a:rPr lang="en-US"/>
+              <a:t>15</a:t>
+            </a:fld>
+            <a:endParaRPr lang="en-US"/>
+          </a:p>
+        </p:txBody>
+      </p:sp>
+    </p:spTree>
+    <p:extLst>
+      <p:ext uri="{BB962C8B-B14F-4D97-AF65-F5344CB8AC3E}">
+        <p14:creationId xmlns:p14="http://schemas.microsoft.com/office/powerpoint/2010/main" val="1024086991"/>
+      </p:ext>
+    </p:extLst>
+  </p:cSld>
+  <p:clrMapOvr>
+    <a:masterClrMapping/>
+  </p:clrMapOvr>
+</p:notes>
+</file>
+
+<file path=ppt/notesSlides/notesSlide16.xml><?xml version="1.0" encoding="utf-8"?>
+<p:notes xmlns:a="http://schemas.openxmlformats.org/drawingml/2006/main" xmlns:r="http://schemas.openxmlformats.org/officeDocument/2006/relationships" xmlns:p="http://schemas.openxmlformats.org/presentationml/2006/main">
+  <p:cSld>
+    <p:spTree>
+      <p:nvGrpSpPr>
+        <p:cNvPr id="1" name=""/>
+        <p:cNvGrpSpPr/>
+        <p:nvPr/>
+      </p:nvGrpSpPr>
+      <p:grpSpPr>
+        <a:xfrm>
+          <a:off x="0" y="0"/>
+          <a:ext cx="0" cy="0"/>
+          <a:chOff x="0" y="0"/>
+          <a:chExt cx="0" cy="0"/>
+        </a:xfrm>
+      </p:grpSpPr>
+      <p:sp>
+        <p:nvSpPr>
+          <p:cNvPr id="2" name="Slide Image Placeholder 1"/>
+          <p:cNvSpPr>
+            <a:spLocks noGrp="1" noRot="1" noChangeAspect="1"/>
+          </p:cNvSpPr>
+          <p:nvPr>
+            <p:ph type="sldImg"/>
+          </p:nvPr>
+        </p:nvSpPr>
+        <p:spPr/>
+      </p:sp>
+      <p:sp>
+        <p:nvSpPr>
+          <p:cNvPr id="3" name="Notes Placeholder 2"/>
+          <p:cNvSpPr>
+            <a:spLocks noGrp="1"/>
+          </p:cNvSpPr>
+          <p:nvPr>
+            <p:ph type="body" idx="1"/>
+          </p:nvPr>
+        </p:nvSpPr>
+        <p:spPr/>
+        <p:txBody>
+          <a:bodyPr/>
+          <a:lstStyle/>
+          <a:p>
+            <a:r>
+              <a:rPr lang="en-US" dirty="0"/>
+              <a:t/>
+            </a:r>
+            <a:endParaRPr lang="en-US" dirty="0"/>
+          </a:p>
+        </p:txBody>
+      </p:sp>
+      <p:sp>
+        <p:nvSpPr>
+          <p:cNvPr id="4" name="Slide Number Placeholder 3"/>
+          <p:cNvSpPr>
+            <a:spLocks noGrp="1"/>
+          </p:cNvSpPr>
+          <p:nvPr>
+            <p:ph type="sldNum" sz="quarter" idx="10"/>
+          </p:nvPr>
+        </p:nvSpPr>
+        <p:spPr/>
+        <p:txBody>
+          <a:bodyPr/>
+          <a:lstStyle/>
+          <a:p>
+            <a:fld id="{F7021451-1387-4CA6-816F-3879F97B5CBC}" type="slidenum">
+              <a:rPr lang="en-US"/>
+              <a:t>16</a:t>
+            </a:fld>
+            <a:endParaRPr lang="en-US"/>
+          </a:p>
+        </p:txBody>
+      </p:sp>
+    </p:spTree>
+    <p:extLst>
+      <p:ext uri="{BB962C8B-B14F-4D97-AF65-F5344CB8AC3E}">
+        <p14:creationId xmlns:p14="http://schemas.microsoft.com/office/powerpoint/2010/main" val="1024086991"/>
+      </p:ext>
+    </p:extLst>
+  </p:cSld>
+  <p:clrMapOvr>
+    <a:masterClrMapping/>
+  </p:clrMapOvr>
+</p:notes>
+</file>
+
+<file path=ppt/notesSlides/notesSlide17.xml><?xml version="1.0" encoding="utf-8"?>
+<p:notes xmlns:a="http://schemas.openxmlformats.org/drawingml/2006/main" xmlns:r="http://schemas.openxmlformats.org/officeDocument/2006/relationships" xmlns:p="http://schemas.openxmlformats.org/presentationml/2006/main">
+  <p:cSld>
+    <p:spTree>
+      <p:nvGrpSpPr>
+        <p:cNvPr id="1" name=""/>
+        <p:cNvGrpSpPr/>
+        <p:nvPr/>
+      </p:nvGrpSpPr>
+      <p:grpSpPr>
+        <a:xfrm>
+          <a:off x="0" y="0"/>
+          <a:ext cx="0" cy="0"/>
+          <a:chOff x="0" y="0"/>
+          <a:chExt cx="0" cy="0"/>
+        </a:xfrm>
+      </p:grpSpPr>
+      <p:sp>
+        <p:nvSpPr>
+          <p:cNvPr id="2" name="Slide Image Placeholder 1"/>
+          <p:cNvSpPr>
+            <a:spLocks noGrp="1" noRot="1" noChangeAspect="1"/>
+          </p:cNvSpPr>
+          <p:nvPr>
+            <p:ph type="sldImg"/>
+          </p:nvPr>
+        </p:nvSpPr>
+        <p:spPr/>
+      </p:sp>
+      <p:sp>
+        <p:nvSpPr>
+          <p:cNvPr id="3" name="Notes Placeholder 2"/>
+          <p:cNvSpPr>
+            <a:spLocks noGrp="1"/>
+          </p:cNvSpPr>
+          <p:nvPr>
+            <p:ph type="body" idx="1"/>
+          </p:nvPr>
+        </p:nvSpPr>
+        <p:spPr/>
+        <p:txBody>
+          <a:bodyPr/>
+          <a:lstStyle/>
+          <a:p>
+            <a:r>
+              <a:rPr lang="en-US" dirty="0"/>
+              <a:t/>
+            </a:r>
+            <a:endParaRPr lang="en-US" dirty="0"/>
+          </a:p>
+        </p:txBody>
+      </p:sp>
+      <p:sp>
+        <p:nvSpPr>
+          <p:cNvPr id="4" name="Slide Number Placeholder 3"/>
+          <p:cNvSpPr>
+            <a:spLocks noGrp="1"/>
+          </p:cNvSpPr>
+          <p:nvPr>
+            <p:ph type="sldNum" sz="quarter" idx="10"/>
+          </p:nvPr>
+        </p:nvSpPr>
+        <p:spPr/>
+        <p:txBody>
+          <a:bodyPr/>
+          <a:lstStyle/>
+          <a:p>
+            <a:fld id="{F7021451-1387-4CA6-816F-3879F97B5CBC}" type="slidenum">
+              <a:rPr lang="en-US"/>
+              <a:t>17</a:t>
+            </a:fld>
+            <a:endParaRPr lang="en-US"/>
+          </a:p>
+        </p:txBody>
+      </p:sp>
+    </p:spTree>
+    <p:extLst>
+      <p:ext uri="{BB962C8B-B14F-4D97-AF65-F5344CB8AC3E}">
+        <p14:creationId xmlns:p14="http://schemas.microsoft.com/office/powerpoint/2010/main" val="1024086991"/>
+      </p:ext>
+    </p:extLst>
+  </p:cSld>
+  <p:clrMapOvr>
+    <a:masterClrMapping/>
+  </p:clrMapOvr>
+</p:notes>
+</file>
+
+<file path=ppt/notesSlides/notesSlide18.xml><?xml version="1.0" encoding="utf-8"?>
+<p:notes xmlns:a="http://schemas.openxmlformats.org/drawingml/2006/main" xmlns:r="http://schemas.openxmlformats.org/officeDocument/2006/relationships" xmlns:p="http://schemas.openxmlformats.org/presentationml/2006/main">
+  <p:cSld>
+    <p:spTree>
+      <p:nvGrpSpPr>
+        <p:cNvPr id="1" name=""/>
+        <p:cNvGrpSpPr/>
+        <p:nvPr/>
+      </p:nvGrpSpPr>
+      <p:grpSpPr>
+        <a:xfrm>
+          <a:off x="0" y="0"/>
+          <a:ext cx="0" cy="0"/>
+          <a:chOff x="0" y="0"/>
+          <a:chExt cx="0" cy="0"/>
+        </a:xfrm>
+      </p:grpSpPr>
+      <p:sp>
+        <p:nvSpPr>
+          <p:cNvPr id="2" name="Slide Image Placeholder 1"/>
+          <p:cNvSpPr>
+            <a:spLocks noGrp="1" noRot="1" noChangeAspect="1"/>
+          </p:cNvSpPr>
+          <p:nvPr>
+            <p:ph type="sldImg"/>
+          </p:nvPr>
+        </p:nvSpPr>
+        <p:spPr/>
+      </p:sp>
+      <p:sp>
+        <p:nvSpPr>
+          <p:cNvPr id="3" name="Notes Placeholder 2"/>
+          <p:cNvSpPr>
+            <a:spLocks noGrp="1"/>
+          </p:cNvSpPr>
+          <p:nvPr>
+            <p:ph type="body" idx="1"/>
+          </p:nvPr>
+        </p:nvSpPr>
+        <p:spPr/>
+        <p:txBody>
+          <a:bodyPr/>
+          <a:lstStyle/>
+          <a:p>
+            <a:r>
+              <a:rPr lang="en-US" dirty="0"/>
+              <a:t/>
+            </a:r>
+            <a:endParaRPr lang="en-US" dirty="0"/>
+          </a:p>
+        </p:txBody>
+      </p:sp>
+      <p:sp>
+        <p:nvSpPr>
+          <p:cNvPr id="4" name="Slide Number Placeholder 3"/>
+          <p:cNvSpPr>
+            <a:spLocks noGrp="1"/>
+          </p:cNvSpPr>
+          <p:nvPr>
+            <p:ph type="sldNum" sz="quarter" idx="10"/>
+          </p:nvPr>
+        </p:nvSpPr>
+        <p:spPr/>
+        <p:txBody>
+          <a:bodyPr/>
+          <a:lstStyle/>
+          <a:p>
+            <a:fld id="{F7021451-1387-4CA6-816F-3879F97B5CBC}" type="slidenum">
+              <a:rPr lang="en-US"/>
+              <a:t>18</a:t>
+            </a:fld>
+            <a:endParaRPr lang="en-US"/>
+          </a:p>
+        </p:txBody>
+      </p:sp>
+    </p:spTree>
+    <p:extLst>
+      <p:ext uri="{BB962C8B-B14F-4D97-AF65-F5344CB8AC3E}">
+        <p14:creationId xmlns:p14="http://schemas.microsoft.com/office/powerpoint/2010/main" val="1024086991"/>
+      </p:ext>
+    </p:extLst>
+  </p:cSld>
+  <p:clrMapOvr>
+    <a:masterClrMapping/>
+  </p:clrMapOvr>
+</p:notes>
+</file>
+
+<file path=ppt/notesSlides/notesSlide19.xml><?xml version="1.0" encoding="utf-8"?>
+<p:notes xmlns:a="http://schemas.openxmlformats.org/drawingml/2006/main" xmlns:r="http://schemas.openxmlformats.org/officeDocument/2006/relationships" xmlns:p="http://schemas.openxmlformats.org/presentationml/2006/main">
+  <p:cSld>
+    <p:spTree>
+      <p:nvGrpSpPr>
+        <p:cNvPr id="1" name=""/>
+        <p:cNvGrpSpPr/>
+        <p:nvPr/>
+      </p:nvGrpSpPr>
+      <p:grpSpPr>
+        <a:xfrm>
+          <a:off x="0" y="0"/>
+          <a:ext cx="0" cy="0"/>
+          <a:chOff x="0" y="0"/>
+          <a:chExt cx="0" cy="0"/>
+        </a:xfrm>
+      </p:grpSpPr>
+      <p:sp>
+        <p:nvSpPr>
+          <p:cNvPr id="2" name="Slide Image Placeholder 1"/>
+          <p:cNvSpPr>
+            <a:spLocks noGrp="1" noRot="1" noChangeAspect="1"/>
+          </p:cNvSpPr>
+          <p:nvPr>
+            <p:ph type="sldImg"/>
+          </p:nvPr>
+        </p:nvSpPr>
+        <p:spPr/>
+      </p:sp>
+      <p:sp>
+        <p:nvSpPr>
+          <p:cNvPr id="3" name="Notes Placeholder 2"/>
+          <p:cNvSpPr>
+            <a:spLocks noGrp="1"/>
+          </p:cNvSpPr>
+          <p:nvPr>
+            <p:ph type="body" idx="1"/>
+          </p:nvPr>
+        </p:nvSpPr>
+        <p:spPr/>
+        <p:txBody>
+          <a:bodyPr/>
+          <a:lstStyle/>
+          <a:p>
+            <a:r>
+              <a:rPr lang="en-US" dirty="0"/>
+              <a:t/>
+            </a:r>
+            <a:endParaRPr lang="en-US" dirty="0"/>
+          </a:p>
+        </p:txBody>
+      </p:sp>
+      <p:sp>
+        <p:nvSpPr>
+          <p:cNvPr id="4" name="Slide Number Placeholder 3"/>
+          <p:cNvSpPr>
+            <a:spLocks noGrp="1"/>
+          </p:cNvSpPr>
+          <p:nvPr>
+            <p:ph type="sldNum" sz="quarter" idx="10"/>
+          </p:nvPr>
+        </p:nvSpPr>
+        <p:spPr/>
+        <p:txBody>
+          <a:bodyPr/>
+          <a:lstStyle/>
+          <a:p>
+            <a:fld id="{F7021451-1387-4CA6-816F-3879F97B5CBC}" type="slidenum">
+              <a:rPr lang="en-US"/>
+              <a:t>19</a:t>
             </a:fld>
             <a:endParaRPr lang="en-US"/>
           </a:p>
@@ -1737,6 +2627,4820 @@
 </p:sld>
 </file>
 
+<file path=ppt/slides/slide10.xml><?xml version="1.0" encoding="utf-8"?>
+<p:sld xmlns:a="http://schemas.openxmlformats.org/drawingml/2006/main" xmlns:r="http://schemas.openxmlformats.org/officeDocument/2006/relationships" xmlns:p="http://schemas.openxmlformats.org/presentationml/2006/main">
+  <p:cSld name="Slide 10">
+    <p:spTree>
+      <p:nvGrpSpPr>
+        <p:cNvPr id="1" name=""/>
+        <p:cNvGrpSpPr/>
+        <p:nvPr/>
+      </p:nvGrpSpPr>
+      <p:grpSpPr>
+        <a:xfrm>
+          <a:off x="0" y="0"/>
+          <a:ext cx="0" cy="0"/>
+          <a:chOff x="0" y="0"/>
+          <a:chExt cx="0" cy="0"/>
+        </a:xfrm>
+      </p:grpSpPr>
+      <p:sp>
+        <p:nvSpPr>
+          <p:cNvPr id="2" name="Shape 0"/>
+          <p:cNvSpPr/>
+          <p:nvPr/>
+        </p:nvSpPr>
+        <p:spPr>
+          <a:xfrm>
+            <a:off x="0" y="0"/>
+            <a:ext cx="12188952" cy="777240"/>
+          </a:xfrm>
+          <a:prstGeom prst="rect">
+            <a:avLst/>
+          </a:prstGeom>
+          <a:solidFill>
+            <a:srgbClr val="303F9F"/>
+          </a:solidFill>
+          <a:ln w="12700">
+            <a:solidFill>
+              <a:srgbClr val="303F9F"/>
+            </a:solidFill>
+            <a:prstDash val="solid"/>
+          </a:ln>
+        </p:spPr>
+      </p:sp>
+      <p:sp>
+        <p:nvSpPr>
+          <p:cNvPr id="3" name="Text 1"/>
+          <p:cNvSpPr/>
+          <p:nvPr/>
+        </p:nvSpPr>
+        <p:spPr>
+          <a:xfrm>
+            <a:off x="365760" y="0"/>
+            <a:ext cx="11457432" cy="777240"/>
+          </a:xfrm>
+          <a:prstGeom prst="rect">
+            <a:avLst/>
+          </a:prstGeom>
+          <a:noFill/>
+          <a:ln/>
+        </p:spPr>
+        <p:txBody>
+          <a:bodyPr wrap="square" rtlCol="0" anchor="ctr"/>
+          <a:lstStyle/>
+          <a:p>
+            <a:pPr indent="0" marL="0">
+              <a:buNone/>
+            </a:pPr>
+            <a:r>
+              <a:rPr lang="en-US" sz="2300" b="1" dirty="0">
+                <a:solidFill>
+                  <a:srgbClr val="FFFFFF"/>
+                </a:solidFill>
+                <a:latin typeface="Arial" pitchFamily="34" charset="0"/>
+                <a:ea typeface="Arial" pitchFamily="34" charset="-122"/>
+                <a:cs typeface="Arial" pitchFamily="34" charset="-120"/>
+              </a:rPr>
+              <a:t>En DIA — marca de destrucción (✕)</a:t>
+            </a:r>
+            <a:endParaRPr lang="en-US" sz="2300" dirty="0"/>
+          </a:p>
+        </p:txBody>
+      </p:sp>
+      <p:sp>
+        <p:nvSpPr>
+          <p:cNvPr id="4" name="Text 2"/>
+          <p:cNvSpPr/>
+          <p:nvPr/>
+        </p:nvSpPr>
+        <p:spPr>
+          <a:xfrm>
+            <a:off x="548640" y="1051560"/>
+            <a:ext cx="11091672" cy="1097280"/>
+          </a:xfrm>
+          <a:prstGeom prst="rect">
+            <a:avLst/>
+          </a:prstGeom>
+          <a:noFill/>
+          <a:ln/>
+        </p:spPr>
+        <p:txBody>
+          <a:bodyPr wrap="square" rtlCol="0" anchor="t"/>
+          <a:lstStyle/>
+          <a:p>
+            <a:pPr indent="0" marL="0">
+              <a:spcAft>
+                <a:spcPts val="800"/>
+              </a:spcAft>
+              <a:buNone/>
+            </a:pPr>
+            <a:r>
+              <a:rPr lang="en-US" sz="1600" dirty="0">
+                <a:solidFill>
+                  <a:srgbClr val="212121"/>
+                </a:solidFill>
+                <a:latin typeface="Arial" pitchFamily="34" charset="0"/>
+                <a:ea typeface="Arial" pitchFamily="34" charset="-122"/>
+                <a:cs typeface="Arial" pitchFamily="34" charset="-120"/>
+              </a:rPr>
+              <a:t>•  Doble clic sobre la línea de vida del objeto → "Dibujar marca de destrucción" → Sí.</a:t>
+            </a:r>
+            <a:endParaRPr lang="en-US" sz="1600" dirty="0"/>
+          </a:p>
+          <a:p>
+            <a:pPr indent="0" marL="0">
+              <a:spcAft>
+                <a:spcPts val="800"/>
+              </a:spcAft>
+              <a:buNone/>
+            </a:pPr>
+            <a:r>
+              <a:rPr lang="en-US" sz="1600" dirty="0">
+                <a:solidFill>
+                  <a:srgbClr val="212121"/>
+                </a:solidFill>
+                <a:latin typeface="Arial" pitchFamily="34" charset="0"/>
+                <a:ea typeface="Arial" pitchFamily="34" charset="-122"/>
+                <a:cs typeface="Arial" pitchFamily="34" charset="-120"/>
+              </a:rPr>
+              <a:t>•  El mensaje que lo destruye debe ser de tipo Destruir.</a:t>
+            </a:r>
+            <a:endParaRPr lang="en-US" sz="1600" dirty="0"/>
+          </a:p>
+        </p:txBody>
+      </p:sp>
+      <p:sp>
+        <p:nvSpPr>
+          <p:cNvPr id="5" name="Shape 3"/>
+          <p:cNvSpPr/>
+          <p:nvPr/>
+        </p:nvSpPr>
+        <p:spPr>
+          <a:xfrm>
+            <a:off x="1280160" y="2514600"/>
+            <a:ext cx="4023360" cy="2487168"/>
+          </a:xfrm>
+          <a:prstGeom prst="rect">
+            <a:avLst/>
+          </a:prstGeom>
+          <a:ln w="12700">
+            <a:solidFill>
+              <a:srgbClr val="EEEEEE"/>
+            </a:solidFill>
+            <a:prstDash val="solid"/>
+          </a:ln>
+        </p:spPr>
+      </p:sp>
+      <p:pic>
+        <p:nvPicPr>
+          <p:cNvPr id="6" name="Image 0" descr="C:/Users/Aitor/Documents/apuntes-profe/entornos-de-desarrollo/docs/tema6/img/dia-lifeline-destruccion.png">    </p:cNvPr>
+          <p:cNvPicPr>
+            <a:picLocks noChangeAspect="1"/>
+          </p:cNvPicPr>
+          <p:nvPr/>
+        </p:nvPicPr>
+        <p:blipFill>
+          <a:blip r:embed="rId1"/>
+          <a:stretch>
+            <a:fillRect/>
+          </a:stretch>
+        </p:blipFill>
+        <p:spPr>
+          <a:xfrm>
+            <a:off x="1280160" y="2514600"/>
+            <a:ext cx="4023360" cy="2487168"/>
+          </a:xfrm>
+          <a:prstGeom prst="rect">
+            <a:avLst/>
+          </a:prstGeom>
+        </p:spPr>
+      </p:pic>
+      <p:sp>
+        <p:nvSpPr>
+          <p:cNvPr id="7" name="Text 4"/>
+          <p:cNvSpPr/>
+          <p:nvPr/>
+        </p:nvSpPr>
+        <p:spPr>
+          <a:xfrm>
+            <a:off x="1005840" y="5029200"/>
+            <a:ext cx="4572000" cy="320040"/>
+          </a:xfrm>
+          <a:prstGeom prst="rect">
+            <a:avLst/>
+          </a:prstGeom>
+          <a:noFill/>
+          <a:ln/>
+        </p:spPr>
+        <p:txBody>
+          <a:bodyPr wrap="square" rtlCol="0" anchor="t"/>
+          <a:lstStyle/>
+          <a:p>
+            <a:pPr algn="ctr" indent="0" marL="0">
+              <a:buNone/>
+            </a:pPr>
+            <a:r>
+              <a:rPr lang="en-US" sz="1100" i="1" dirty="0">
+                <a:solidFill>
+                  <a:srgbClr val="757575"/>
+                </a:solidFill>
+                <a:latin typeface="Arial" pitchFamily="34" charset="0"/>
+                <a:ea typeface="Arial" pitchFamily="34" charset="-122"/>
+                <a:cs typeface="Arial" pitchFamily="34" charset="-120"/>
+              </a:rPr>
+              <a:t>Activar "Dibujar marca de destrucción" en la línea de vida</a:t>
+            </a:r>
+            <a:endParaRPr lang="en-US" sz="1100" dirty="0"/>
+          </a:p>
+        </p:txBody>
+      </p:sp>
+      <p:sp>
+        <p:nvSpPr>
+          <p:cNvPr id="8" name="Shape 5"/>
+          <p:cNvSpPr/>
+          <p:nvPr/>
+        </p:nvSpPr>
+        <p:spPr>
+          <a:xfrm>
+            <a:off x="6035040" y="2514600"/>
+            <a:ext cx="4023360" cy="2505456"/>
+          </a:xfrm>
+          <a:prstGeom prst="rect">
+            <a:avLst/>
+          </a:prstGeom>
+          <a:ln w="12700">
+            <a:solidFill>
+              <a:srgbClr val="EEEEEE"/>
+            </a:solidFill>
+            <a:prstDash val="solid"/>
+          </a:ln>
+        </p:spPr>
+      </p:sp>
+      <p:pic>
+        <p:nvPicPr>
+          <p:cNvPr id="9" name="Image 1" descr="C:/Users/Aitor/Documents/apuntes-profe/entornos-de-desarrollo/docs/tema6/img/dia-mensaje-destruir.png">    </p:cNvPr>
+          <p:cNvPicPr>
+            <a:picLocks noChangeAspect="1"/>
+          </p:cNvPicPr>
+          <p:nvPr/>
+        </p:nvPicPr>
+        <p:blipFill>
+          <a:blip r:embed="rId2"/>
+          <a:stretch>
+            <a:fillRect/>
+          </a:stretch>
+        </p:blipFill>
+        <p:spPr>
+          <a:xfrm>
+            <a:off x="6035040" y="2514600"/>
+            <a:ext cx="4023360" cy="2505456"/>
+          </a:xfrm>
+          <a:prstGeom prst="rect">
+            <a:avLst/>
+          </a:prstGeom>
+        </p:spPr>
+      </p:pic>
+      <p:sp>
+        <p:nvSpPr>
+          <p:cNvPr id="10" name="Text 6"/>
+          <p:cNvSpPr/>
+          <p:nvPr/>
+        </p:nvSpPr>
+        <p:spPr>
+          <a:xfrm>
+            <a:off x="5760720" y="5047488"/>
+            <a:ext cx="4572000" cy="320040"/>
+          </a:xfrm>
+          <a:prstGeom prst="rect">
+            <a:avLst/>
+          </a:prstGeom>
+          <a:noFill/>
+          <a:ln/>
+        </p:spPr>
+        <p:txBody>
+          <a:bodyPr wrap="square" rtlCol="0" anchor="t"/>
+          <a:lstStyle/>
+          <a:p>
+            <a:pPr algn="ctr" indent="0" marL="0">
+              <a:buNone/>
+            </a:pPr>
+            <a:r>
+              <a:rPr lang="en-US" sz="1100" i="1" dirty="0">
+                <a:solidFill>
+                  <a:srgbClr val="757575"/>
+                </a:solidFill>
+                <a:latin typeface="Arial" pitchFamily="34" charset="0"/>
+                <a:ea typeface="Arial" pitchFamily="34" charset="-122"/>
+                <a:cs typeface="Arial" pitchFamily="34" charset="-120"/>
+              </a:rPr>
+              <a:t>Tipo "Destruir": la flecha apunta al objeto que desaparece</a:t>
+            </a:r>
+            <a:endParaRPr lang="en-US" sz="1100" dirty="0"/>
+          </a:p>
+        </p:txBody>
+      </p:sp>
+      <p:sp>
+        <p:nvSpPr>
+          <p:cNvPr id="11" name="Text 7"/>
+          <p:cNvSpPr/>
+          <p:nvPr/>
+        </p:nvSpPr>
+        <p:spPr>
+          <a:xfrm>
+            <a:off x="548640" y="6473952"/>
+            <a:ext cx="11091672" cy="292608"/>
+          </a:xfrm>
+          <a:prstGeom prst="rect">
+            <a:avLst/>
+          </a:prstGeom>
+          <a:noFill/>
+          <a:ln/>
+        </p:spPr>
+        <p:txBody>
+          <a:bodyPr wrap="square" rtlCol="0" anchor="ctr"/>
+          <a:lstStyle/>
+          <a:p>
+            <a:pPr algn="r" indent="0" marL="0">
+              <a:buNone/>
+            </a:pPr>
+            <a:r>
+              <a:rPr lang="en-US" sz="1100" dirty="0">
+                <a:solidFill>
+                  <a:srgbClr val="757575"/>
+                </a:solidFill>
+                <a:latin typeface="Arial" pitchFamily="34" charset="0"/>
+                <a:ea typeface="Arial" pitchFamily="34" charset="-122"/>
+                <a:cs typeface="Arial" pitchFamily="34" charset="-120"/>
+              </a:rPr>
+              <a:t>Entornos de Desarrollo — Tema 6 · Diagramas de interacción</a:t>
+            </a:r>
+            <a:endParaRPr lang="en-US" sz="1100" dirty="0"/>
+          </a:p>
+        </p:txBody>
+      </p:sp>
+    </p:spTree>
+  </p:cSld>
+  <p:clrMapOvr>
+    <a:masterClrMapping/>
+  </p:clrMapOvr>
+</p:sld>
+</file>
+
+<file path=ppt/slides/slide11.xml><?xml version="1.0" encoding="utf-8"?>
+<p:sld xmlns:a="http://schemas.openxmlformats.org/drawingml/2006/main" xmlns:r="http://schemas.openxmlformats.org/officeDocument/2006/relationships" xmlns:p="http://schemas.openxmlformats.org/presentationml/2006/main">
+  <p:cSld name="Slide 11">
+    <p:spTree>
+      <p:nvGrpSpPr>
+        <p:cNvPr id="1" name=""/>
+        <p:cNvGrpSpPr/>
+        <p:nvPr/>
+      </p:nvGrpSpPr>
+      <p:grpSpPr>
+        <a:xfrm>
+          <a:off x="0" y="0"/>
+          <a:ext cx="0" cy="0"/>
+          <a:chOff x="0" y="0"/>
+          <a:chExt cx="0" cy="0"/>
+        </a:xfrm>
+      </p:grpSpPr>
+      <p:sp>
+        <p:nvSpPr>
+          <p:cNvPr id="2" name="Shape 0"/>
+          <p:cNvSpPr/>
+          <p:nvPr/>
+        </p:nvSpPr>
+        <p:spPr>
+          <a:xfrm>
+            <a:off x="0" y="0"/>
+            <a:ext cx="12188952" cy="777240"/>
+          </a:xfrm>
+          <a:prstGeom prst="rect">
+            <a:avLst/>
+          </a:prstGeom>
+          <a:solidFill>
+            <a:srgbClr val="303F9F"/>
+          </a:solidFill>
+          <a:ln w="12700">
+            <a:solidFill>
+              <a:srgbClr val="303F9F"/>
+            </a:solidFill>
+            <a:prstDash val="solid"/>
+          </a:ln>
+        </p:spPr>
+      </p:sp>
+      <p:sp>
+        <p:nvSpPr>
+          <p:cNvPr id="3" name="Text 1"/>
+          <p:cNvSpPr/>
+          <p:nvPr/>
+        </p:nvSpPr>
+        <p:spPr>
+          <a:xfrm>
+            <a:off x="365760" y="0"/>
+            <a:ext cx="11457432" cy="777240"/>
+          </a:xfrm>
+          <a:prstGeom prst="rect">
+            <a:avLst/>
+          </a:prstGeom>
+          <a:noFill/>
+          <a:ln/>
+        </p:spPr>
+        <p:txBody>
+          <a:bodyPr wrap="square" rtlCol="0" anchor="ctr"/>
+          <a:lstStyle/>
+          <a:p>
+            <a:pPr indent="0" marL="0">
+              <a:buNone/>
+            </a:pPr>
+            <a:r>
+              <a:rPr lang="en-US" sz="2300" b="1" dirty="0">
+                <a:solidFill>
+                  <a:srgbClr val="FFFFFF"/>
+                </a:solidFill>
+                <a:latin typeface="Arial" pitchFamily="34" charset="0"/>
+                <a:ea typeface="Arial" pitchFamily="34" charset="-122"/>
+                <a:cs typeface="Arial" pitchFamily="34" charset="-120"/>
+              </a:rPr>
+              <a:t>Resumen de tipos de mensaje</a:t>
+            </a:r>
+            <a:endParaRPr lang="en-US" sz="2300" dirty="0"/>
+          </a:p>
+        </p:txBody>
+      </p:sp>
+      <p:sp>
+        <p:nvSpPr>
+          <p:cNvPr id="4" name="Shape 2"/>
+          <p:cNvSpPr/>
+          <p:nvPr/>
+        </p:nvSpPr>
+        <p:spPr>
+          <a:xfrm>
+            <a:off x="2880360" y="1097280"/>
+            <a:ext cx="6400800" cy="4700016"/>
+          </a:xfrm>
+          <a:prstGeom prst="rect">
+            <a:avLst/>
+          </a:prstGeom>
+          <a:ln w="12700">
+            <a:solidFill>
+              <a:srgbClr val="EEEEEE"/>
+            </a:solidFill>
+            <a:prstDash val="solid"/>
+          </a:ln>
+        </p:spPr>
+      </p:sp>
+      <p:pic>
+        <p:nvPicPr>
+          <p:cNvPr id="5" name="Image 0" descr="C:/Users/Aitor/Documents/apuntes-profe/entornos-de-desarrollo/docs/tema6/img/secuencia-tipos-resumen.png">    </p:cNvPr>
+          <p:cNvPicPr>
+            <a:picLocks noChangeAspect="1"/>
+          </p:cNvPicPr>
+          <p:nvPr/>
+        </p:nvPicPr>
+        <p:blipFill>
+          <a:blip r:embed="rId1"/>
+          <a:stretch>
+            <a:fillRect/>
+          </a:stretch>
+        </p:blipFill>
+        <p:spPr>
+          <a:xfrm>
+            <a:off x="2880360" y="1097280"/>
+            <a:ext cx="6400800" cy="4700016"/>
+          </a:xfrm>
+          <a:prstGeom prst="rect">
+            <a:avLst/>
+          </a:prstGeom>
+        </p:spPr>
+      </p:pic>
+      <p:sp>
+        <p:nvSpPr>
+          <p:cNvPr id="6" name="Text 3"/>
+          <p:cNvSpPr/>
+          <p:nvPr/>
+        </p:nvSpPr>
+        <p:spPr>
+          <a:xfrm>
+            <a:off x="2606040" y="5824728"/>
+            <a:ext cx="6949440" cy="320040"/>
+          </a:xfrm>
+          <a:prstGeom prst="rect">
+            <a:avLst/>
+          </a:prstGeom>
+          <a:noFill/>
+          <a:ln/>
+        </p:spPr>
+        <p:txBody>
+          <a:bodyPr wrap="square" rtlCol="0" anchor="t"/>
+          <a:lstStyle/>
+          <a:p>
+            <a:pPr algn="ctr" indent="0" marL="0">
+              <a:buNone/>
+            </a:pPr>
+            <a:r>
+              <a:rPr lang="en-US" sz="1200" i="1" dirty="0">
+                <a:solidFill>
+                  <a:srgbClr val="757575"/>
+                </a:solidFill>
+                <a:latin typeface="Arial" pitchFamily="34" charset="0"/>
+                <a:ea typeface="Arial" pitchFamily="34" charset="-122"/>
+                <a:cs typeface="Arial" pitchFamily="34" charset="-120"/>
+              </a:rPr>
+              <a:t>Resumen: llamada síncrona, retorno, autollamada, creación y destrucción</a:t>
+            </a:r>
+            <a:endParaRPr lang="en-US" sz="1200" dirty="0"/>
+          </a:p>
+        </p:txBody>
+      </p:sp>
+      <p:sp>
+        <p:nvSpPr>
+          <p:cNvPr id="7" name="Text 4"/>
+          <p:cNvSpPr/>
+          <p:nvPr/>
+        </p:nvSpPr>
+        <p:spPr>
+          <a:xfrm>
+            <a:off x="548640" y="6473952"/>
+            <a:ext cx="11091672" cy="292608"/>
+          </a:xfrm>
+          <a:prstGeom prst="rect">
+            <a:avLst/>
+          </a:prstGeom>
+          <a:noFill/>
+          <a:ln/>
+        </p:spPr>
+        <p:txBody>
+          <a:bodyPr wrap="square" rtlCol="0" anchor="ctr"/>
+          <a:lstStyle/>
+          <a:p>
+            <a:pPr algn="r" indent="0" marL="0">
+              <a:buNone/>
+            </a:pPr>
+            <a:r>
+              <a:rPr lang="en-US" sz="1100" dirty="0">
+                <a:solidFill>
+                  <a:srgbClr val="757575"/>
+                </a:solidFill>
+                <a:latin typeface="Arial" pitchFamily="34" charset="0"/>
+                <a:ea typeface="Arial" pitchFamily="34" charset="-122"/>
+                <a:cs typeface="Arial" pitchFamily="34" charset="-120"/>
+              </a:rPr>
+              <a:t>Entornos de Desarrollo — Tema 6 · Diagramas de interacción</a:t>
+            </a:r>
+            <a:endParaRPr lang="en-US" sz="1100" dirty="0"/>
+          </a:p>
+        </p:txBody>
+      </p:sp>
+    </p:spTree>
+  </p:cSld>
+  <p:clrMapOvr>
+    <a:masterClrMapping/>
+  </p:clrMapOvr>
+</p:sld>
+</file>
+
+<file path=ppt/slides/slide12.xml><?xml version="1.0" encoding="utf-8"?>
+<p:sld xmlns:a="http://schemas.openxmlformats.org/drawingml/2006/main" xmlns:r="http://schemas.openxmlformats.org/officeDocument/2006/relationships" xmlns:p="http://schemas.openxmlformats.org/presentationml/2006/main">
+  <p:cSld name="Slide 12">
+    <p:spTree>
+      <p:nvGrpSpPr>
+        <p:cNvPr id="1" name=""/>
+        <p:cNvGrpSpPr/>
+        <p:nvPr/>
+      </p:nvGrpSpPr>
+      <p:grpSpPr>
+        <a:xfrm>
+          <a:off x="0" y="0"/>
+          <a:ext cx="0" cy="0"/>
+          <a:chOff x="0" y="0"/>
+          <a:chExt cx="0" cy="0"/>
+        </a:xfrm>
+      </p:grpSpPr>
+      <p:sp>
+        <p:nvSpPr>
+          <p:cNvPr id="2" name="Shape 0"/>
+          <p:cNvSpPr/>
+          <p:nvPr/>
+        </p:nvSpPr>
+        <p:spPr>
+          <a:xfrm>
+            <a:off x="0" y="0"/>
+            <a:ext cx="12188952" cy="777240"/>
+          </a:xfrm>
+          <a:prstGeom prst="rect">
+            <a:avLst/>
+          </a:prstGeom>
+          <a:solidFill>
+            <a:srgbClr val="303F9F"/>
+          </a:solidFill>
+          <a:ln w="12700">
+            <a:solidFill>
+              <a:srgbClr val="303F9F"/>
+            </a:solidFill>
+            <a:prstDash val="solid"/>
+          </a:ln>
+        </p:spPr>
+      </p:sp>
+      <p:sp>
+        <p:nvSpPr>
+          <p:cNvPr id="3" name="Text 1"/>
+          <p:cNvSpPr/>
+          <p:nvPr/>
+        </p:nvSpPr>
+        <p:spPr>
+          <a:xfrm>
+            <a:off x="365760" y="0"/>
+            <a:ext cx="11457432" cy="777240"/>
+          </a:xfrm>
+          <a:prstGeom prst="rect">
+            <a:avLst/>
+          </a:prstGeom>
+          <a:noFill/>
+          <a:ln/>
+        </p:spPr>
+        <p:txBody>
+          <a:bodyPr wrap="square" rtlCol="0" anchor="ctr"/>
+          <a:lstStyle/>
+          <a:p>
+            <a:pPr indent="0" marL="0">
+              <a:buNone/>
+            </a:pPr>
+            <a:r>
+              <a:rPr lang="en-US" sz="2300" b="1" dirty="0">
+                <a:solidFill>
+                  <a:srgbClr val="FFFFFF"/>
+                </a:solidFill>
+                <a:latin typeface="Arial" pitchFamily="34" charset="0"/>
+                <a:ea typeface="Arial" pitchFamily="34" charset="-122"/>
+                <a:cs typeface="Arial" pitchFamily="34" charset="-120"/>
+              </a:rPr>
+              <a:t>Ejemplo leído paso a paso: llamada telefónica</a:t>
+            </a:r>
+            <a:endParaRPr lang="en-US" sz="2300" dirty="0"/>
+          </a:p>
+        </p:txBody>
+      </p:sp>
+      <p:pic>
+        <p:nvPicPr>
+          <p:cNvPr id="4" name="Image 0" descr="C:/Users/Aitor/Documents/apuntes-profe/entornos-de-desarrollo/docs/tema6/img/secuencia-llamada-completo.png">    </p:cNvPr>
+          <p:cNvPicPr>
+            <a:picLocks noChangeAspect="1"/>
+          </p:cNvPicPr>
+          <p:nvPr/>
+        </p:nvPicPr>
+        <p:blipFill>
+          <a:blip r:embed="rId1"/>
+          <a:stretch>
+            <a:fillRect/>
+          </a:stretch>
+        </p:blipFill>
+        <p:spPr>
+          <a:xfrm>
+            <a:off x="457200" y="1051560"/>
+            <a:ext cx="5577840" cy="3749040"/>
+          </a:xfrm>
+          <a:prstGeom prst="rect">
+            <a:avLst/>
+          </a:prstGeom>
+        </p:spPr>
+      </p:pic>
+      <p:sp>
+        <p:nvSpPr>
+          <p:cNvPr id="5" name="Text 2"/>
+          <p:cNvSpPr/>
+          <p:nvPr/>
+        </p:nvSpPr>
+        <p:spPr>
+          <a:xfrm>
+            <a:off x="6309360" y="1097280"/>
+            <a:ext cx="5394960" cy="3657600"/>
+          </a:xfrm>
+          <a:prstGeom prst="rect">
+            <a:avLst/>
+          </a:prstGeom>
+          <a:noFill/>
+          <a:ln/>
+        </p:spPr>
+        <p:txBody>
+          <a:bodyPr wrap="square" rtlCol="0" anchor="t"/>
+          <a:lstStyle/>
+          <a:p>
+            <a:pPr indent="0" marL="0">
+              <a:spcAft>
+                <a:spcPts val="800"/>
+              </a:spcAft>
+              <a:buNone/>
+            </a:pPr>
+            <a:r>
+              <a:rPr lang="en-US" sz="1300" dirty="0">
+                <a:solidFill>
+                  <a:srgbClr val="212121"/>
+                </a:solidFill>
+                <a:latin typeface="Arial" pitchFamily="34" charset="0"/>
+                <a:ea typeface="Arial" pitchFamily="34" charset="-122"/>
+                <a:cs typeface="Arial" pitchFamily="34" charset="-120"/>
+              </a:rPr>
+              <a:t>•  1. Marcar Número(): el vendedor llama a la centralita; su activación se abre.</a:t>
+            </a:r>
+            <a:endParaRPr lang="en-US" sz="1300" dirty="0"/>
+          </a:p>
+          <a:p>
+            <a:pPr indent="0" marL="0">
+              <a:spcAft>
+                <a:spcPts val="800"/>
+              </a:spcAft>
+              <a:buNone/>
+            </a:pPr>
+            <a:r>
+              <a:rPr lang="en-US" sz="1300" dirty="0">
+                <a:solidFill>
+                  <a:srgbClr val="212121"/>
+                </a:solidFill>
+                <a:latin typeface="Arial" pitchFamily="34" charset="0"/>
+                <a:ea typeface="Arial" pitchFamily="34" charset="-122"/>
+                <a:cs typeface="Arial" pitchFamily="34" charset="-120"/>
+              </a:rPr>
+              <a:t>•  2. Dar Tonos(): la empresa responde con los tonos de espera.</a:t>
+            </a:r>
+            <a:endParaRPr lang="en-US" sz="1300" dirty="0"/>
+          </a:p>
+          <a:p>
+            <a:pPr indent="0" marL="0">
+              <a:spcAft>
+                <a:spcPts val="800"/>
+              </a:spcAft>
+              <a:buNone/>
+            </a:pPr>
+            <a:r>
+              <a:rPr lang="en-US" sz="1300" dirty="0">
+                <a:solidFill>
+                  <a:srgbClr val="212121"/>
+                </a:solidFill>
+                <a:latin typeface="Arial" pitchFamily="34" charset="0"/>
+                <a:ea typeface="Arial" pitchFamily="34" charset="-122"/>
+                <a:cs typeface="Arial" pitchFamily="34" charset="-120"/>
+              </a:rPr>
+              <a:t>•  3. Sonar Timbre(): a la vez, hace sonar el teléfono del abonado.</a:t>
+            </a:r>
+            <a:endParaRPr lang="en-US" sz="1300" dirty="0"/>
+          </a:p>
+          <a:p>
+            <a:pPr indent="0" marL="0">
+              <a:spcAft>
+                <a:spcPts val="800"/>
+              </a:spcAft>
+              <a:buNone/>
+            </a:pPr>
+            <a:r>
+              <a:rPr lang="en-US" sz="1300" dirty="0">
+                <a:solidFill>
+                  <a:srgbClr val="212121"/>
+                </a:solidFill>
+                <a:latin typeface="Arial" pitchFamily="34" charset="0"/>
+                <a:ea typeface="Arial" pitchFamily="34" charset="-122"/>
+                <a:cs typeface="Arial" pitchFamily="34" charset="-120"/>
+              </a:rPr>
+              <a:t>•  4. Descolgar(): el abonado responde.</a:t>
+            </a:r>
+            <a:endParaRPr lang="en-US" sz="1300" dirty="0"/>
+          </a:p>
+          <a:p>
+            <a:pPr indent="0" marL="0">
+              <a:spcAft>
+                <a:spcPts val="800"/>
+              </a:spcAft>
+              <a:buNone/>
+            </a:pPr>
+            <a:r>
+              <a:rPr lang="en-US" sz="1300" dirty="0">
+                <a:solidFill>
+                  <a:srgbClr val="212121"/>
+                </a:solidFill>
+                <a:latin typeface="Arial" pitchFamily="34" charset="0"/>
+                <a:ea typeface="Arial" pitchFamily="34" charset="-122"/>
+                <a:cs typeface="Arial" pitchFamily="34" charset="-120"/>
+              </a:rPr>
+              <a:t>•  5. Llamada Aceptada(): la empresa avisa al vendedor de que hay línea.</a:t>
+            </a:r>
+            <a:endParaRPr lang="en-US" sz="1300" dirty="0"/>
+          </a:p>
+          <a:p>
+            <a:pPr indent="0" marL="0">
+              <a:spcAft>
+                <a:spcPts val="800"/>
+              </a:spcAft>
+              <a:buNone/>
+            </a:pPr>
+            <a:r>
+              <a:rPr lang="en-US" sz="1300" dirty="0">
+                <a:solidFill>
+                  <a:srgbClr val="212121"/>
+                </a:solidFill>
+                <a:latin typeface="Arial" pitchFamily="34" charset="0"/>
+                <a:ea typeface="Arial" pitchFamily="34" charset="-122"/>
+                <a:cs typeface="Arial" pitchFamily="34" charset="-120"/>
+              </a:rPr>
+              <a:t>•  6. Vender Producto(): el vendedor habla DIRECTAMENTE con el abonado.</a:t>
+            </a:r>
+            <a:endParaRPr lang="en-US" sz="1300" dirty="0"/>
+          </a:p>
+          <a:p>
+            <a:pPr indent="0" marL="0">
+              <a:spcAft>
+                <a:spcPts val="800"/>
+              </a:spcAft>
+              <a:buNone/>
+            </a:pPr>
+            <a:r>
+              <a:rPr lang="en-US" sz="1300" dirty="0">
+                <a:solidFill>
+                  <a:srgbClr val="212121"/>
+                </a:solidFill>
+                <a:latin typeface="Arial" pitchFamily="34" charset="0"/>
+                <a:ea typeface="Arial" pitchFamily="34" charset="-122"/>
+                <a:cs typeface="Arial" pitchFamily="34" charset="-120"/>
+              </a:rPr>
+              <a:t>•  7. Colgar(): el vendedor termina la llamada.</a:t>
+            </a:r>
+            <a:endParaRPr lang="en-US" sz="1300" dirty="0"/>
+          </a:p>
+        </p:txBody>
+      </p:sp>
+      <p:sp>
+        <p:nvSpPr>
+          <p:cNvPr id="6" name="Shape 3"/>
+          <p:cNvSpPr/>
+          <p:nvPr/>
+        </p:nvSpPr>
+        <p:spPr>
+          <a:xfrm>
+            <a:off x="548640" y="5120640"/>
+            <a:ext cx="11091672" cy="822960"/>
+          </a:xfrm>
+          <a:prstGeom prst="roundRect">
+            <a:avLst/>
+          </a:prstGeom>
+          <a:solidFill>
+            <a:srgbClr val="E0F2F1"/>
+          </a:solidFill>
+          <a:ln w="19050">
+            <a:solidFill>
+              <a:srgbClr val="009688"/>
+            </a:solidFill>
+            <a:prstDash val="solid"/>
+          </a:ln>
+        </p:spPr>
+      </p:sp>
+      <p:sp>
+        <p:nvSpPr>
+          <p:cNvPr id="7" name="Text 4"/>
+          <p:cNvSpPr/>
+          <p:nvPr/>
+        </p:nvSpPr>
+        <p:spPr>
+          <a:xfrm>
+            <a:off x="777240" y="5193792"/>
+            <a:ext cx="10634472" cy="676656"/>
+          </a:xfrm>
+          <a:prstGeom prst="rect">
+            <a:avLst/>
+          </a:prstGeom>
+          <a:noFill/>
+          <a:ln/>
+        </p:spPr>
+        <p:txBody>
+          <a:bodyPr wrap="square" rtlCol="0" anchor="ctr"/>
+          <a:lstStyle/>
+          <a:p>
+            <a:pPr indent="0" marL="0">
+              <a:buNone/>
+            </a:pPr>
+            <a:r>
+              <a:rPr lang="en-US" sz="1400" dirty="0">
+                <a:solidFill>
+                  <a:srgbClr val="212121"/>
+                </a:solidFill>
+                <a:latin typeface="Arial" pitchFamily="34" charset="0"/>
+                <a:ea typeface="Arial" pitchFamily="34" charset="-122"/>
+                <a:cs typeface="Arial" pitchFamily="34" charset="-120"/>
+              </a:rPr>
+              <a:t>Al interpretar, pregúntate en cada mensaje: ¿quién lo envía? ¿espera respuesta o continúa? ¿qué activaciones están abiertas?</a:t>
+            </a:r>
+            <a:endParaRPr lang="en-US" sz="1400" dirty="0"/>
+          </a:p>
+        </p:txBody>
+      </p:sp>
+      <p:sp>
+        <p:nvSpPr>
+          <p:cNvPr id="8" name="Text 5"/>
+          <p:cNvSpPr/>
+          <p:nvPr/>
+        </p:nvSpPr>
+        <p:spPr>
+          <a:xfrm>
+            <a:off x="548640" y="6473952"/>
+            <a:ext cx="11091672" cy="292608"/>
+          </a:xfrm>
+          <a:prstGeom prst="rect">
+            <a:avLst/>
+          </a:prstGeom>
+          <a:noFill/>
+          <a:ln/>
+        </p:spPr>
+        <p:txBody>
+          <a:bodyPr wrap="square" rtlCol="0" anchor="ctr"/>
+          <a:lstStyle/>
+          <a:p>
+            <a:pPr algn="r" indent="0" marL="0">
+              <a:buNone/>
+            </a:pPr>
+            <a:r>
+              <a:rPr lang="en-US" sz="1100" dirty="0">
+                <a:solidFill>
+                  <a:srgbClr val="757575"/>
+                </a:solidFill>
+                <a:latin typeface="Arial" pitchFamily="34" charset="0"/>
+                <a:ea typeface="Arial" pitchFamily="34" charset="-122"/>
+                <a:cs typeface="Arial" pitchFamily="34" charset="-120"/>
+              </a:rPr>
+              <a:t>Entornos de Desarrollo — Tema 6 · Diagramas de interacción</a:t>
+            </a:r>
+            <a:endParaRPr lang="en-US" sz="1100" dirty="0"/>
+          </a:p>
+        </p:txBody>
+      </p:sp>
+    </p:spTree>
+  </p:cSld>
+  <p:clrMapOvr>
+    <a:masterClrMapping/>
+  </p:clrMapOvr>
+</p:sld>
+</file>
+
+<file path=ppt/slides/slide13.xml><?xml version="1.0" encoding="utf-8"?>
+<p:sld xmlns:a="http://schemas.openxmlformats.org/drawingml/2006/main" xmlns:r="http://schemas.openxmlformats.org/officeDocument/2006/relationships" xmlns:p="http://schemas.openxmlformats.org/presentationml/2006/main">
+  <p:cSld name="Slide 13">
+    <p:spTree>
+      <p:nvGrpSpPr>
+        <p:cNvPr id="1" name=""/>
+        <p:cNvGrpSpPr/>
+        <p:nvPr/>
+      </p:nvGrpSpPr>
+      <p:grpSpPr>
+        <a:xfrm>
+          <a:off x="0" y="0"/>
+          <a:ext cx="0" cy="0"/>
+          <a:chOff x="0" y="0"/>
+          <a:chExt cx="0" cy="0"/>
+        </a:xfrm>
+      </p:grpSpPr>
+      <p:sp>
+        <p:nvSpPr>
+          <p:cNvPr id="2" name="Shape 0"/>
+          <p:cNvSpPr/>
+          <p:nvPr/>
+        </p:nvSpPr>
+        <p:spPr>
+          <a:xfrm>
+            <a:off x="0" y="0"/>
+            <a:ext cx="12188952" cy="777240"/>
+          </a:xfrm>
+          <a:prstGeom prst="rect">
+            <a:avLst/>
+          </a:prstGeom>
+          <a:solidFill>
+            <a:srgbClr val="303F9F"/>
+          </a:solidFill>
+          <a:ln w="12700">
+            <a:solidFill>
+              <a:srgbClr val="303F9F"/>
+            </a:solidFill>
+            <a:prstDash val="solid"/>
+          </a:ln>
+        </p:spPr>
+      </p:sp>
+      <p:sp>
+        <p:nvSpPr>
+          <p:cNvPr id="3" name="Text 1"/>
+          <p:cNvSpPr/>
+          <p:nvPr/>
+        </p:nvSpPr>
+        <p:spPr>
+          <a:xfrm>
+            <a:off x="365760" y="0"/>
+            <a:ext cx="11457432" cy="777240"/>
+          </a:xfrm>
+          <a:prstGeom prst="rect">
+            <a:avLst/>
+          </a:prstGeom>
+          <a:noFill/>
+          <a:ln/>
+        </p:spPr>
+        <p:txBody>
+          <a:bodyPr wrap="square" rtlCol="0" anchor="ctr"/>
+          <a:lstStyle/>
+          <a:p>
+            <a:pPr indent="0" marL="0">
+              <a:buNone/>
+            </a:pPr>
+            <a:r>
+              <a:rPr lang="en-US" sz="2300" b="1" dirty="0">
+                <a:solidFill>
+                  <a:srgbClr val="FFFFFF"/>
+                </a:solidFill>
+                <a:latin typeface="Arial" pitchFamily="34" charset="0"/>
+                <a:ea typeface="Arial" pitchFamily="34" charset="-122"/>
+                <a:cs typeface="Arial" pitchFamily="34" charset="-120"/>
+              </a:rPr>
+              <a:t>Ejemplo: lavadora (secuencia)</a:t>
+            </a:r>
+            <a:endParaRPr lang="en-US" sz="2300" dirty="0"/>
+          </a:p>
+        </p:txBody>
+      </p:sp>
+      <p:sp>
+        <p:nvSpPr>
+          <p:cNvPr id="4" name="Shape 2"/>
+          <p:cNvSpPr/>
+          <p:nvPr/>
+        </p:nvSpPr>
+        <p:spPr>
+          <a:xfrm>
+            <a:off x="2743200" y="1097280"/>
+            <a:ext cx="6675120" cy="4855464"/>
+          </a:xfrm>
+          <a:prstGeom prst="rect">
+            <a:avLst/>
+          </a:prstGeom>
+          <a:ln w="12700">
+            <a:solidFill>
+              <a:srgbClr val="EEEEEE"/>
+            </a:solidFill>
+            <a:prstDash val="solid"/>
+          </a:ln>
+        </p:spPr>
+      </p:sp>
+      <p:pic>
+        <p:nvPicPr>
+          <p:cNvPr id="5" name="Image 0" descr="C:/Users/Aitor/Documents/apuntes-profe/entornos-de-desarrollo/docs/tema6/img/secuencia-lavadora-completo.png">    </p:cNvPr>
+          <p:cNvPicPr>
+            <a:picLocks noChangeAspect="1"/>
+          </p:cNvPicPr>
+          <p:nvPr/>
+        </p:nvPicPr>
+        <p:blipFill>
+          <a:blip r:embed="rId1"/>
+          <a:stretch>
+            <a:fillRect/>
+          </a:stretch>
+        </p:blipFill>
+        <p:spPr>
+          <a:xfrm>
+            <a:off x="2743200" y="1097280"/>
+            <a:ext cx="6675120" cy="4855464"/>
+          </a:xfrm>
+          <a:prstGeom prst="rect">
+            <a:avLst/>
+          </a:prstGeom>
+        </p:spPr>
+      </p:pic>
+      <p:sp>
+        <p:nvSpPr>
+          <p:cNvPr id="6" name="Text 3"/>
+          <p:cNvSpPr/>
+          <p:nvPr/>
+        </p:nvSpPr>
+        <p:spPr>
+          <a:xfrm>
+            <a:off x="2468880" y="5980176"/>
+            <a:ext cx="7223760" cy="320040"/>
+          </a:xfrm>
+          <a:prstGeom prst="rect">
+            <a:avLst/>
+          </a:prstGeom>
+          <a:noFill/>
+          <a:ln/>
+        </p:spPr>
+        <p:txBody>
+          <a:bodyPr wrap="square" rtlCol="0" anchor="t"/>
+          <a:lstStyle/>
+          <a:p>
+            <a:pPr algn="ctr" indent="0" marL="0">
+              <a:buNone/>
+            </a:pPr>
+            <a:r>
+              <a:rPr lang="en-US" sz="1200" i="1" dirty="0">
+                <a:solidFill>
+                  <a:srgbClr val="757575"/>
+                </a:solidFill>
+                <a:latin typeface="Arial" pitchFamily="34" charset="0"/>
+                <a:ea typeface="Arial" pitchFamily="34" charset="-122"/>
+                <a:cs typeface="Arial" pitchFamily="34" charset="-120"/>
+              </a:rPr>
+              <a:t>El programador coordina la válvula de agua, el tambor y la bomba de desagüe</a:t>
+            </a:r>
+            <a:endParaRPr lang="en-US" sz="1200" dirty="0"/>
+          </a:p>
+        </p:txBody>
+      </p:sp>
+      <p:sp>
+        <p:nvSpPr>
+          <p:cNvPr id="7" name="Text 4"/>
+          <p:cNvSpPr/>
+          <p:nvPr/>
+        </p:nvSpPr>
+        <p:spPr>
+          <a:xfrm>
+            <a:off x="548640" y="6473952"/>
+            <a:ext cx="11091672" cy="292608"/>
+          </a:xfrm>
+          <a:prstGeom prst="rect">
+            <a:avLst/>
+          </a:prstGeom>
+          <a:noFill/>
+          <a:ln/>
+        </p:spPr>
+        <p:txBody>
+          <a:bodyPr wrap="square" rtlCol="0" anchor="ctr"/>
+          <a:lstStyle/>
+          <a:p>
+            <a:pPr algn="r" indent="0" marL="0">
+              <a:buNone/>
+            </a:pPr>
+            <a:r>
+              <a:rPr lang="en-US" sz="1100" dirty="0">
+                <a:solidFill>
+                  <a:srgbClr val="757575"/>
+                </a:solidFill>
+                <a:latin typeface="Arial" pitchFamily="34" charset="0"/>
+                <a:ea typeface="Arial" pitchFamily="34" charset="-122"/>
+                <a:cs typeface="Arial" pitchFamily="34" charset="-120"/>
+              </a:rPr>
+              <a:t>Entornos de Desarrollo — Tema 6 · Diagramas de interacción</a:t>
+            </a:r>
+            <a:endParaRPr lang="en-US" sz="1100" dirty="0"/>
+          </a:p>
+        </p:txBody>
+      </p:sp>
+    </p:spTree>
+  </p:cSld>
+  <p:clrMapOvr>
+    <a:masterClrMapping/>
+  </p:clrMapOvr>
+</p:sld>
+</file>
+
+<file path=ppt/slides/slide14.xml><?xml version="1.0" encoding="utf-8"?>
+<p:sld xmlns:a="http://schemas.openxmlformats.org/drawingml/2006/main" xmlns:r="http://schemas.openxmlformats.org/officeDocument/2006/relationships" xmlns:p="http://schemas.openxmlformats.org/presentationml/2006/main">
+  <p:cSld name="Slide 14">
+    <p:spTree>
+      <p:nvGrpSpPr>
+        <p:cNvPr id="1" name=""/>
+        <p:cNvGrpSpPr/>
+        <p:nvPr/>
+      </p:nvGrpSpPr>
+      <p:grpSpPr>
+        <a:xfrm>
+          <a:off x="0" y="0"/>
+          <a:ext cx="0" cy="0"/>
+          <a:chOff x="0" y="0"/>
+          <a:chExt cx="0" cy="0"/>
+        </a:xfrm>
+      </p:grpSpPr>
+      <p:sp>
+        <p:nvSpPr>
+          <p:cNvPr id="2" name="Shape 0"/>
+          <p:cNvSpPr/>
+          <p:nvPr/>
+        </p:nvSpPr>
+        <p:spPr>
+          <a:xfrm>
+            <a:off x="0" y="0"/>
+            <a:ext cx="12188952" cy="777240"/>
+          </a:xfrm>
+          <a:prstGeom prst="rect">
+            <a:avLst/>
+          </a:prstGeom>
+          <a:solidFill>
+            <a:srgbClr val="303F9F"/>
+          </a:solidFill>
+          <a:ln w="12700">
+            <a:solidFill>
+              <a:srgbClr val="303F9F"/>
+            </a:solidFill>
+            <a:prstDash val="solid"/>
+          </a:ln>
+        </p:spPr>
+      </p:sp>
+      <p:sp>
+        <p:nvSpPr>
+          <p:cNvPr id="3" name="Text 1"/>
+          <p:cNvSpPr/>
+          <p:nvPr/>
+        </p:nvSpPr>
+        <p:spPr>
+          <a:xfrm>
+            <a:off x="365760" y="0"/>
+            <a:ext cx="11457432" cy="777240"/>
+          </a:xfrm>
+          <a:prstGeom prst="rect">
+            <a:avLst/>
+          </a:prstGeom>
+          <a:noFill/>
+          <a:ln/>
+        </p:spPr>
+        <p:txBody>
+          <a:bodyPr wrap="square" rtlCol="0" anchor="ctr"/>
+          <a:lstStyle/>
+          <a:p>
+            <a:pPr indent="0" marL="0">
+              <a:buNone/>
+            </a:pPr>
+            <a:r>
+              <a:rPr lang="en-US" sz="2300" b="1" dirty="0">
+                <a:solidFill>
+                  <a:srgbClr val="FFFFFF"/>
+                </a:solidFill>
+                <a:latin typeface="Arial" pitchFamily="34" charset="0"/>
+                <a:ea typeface="Arial" pitchFamily="34" charset="-122"/>
+                <a:cs typeface="Arial" pitchFamily="34" charset="-120"/>
+              </a:rPr>
+              <a:t>Diagrama de comunicación: ¿para qué sirve?</a:t>
+            </a:r>
+            <a:endParaRPr lang="en-US" sz="2300" dirty="0"/>
+          </a:p>
+        </p:txBody>
+      </p:sp>
+      <p:sp>
+        <p:nvSpPr>
+          <p:cNvPr id="4" name="Text 2"/>
+          <p:cNvSpPr/>
+          <p:nvPr/>
+        </p:nvSpPr>
+        <p:spPr>
+          <a:xfrm>
+            <a:off x="548640" y="1097280"/>
+            <a:ext cx="11091672" cy="1188720"/>
+          </a:xfrm>
+          <a:prstGeom prst="rect">
+            <a:avLst/>
+          </a:prstGeom>
+          <a:noFill/>
+          <a:ln/>
+        </p:spPr>
+        <p:txBody>
+          <a:bodyPr wrap="square" rtlCol="0" anchor="t"/>
+          <a:lstStyle/>
+          <a:p>
+            <a:pPr indent="0" marL="0">
+              <a:spcAft>
+                <a:spcPts val="800"/>
+              </a:spcAft>
+              <a:buNone/>
+            </a:pPr>
+            <a:r>
+              <a:rPr lang="en-US" sz="1700" dirty="0">
+                <a:solidFill>
+                  <a:srgbClr val="212121"/>
+                </a:solidFill>
+                <a:latin typeface="Arial" pitchFamily="34" charset="0"/>
+                <a:ea typeface="Arial" pitchFamily="34" charset="-122"/>
+                <a:cs typeface="Arial" pitchFamily="34" charset="-120"/>
+              </a:rPr>
+              <a:t>Representa la comunicación entre objetos poniendo el acento en las RELACIONES y el flujo de control, no en el tiempo.</a:t>
+            </a:r>
+            <a:endParaRPr lang="en-US" sz="1700" dirty="0"/>
+          </a:p>
+          <a:p>
+            <a:pPr indent="0" marL="0">
+              <a:spcAft>
+                <a:spcPts val="800"/>
+              </a:spcAft>
+              <a:buNone/>
+            </a:pPr>
+            <a:r>
+              <a:rPr lang="en-US" sz="1700" dirty="0">
+                <a:solidFill>
+                  <a:srgbClr val="757575"/>
+                </a:solidFill>
+                <a:latin typeface="Arial" pitchFamily="34" charset="0"/>
+                <a:ea typeface="Arial" pitchFamily="34" charset="-122"/>
+                <a:cs typeface="Arial" pitchFamily="34" charset="-120"/>
+              </a:rPr>
+              <a:t>En versiones antiguas de UML se llamaba "diagrama de colaboración".</a:t>
+            </a:r>
+            <a:endParaRPr lang="en-US" sz="1700" dirty="0"/>
+          </a:p>
+        </p:txBody>
+      </p:sp>
+      <p:sp>
+        <p:nvSpPr>
+          <p:cNvPr id="5" name="Shape 3"/>
+          <p:cNvSpPr/>
+          <p:nvPr/>
+        </p:nvSpPr>
+        <p:spPr>
+          <a:xfrm>
+            <a:off x="548640" y="2560320"/>
+            <a:ext cx="11091672" cy="960120"/>
+          </a:xfrm>
+          <a:prstGeom prst="roundRect">
+            <a:avLst/>
+          </a:prstGeom>
+          <a:solidFill>
+            <a:srgbClr val="E0F2F1"/>
+          </a:solidFill>
+          <a:ln w="19050">
+            <a:solidFill>
+              <a:srgbClr val="009688"/>
+            </a:solidFill>
+            <a:prstDash val="solid"/>
+          </a:ln>
+        </p:spPr>
+      </p:sp>
+      <p:sp>
+        <p:nvSpPr>
+          <p:cNvPr id="6" name="Text 4"/>
+          <p:cNvSpPr/>
+          <p:nvPr/>
+        </p:nvSpPr>
+        <p:spPr>
+          <a:xfrm>
+            <a:off x="777240" y="2633472"/>
+            <a:ext cx="10634472" cy="813816"/>
+          </a:xfrm>
+          <a:prstGeom prst="rect">
+            <a:avLst/>
+          </a:prstGeom>
+          <a:noFill/>
+          <a:ln/>
+        </p:spPr>
+        <p:txBody>
+          <a:bodyPr wrap="square" rtlCol="0" anchor="ctr"/>
+          <a:lstStyle/>
+          <a:p>
+            <a:pPr indent="0" marL="0">
+              <a:buNone/>
+            </a:pPr>
+            <a:r>
+              <a:rPr lang="en-US" sz="1600" dirty="0">
+                <a:solidFill>
+                  <a:srgbClr val="212121"/>
+                </a:solidFill>
+                <a:latin typeface="Arial" pitchFamily="34" charset="0"/>
+                <a:ea typeface="Arial" pitchFamily="34" charset="-122"/>
+                <a:cs typeface="Arial" pitchFamily="34" charset="-120"/>
+              </a:rPr>
+              <a:t>Idea clave: secuencia y comunicación muestran LO MISMO (quién habla con quién). Cambia el enfoque — orden cronológico (secuencia) vs relaciones entre objetos (comunicación).</a:t>
+            </a:r>
+            <a:endParaRPr lang="en-US" sz="1600" dirty="0"/>
+          </a:p>
+        </p:txBody>
+      </p:sp>
+      <p:graphicFrame>
+        <p:nvGraphicFramePr>
+          <p:cNvPr id="15" name="Table 0"/>
+          <p:cNvGraphicFramePr>
+            <a:graphicFrameLocks noGrp="1"/>
+          </p:cNvGraphicFramePr>
+          <p:nvPr>
+            <p:extLst>
+              <p:ext uri="{D42A27DB-BD31-4B8C-83A1-F6EECF244321}">
+                <p14:modId xmlns:p14="http://schemas.microsoft.com/office/powerpoint/2010/main" val="1579011935"/>
+              </p:ext>
+            </p:extLst>
+          </p:nvPr>
+        </p:nvGraphicFramePr>
+        <p:xfrm>
+          <a:off x="548640" y="3794760"/>
+          <a:ext cx="11091672" cy="914400"/>
+        </p:xfrm>
+        <a:graphic>
+          <a:graphicData uri="http://schemas.openxmlformats.org/drawingml/2006/table">
+            <a:tbl>
+              <a:tblPr/>
+              <a:tblGrid>
+                <a:gridCol w="3105668"/>
+                <a:gridCol w="7986004"/>
+              </a:tblGrid>
+              <a:tr h="685800">
+                <a:tc>
+                  <a:txBody>
+                    <a:bodyPr/>
+                    <a:lstStyle/>
+                    <a:p>
+                      <a:pPr algn="ctr" indent="0" marL="0">
+                        <a:buNone/>
+                      </a:pPr>
+                      <a:r>
+                        <a:rPr lang="en-US" sz="1400" b="1" dirty="0">
+                          <a:solidFill>
+                            <a:srgbClr val="FFFFFF"/>
+                          </a:solidFill>
+                          <a:latin typeface="Arial" pitchFamily="34" charset="0"/>
+                          <a:ea typeface="Arial" pitchFamily="34" charset="-122"/>
+                          <a:cs typeface="Arial" pitchFamily="34" charset="-120"/>
+                        </a:rPr>
+                        <a:t>Elemento</a:t>
+                      </a:r>
+                      <a:endParaRPr lang="en-US" sz="1400" dirty="0">
+                        <a:latin typeface="Arial" charset="0"/>
+                        <a:ea typeface="Arial" charset="0"/>
+                        <a:cs typeface="Arial" charset="0"/>
+                      </a:endParaRPr>
+                    </a:p>
+                  </a:txBody>
+                  <a:tcPr marL="54864" marR="54864" marT="54864" marB="54864" anchor="ctr">
+                    <a:lnL w="12700" cap="flat" cmpd="sng" algn="ctr">
+                      <a:solidFill>
+                        <a:srgbClr val="EEEEEE"/>
+                      </a:solidFill>
+                      <a:prstDash val="solid"/>
+                      <a:round/>
+                      <a:headEnd type="none" w="med" len="med"/>
+                      <a:tailEnd type="none" w="med" len="med"/>
+                    </a:lnL>
+                    <a:lnR w="12700" cap="flat" cmpd="sng" algn="ctr">
+                      <a:solidFill>
+                        <a:srgbClr val="EEEEEE"/>
+                      </a:solidFill>
+                      <a:prstDash val="solid"/>
+                      <a:round/>
+                      <a:headEnd type="none" w="med" len="med"/>
+                      <a:tailEnd type="none" w="med" len="med"/>
+                    </a:lnR>
+                    <a:lnT w="12700" cap="flat" cmpd="sng" algn="ctr">
+                      <a:solidFill>
+                        <a:srgbClr val="EEEEEE"/>
+                      </a:solidFill>
+                      <a:prstDash val="solid"/>
+                      <a:round/>
+                      <a:headEnd type="none" w="med" len="med"/>
+                      <a:tailEnd type="none" w="med" len="med"/>
+                    </a:lnT>
+                    <a:lnB w="12700" cap="flat" cmpd="sng" algn="ctr">
+                      <a:solidFill>
+                        <a:srgbClr val="EEEEEE"/>
+                      </a:solidFill>
+                      <a:prstDash val="solid"/>
+                      <a:round/>
+                      <a:headEnd type="none" w="med" len="med"/>
+                      <a:tailEnd type="none" w="med" len="med"/>
+                    </a:lnB>
+                    <a:solidFill>
+                      <a:srgbClr val="3F51B5"/>
+                    </a:solidFill>
+                  </a:tcPr>
+                </a:tc>
+                <a:tc>
+                  <a:txBody>
+                    <a:bodyPr/>
+                    <a:lstStyle/>
+                    <a:p>
+                      <a:pPr algn="ctr" indent="0" marL="0">
+                        <a:buNone/>
+                      </a:pPr>
+                      <a:r>
+                        <a:rPr lang="en-US" sz="1400" b="1" dirty="0">
+                          <a:solidFill>
+                            <a:srgbClr val="FFFFFF"/>
+                          </a:solidFill>
+                          <a:latin typeface="Arial" pitchFamily="34" charset="0"/>
+                          <a:ea typeface="Arial" pitchFamily="34" charset="-122"/>
+                          <a:cs typeface="Arial" pitchFamily="34" charset="-120"/>
+                        </a:rPr>
+                        <a:t>Qué es</a:t>
+                      </a:r>
+                      <a:endParaRPr lang="en-US" sz="1400" dirty="0">
+                        <a:latin typeface="Arial" charset="0"/>
+                        <a:ea typeface="Arial" charset="0"/>
+                        <a:cs typeface="Arial" charset="0"/>
+                      </a:endParaRPr>
+                    </a:p>
+                  </a:txBody>
+                  <a:tcPr marL="54864" marR="54864" marT="54864" marB="54864" anchor="ctr">
+                    <a:lnL w="12700" cap="flat" cmpd="sng" algn="ctr">
+                      <a:solidFill>
+                        <a:srgbClr val="EEEEEE"/>
+                      </a:solidFill>
+                      <a:prstDash val="solid"/>
+                      <a:round/>
+                      <a:headEnd type="none" w="med" len="med"/>
+                      <a:tailEnd type="none" w="med" len="med"/>
+                    </a:lnL>
+                    <a:lnR w="12700" cap="flat" cmpd="sng" algn="ctr">
+                      <a:solidFill>
+                        <a:srgbClr val="EEEEEE"/>
+                      </a:solidFill>
+                      <a:prstDash val="solid"/>
+                      <a:round/>
+                      <a:headEnd type="none" w="med" len="med"/>
+                      <a:tailEnd type="none" w="med" len="med"/>
+                    </a:lnR>
+                    <a:lnT w="12700" cap="flat" cmpd="sng" algn="ctr">
+                      <a:solidFill>
+                        <a:srgbClr val="EEEEEE"/>
+                      </a:solidFill>
+                      <a:prstDash val="solid"/>
+                      <a:round/>
+                      <a:headEnd type="none" w="med" len="med"/>
+                      <a:tailEnd type="none" w="med" len="med"/>
+                    </a:lnT>
+                    <a:lnB w="12700" cap="flat" cmpd="sng" algn="ctr">
+                      <a:solidFill>
+                        <a:srgbClr val="EEEEEE"/>
+                      </a:solidFill>
+                      <a:prstDash val="solid"/>
+                      <a:round/>
+                      <a:headEnd type="none" w="med" len="med"/>
+                      <a:tailEnd type="none" w="med" len="med"/>
+                    </a:lnB>
+                    <a:solidFill>
+                      <a:srgbClr val="3F51B5"/>
+                    </a:solidFill>
+                  </a:tcPr>
+                </a:tc>
+              </a:tr>
+              <a:tr h="685800">
+                <a:tc>
+                  <a:txBody>
+                    <a:bodyPr/>
+                    <a:lstStyle/>
+                    <a:p>
+                      <a:pPr algn="l" indent="0" marL="0">
+                        <a:buNone/>
+                      </a:pPr>
+                      <a:r>
+                        <a:rPr lang="en-US" sz="1400" b="1" dirty="0">
+                          <a:solidFill>
+                            <a:srgbClr val="212121"/>
+                          </a:solidFill>
+                          <a:latin typeface="Arial" pitchFamily="34" charset="0"/>
+                          <a:ea typeface="Arial" pitchFamily="34" charset="-122"/>
+                          <a:cs typeface="Arial" pitchFamily="34" charset="-120"/>
+                        </a:rPr>
+                        <a:t>Nodo de comunicación</a:t>
+                      </a:r>
+                      <a:endParaRPr lang="en-US" sz="1400" dirty="0">
+                        <a:latin typeface="Arial" charset="0"/>
+                        <a:ea typeface="Arial" charset="0"/>
+                        <a:cs typeface="Arial" charset="0"/>
+                      </a:endParaRPr>
+                    </a:p>
+                  </a:txBody>
+                  <a:tcPr marL="54864" marR="54864" marT="54864" marB="54864" anchor="ctr">
+                    <a:lnL w="12700" cap="flat" cmpd="sng" algn="ctr">
+                      <a:solidFill>
+                        <a:srgbClr val="EEEEEE"/>
+                      </a:solidFill>
+                      <a:prstDash val="solid"/>
+                      <a:round/>
+                      <a:headEnd type="none" w="med" len="med"/>
+                      <a:tailEnd type="none" w="med" len="med"/>
+                    </a:lnL>
+                    <a:lnR w="12700" cap="flat" cmpd="sng" algn="ctr">
+                      <a:solidFill>
+                        <a:srgbClr val="EEEEEE"/>
+                      </a:solidFill>
+                      <a:prstDash val="solid"/>
+                      <a:round/>
+                      <a:headEnd type="none" w="med" len="med"/>
+                      <a:tailEnd type="none" w="med" len="med"/>
+                    </a:lnR>
+                    <a:lnT w="12700" cap="flat" cmpd="sng" algn="ctr">
+                      <a:solidFill>
+                        <a:srgbClr val="EEEEEE"/>
+                      </a:solidFill>
+                      <a:prstDash val="solid"/>
+                      <a:round/>
+                      <a:headEnd type="none" w="med" len="med"/>
+                      <a:tailEnd type="none" w="med" len="med"/>
+                    </a:lnT>
+                    <a:lnB w="12700" cap="flat" cmpd="sng" algn="ctr">
+                      <a:solidFill>
+                        <a:srgbClr val="EEEEEE"/>
+                      </a:solidFill>
+                      <a:prstDash val="solid"/>
+                      <a:round/>
+                      <a:headEnd type="none" w="med" len="med"/>
+                      <a:tailEnd type="none" w="med" len="med"/>
+                    </a:lnB>
+                    <a:solidFill>
+                      <a:srgbClr val="FFFFFF"/>
+                    </a:solidFill>
+                  </a:tcPr>
+                </a:tc>
+                <a:tc>
+                  <a:txBody>
+                    <a:bodyPr/>
+                    <a:lstStyle/>
+                    <a:p>
+                      <a:pPr algn="l" indent="0" marL="0">
+                        <a:buNone/>
+                      </a:pPr>
+                      <a:r>
+                        <a:rPr lang="en-US" sz="1400" dirty="0">
+                          <a:solidFill>
+                            <a:srgbClr val="212121"/>
+                          </a:solidFill>
+                          <a:latin typeface="Arial" pitchFamily="34" charset="0"/>
+                          <a:ea typeface="Arial" pitchFamily="34" charset="-122"/>
+                          <a:cs typeface="Arial" pitchFamily="34" charset="-120"/>
+                        </a:rPr>
+                        <a:t>Cada objeto del sistema (mismo concepto que en secuencia)</a:t>
+                      </a:r>
+                      <a:endParaRPr lang="en-US" sz="1400" dirty="0">
+                        <a:latin typeface="Arial" charset="0"/>
+                        <a:ea typeface="Arial" charset="0"/>
+                        <a:cs typeface="Arial" charset="0"/>
+                      </a:endParaRPr>
+                    </a:p>
+                  </a:txBody>
+                  <a:tcPr marL="54864" marR="54864" marT="54864" marB="54864" anchor="ctr">
+                    <a:lnL w="12700" cap="flat" cmpd="sng" algn="ctr">
+                      <a:solidFill>
+                        <a:srgbClr val="EEEEEE"/>
+                      </a:solidFill>
+                      <a:prstDash val="solid"/>
+                      <a:round/>
+                      <a:headEnd type="none" w="med" len="med"/>
+                      <a:tailEnd type="none" w="med" len="med"/>
+                    </a:lnL>
+                    <a:lnR w="12700" cap="flat" cmpd="sng" algn="ctr">
+                      <a:solidFill>
+                        <a:srgbClr val="EEEEEE"/>
+                      </a:solidFill>
+                      <a:prstDash val="solid"/>
+                      <a:round/>
+                      <a:headEnd type="none" w="med" len="med"/>
+                      <a:tailEnd type="none" w="med" len="med"/>
+                    </a:lnR>
+                    <a:lnT w="12700" cap="flat" cmpd="sng" algn="ctr">
+                      <a:solidFill>
+                        <a:srgbClr val="EEEEEE"/>
+                      </a:solidFill>
+                      <a:prstDash val="solid"/>
+                      <a:round/>
+                      <a:headEnd type="none" w="med" len="med"/>
+                      <a:tailEnd type="none" w="med" len="med"/>
+                    </a:lnT>
+                    <a:lnB w="12700" cap="flat" cmpd="sng" algn="ctr">
+                      <a:solidFill>
+                        <a:srgbClr val="EEEEEE"/>
+                      </a:solidFill>
+                      <a:prstDash val="solid"/>
+                      <a:round/>
+                      <a:headEnd type="none" w="med" len="med"/>
+                      <a:tailEnd type="none" w="med" len="med"/>
+                    </a:lnB>
+                    <a:solidFill>
+                      <a:srgbClr val="FFFFFF"/>
+                    </a:solidFill>
+                  </a:tcPr>
+                </a:tc>
+              </a:tr>
+              <a:tr h="685800">
+                <a:tc>
+                  <a:txBody>
+                    <a:bodyPr/>
+                    <a:lstStyle/>
+                    <a:p>
+                      <a:pPr algn="l" indent="0" marL="0">
+                        <a:buNone/>
+                      </a:pPr>
+                      <a:r>
+                        <a:rPr lang="en-US" sz="1400" b="1" dirty="0">
+                          <a:solidFill>
+                            <a:srgbClr val="212121"/>
+                          </a:solidFill>
+                          <a:latin typeface="Arial" pitchFamily="34" charset="0"/>
+                          <a:ea typeface="Arial" pitchFamily="34" charset="-122"/>
+                          <a:cs typeface="Arial" pitchFamily="34" charset="-120"/>
+                        </a:rPr>
+                        <a:t>Canal</a:t>
+                      </a:r>
+                      <a:endParaRPr lang="en-US" sz="1400" dirty="0">
+                        <a:latin typeface="Arial" charset="0"/>
+                        <a:ea typeface="Arial" charset="0"/>
+                        <a:cs typeface="Arial" charset="0"/>
+                      </a:endParaRPr>
+                    </a:p>
+                  </a:txBody>
+                  <a:tcPr marL="54864" marR="54864" marT="54864" marB="54864" anchor="ctr">
+                    <a:lnL w="12700" cap="flat" cmpd="sng" algn="ctr">
+                      <a:solidFill>
+                        <a:srgbClr val="EEEEEE"/>
+                      </a:solidFill>
+                      <a:prstDash val="solid"/>
+                      <a:round/>
+                      <a:headEnd type="none" w="med" len="med"/>
+                      <a:tailEnd type="none" w="med" len="med"/>
+                    </a:lnL>
+                    <a:lnR w="12700" cap="flat" cmpd="sng" algn="ctr">
+                      <a:solidFill>
+                        <a:srgbClr val="EEEEEE"/>
+                      </a:solidFill>
+                      <a:prstDash val="solid"/>
+                      <a:round/>
+                      <a:headEnd type="none" w="med" len="med"/>
+                      <a:tailEnd type="none" w="med" len="med"/>
+                    </a:lnR>
+                    <a:lnT w="12700" cap="flat" cmpd="sng" algn="ctr">
+                      <a:solidFill>
+                        <a:srgbClr val="EEEEEE"/>
+                      </a:solidFill>
+                      <a:prstDash val="solid"/>
+                      <a:round/>
+                      <a:headEnd type="none" w="med" len="med"/>
+                      <a:tailEnd type="none" w="med" len="med"/>
+                    </a:lnT>
+                    <a:lnB w="12700" cap="flat" cmpd="sng" algn="ctr">
+                      <a:solidFill>
+                        <a:srgbClr val="EEEEEE"/>
+                      </a:solidFill>
+                      <a:prstDash val="solid"/>
+                      <a:round/>
+                      <a:headEnd type="none" w="med" len="med"/>
+                      <a:tailEnd type="none" w="med" len="med"/>
+                    </a:lnB>
+                    <a:solidFill>
+                      <a:srgbClr val="F5F5F5"/>
+                    </a:solidFill>
+                  </a:tcPr>
+                </a:tc>
+                <a:tc>
+                  <a:txBody>
+                    <a:bodyPr/>
+                    <a:lstStyle/>
+                    <a:p>
+                      <a:pPr algn="l" indent="0" marL="0">
+                        <a:buNone/>
+                      </a:pPr>
+                      <a:r>
+                        <a:rPr lang="en-US" sz="1400" dirty="0">
+                          <a:solidFill>
+                            <a:srgbClr val="212121"/>
+                          </a:solidFill>
+                          <a:latin typeface="Arial" pitchFamily="34" charset="0"/>
+                          <a:ea typeface="Arial" pitchFamily="34" charset="-122"/>
+                          <a:cs typeface="Arial" pitchFamily="34" charset="-120"/>
+                        </a:rPr>
+                        <a:t>Línea recta entre dos objetos que se hablan. Es ÚNICO por pareja: cinco mensajes = un canal con cinco etiquetas</a:t>
+                      </a:r>
+                      <a:endParaRPr lang="en-US" sz="1400" dirty="0">
+                        <a:latin typeface="Arial" charset="0"/>
+                        <a:ea typeface="Arial" charset="0"/>
+                        <a:cs typeface="Arial" charset="0"/>
+                      </a:endParaRPr>
+                    </a:p>
+                  </a:txBody>
+                  <a:tcPr marL="54864" marR="54864" marT="54864" marB="54864" anchor="ctr">
+                    <a:lnL w="12700" cap="flat" cmpd="sng" algn="ctr">
+                      <a:solidFill>
+                        <a:srgbClr val="EEEEEE"/>
+                      </a:solidFill>
+                      <a:prstDash val="solid"/>
+                      <a:round/>
+                      <a:headEnd type="none" w="med" len="med"/>
+                      <a:tailEnd type="none" w="med" len="med"/>
+                    </a:lnL>
+                    <a:lnR w="12700" cap="flat" cmpd="sng" algn="ctr">
+                      <a:solidFill>
+                        <a:srgbClr val="EEEEEE"/>
+                      </a:solidFill>
+                      <a:prstDash val="solid"/>
+                      <a:round/>
+                      <a:headEnd type="none" w="med" len="med"/>
+                      <a:tailEnd type="none" w="med" len="med"/>
+                    </a:lnR>
+                    <a:lnT w="12700" cap="flat" cmpd="sng" algn="ctr">
+                      <a:solidFill>
+                        <a:srgbClr val="EEEEEE"/>
+                      </a:solidFill>
+                      <a:prstDash val="solid"/>
+                      <a:round/>
+                      <a:headEnd type="none" w="med" len="med"/>
+                      <a:tailEnd type="none" w="med" len="med"/>
+                    </a:lnT>
+                    <a:lnB w="12700" cap="flat" cmpd="sng" algn="ctr">
+                      <a:solidFill>
+                        <a:srgbClr val="EEEEEE"/>
+                      </a:solidFill>
+                      <a:prstDash val="solid"/>
+                      <a:round/>
+                      <a:headEnd type="none" w="med" len="med"/>
+                      <a:tailEnd type="none" w="med" len="med"/>
+                    </a:lnB>
+                    <a:solidFill>
+                      <a:srgbClr val="F5F5F5"/>
+                    </a:solidFill>
+                  </a:tcPr>
+                </a:tc>
+              </a:tr>
+              <a:tr h="685800">
+                <a:tc>
+                  <a:txBody>
+                    <a:bodyPr/>
+                    <a:lstStyle/>
+                    <a:p>
+                      <a:pPr algn="l" indent="0" marL="0">
+                        <a:buNone/>
+                      </a:pPr>
+                      <a:r>
+                        <a:rPr lang="en-US" sz="1400" b="1" dirty="0">
+                          <a:solidFill>
+                            <a:srgbClr val="212121"/>
+                          </a:solidFill>
+                          <a:latin typeface="Arial" pitchFamily="34" charset="0"/>
+                          <a:ea typeface="Arial" pitchFamily="34" charset="-122"/>
+                          <a:cs typeface="Arial" pitchFamily="34" charset="-120"/>
+                        </a:rPr>
+                        <a:t>Mensaje</a:t>
+                      </a:r>
+                      <a:endParaRPr lang="en-US" sz="1400" dirty="0">
+                        <a:latin typeface="Arial" charset="0"/>
+                        <a:ea typeface="Arial" charset="0"/>
+                        <a:cs typeface="Arial" charset="0"/>
+                      </a:endParaRPr>
+                    </a:p>
+                  </a:txBody>
+                  <a:tcPr marL="54864" marR="54864" marT="54864" marB="54864" anchor="ctr">
+                    <a:lnL w="12700" cap="flat" cmpd="sng" algn="ctr">
+                      <a:solidFill>
+                        <a:srgbClr val="EEEEEE"/>
+                      </a:solidFill>
+                      <a:prstDash val="solid"/>
+                      <a:round/>
+                      <a:headEnd type="none" w="med" len="med"/>
+                      <a:tailEnd type="none" w="med" len="med"/>
+                    </a:lnL>
+                    <a:lnR w="12700" cap="flat" cmpd="sng" algn="ctr">
+                      <a:solidFill>
+                        <a:srgbClr val="EEEEEE"/>
+                      </a:solidFill>
+                      <a:prstDash val="solid"/>
+                      <a:round/>
+                      <a:headEnd type="none" w="med" len="med"/>
+                      <a:tailEnd type="none" w="med" len="med"/>
+                    </a:lnR>
+                    <a:lnT w="12700" cap="flat" cmpd="sng" algn="ctr">
+                      <a:solidFill>
+                        <a:srgbClr val="EEEEEE"/>
+                      </a:solidFill>
+                      <a:prstDash val="solid"/>
+                      <a:round/>
+                      <a:headEnd type="none" w="med" len="med"/>
+                      <a:tailEnd type="none" w="med" len="med"/>
+                    </a:lnT>
+                    <a:lnB w="12700" cap="flat" cmpd="sng" algn="ctr">
+                      <a:solidFill>
+                        <a:srgbClr val="EEEEEE"/>
+                      </a:solidFill>
+                      <a:prstDash val="solid"/>
+                      <a:round/>
+                      <a:headEnd type="none" w="med" len="med"/>
+                      <a:tailEnd type="none" w="med" len="med"/>
+                    </a:lnB>
+                    <a:solidFill>
+                      <a:srgbClr val="FFFFFF"/>
+                    </a:solidFill>
+                  </a:tcPr>
+                </a:tc>
+                <a:tc>
+                  <a:txBody>
+                    <a:bodyPr/>
+                    <a:lstStyle/>
+                    <a:p>
+                      <a:pPr algn="l" indent="0" marL="0">
+                        <a:buNone/>
+                      </a:pPr>
+                      <a:r>
+                        <a:rPr lang="en-US" sz="1400" dirty="0">
+                          <a:solidFill>
+                            <a:srgbClr val="212121"/>
+                          </a:solidFill>
+                          <a:latin typeface="Arial" pitchFamily="34" charset="0"/>
+                          <a:ea typeface="Arial" pitchFamily="34" charset="-122"/>
+                          <a:cs typeface="Arial" pitchFamily="34" charset="-120"/>
+                        </a:rPr>
+                        <a:t>Flecha con etiqueta sobre el canal: número de orden + nombre de la operación + dirección</a:t>
+                      </a:r>
+                      <a:endParaRPr lang="en-US" sz="1400" dirty="0">
+                        <a:latin typeface="Arial" charset="0"/>
+                        <a:ea typeface="Arial" charset="0"/>
+                        <a:cs typeface="Arial" charset="0"/>
+                      </a:endParaRPr>
+                    </a:p>
+                  </a:txBody>
+                  <a:tcPr marL="54864" marR="54864" marT="54864" marB="54864" anchor="ctr">
+                    <a:lnL w="12700" cap="flat" cmpd="sng" algn="ctr">
+                      <a:solidFill>
+                        <a:srgbClr val="EEEEEE"/>
+                      </a:solidFill>
+                      <a:prstDash val="solid"/>
+                      <a:round/>
+                      <a:headEnd type="none" w="med" len="med"/>
+                      <a:tailEnd type="none" w="med" len="med"/>
+                    </a:lnL>
+                    <a:lnR w="12700" cap="flat" cmpd="sng" algn="ctr">
+                      <a:solidFill>
+                        <a:srgbClr val="EEEEEE"/>
+                      </a:solidFill>
+                      <a:prstDash val="solid"/>
+                      <a:round/>
+                      <a:headEnd type="none" w="med" len="med"/>
+                      <a:tailEnd type="none" w="med" len="med"/>
+                    </a:lnR>
+                    <a:lnT w="12700" cap="flat" cmpd="sng" algn="ctr">
+                      <a:solidFill>
+                        <a:srgbClr val="EEEEEE"/>
+                      </a:solidFill>
+                      <a:prstDash val="solid"/>
+                      <a:round/>
+                      <a:headEnd type="none" w="med" len="med"/>
+                      <a:tailEnd type="none" w="med" len="med"/>
+                    </a:lnT>
+                    <a:lnB w="12700" cap="flat" cmpd="sng" algn="ctr">
+                      <a:solidFill>
+                        <a:srgbClr val="EEEEEE"/>
+                      </a:solidFill>
+                      <a:prstDash val="solid"/>
+                      <a:round/>
+                      <a:headEnd type="none" w="med" len="med"/>
+                      <a:tailEnd type="none" w="med" len="med"/>
+                    </a:lnB>
+                    <a:solidFill>
+                      <a:srgbClr val="FFFFFF"/>
+                    </a:solidFill>
+                  </a:tcPr>
+                </a:tc>
+              </a:tr>
+            </a:tbl>
+          </a:graphicData>
+        </a:graphic>
+      </p:graphicFrame>
+      <p:sp>
+        <p:nvSpPr>
+          <p:cNvPr id="8" name="Text 5"/>
+          <p:cNvSpPr/>
+          <p:nvPr/>
+        </p:nvSpPr>
+        <p:spPr>
+          <a:xfrm>
+            <a:off x="548640" y="6473952"/>
+            <a:ext cx="11091672" cy="292608"/>
+          </a:xfrm>
+          <a:prstGeom prst="rect">
+            <a:avLst/>
+          </a:prstGeom>
+          <a:noFill/>
+          <a:ln/>
+        </p:spPr>
+        <p:txBody>
+          <a:bodyPr wrap="square" rtlCol="0" anchor="ctr"/>
+          <a:lstStyle/>
+          <a:p>
+            <a:pPr algn="r" indent="0" marL="0">
+              <a:buNone/>
+            </a:pPr>
+            <a:r>
+              <a:rPr lang="en-US" sz="1100" dirty="0">
+                <a:solidFill>
+                  <a:srgbClr val="757575"/>
+                </a:solidFill>
+                <a:latin typeface="Arial" pitchFamily="34" charset="0"/>
+                <a:ea typeface="Arial" pitchFamily="34" charset="-122"/>
+                <a:cs typeface="Arial" pitchFamily="34" charset="-120"/>
+              </a:rPr>
+              <a:t>Entornos de Desarrollo — Tema 6 · Diagramas de interacción</a:t>
+            </a:r>
+            <a:endParaRPr lang="en-US" sz="1100" dirty="0"/>
+          </a:p>
+        </p:txBody>
+      </p:sp>
+    </p:spTree>
+  </p:cSld>
+  <p:clrMapOvr>
+    <a:masterClrMapping/>
+  </p:clrMapOvr>
+</p:sld>
+</file>
+
+<file path=ppt/slides/slide15.xml><?xml version="1.0" encoding="utf-8"?>
+<p:sld xmlns:a="http://schemas.openxmlformats.org/drawingml/2006/main" xmlns:r="http://schemas.openxmlformats.org/officeDocument/2006/relationships" xmlns:p="http://schemas.openxmlformats.org/presentationml/2006/main">
+  <p:cSld name="Slide 15">
+    <p:spTree>
+      <p:nvGrpSpPr>
+        <p:cNvPr id="1" name=""/>
+        <p:cNvGrpSpPr/>
+        <p:nvPr/>
+      </p:nvGrpSpPr>
+      <p:grpSpPr>
+        <a:xfrm>
+          <a:off x="0" y="0"/>
+          <a:ext cx="0" cy="0"/>
+          <a:chOff x="0" y="0"/>
+          <a:chExt cx="0" cy="0"/>
+        </a:xfrm>
+      </p:grpSpPr>
+      <p:sp>
+        <p:nvSpPr>
+          <p:cNvPr id="2" name="Shape 0"/>
+          <p:cNvSpPr/>
+          <p:nvPr/>
+        </p:nvSpPr>
+        <p:spPr>
+          <a:xfrm>
+            <a:off x="0" y="0"/>
+            <a:ext cx="12188952" cy="777240"/>
+          </a:xfrm>
+          <a:prstGeom prst="rect">
+            <a:avLst/>
+          </a:prstGeom>
+          <a:solidFill>
+            <a:srgbClr val="303F9F"/>
+          </a:solidFill>
+          <a:ln w="12700">
+            <a:solidFill>
+              <a:srgbClr val="303F9F"/>
+            </a:solidFill>
+            <a:prstDash val="solid"/>
+          </a:ln>
+        </p:spPr>
+      </p:sp>
+      <p:sp>
+        <p:nvSpPr>
+          <p:cNvPr id="3" name="Text 1"/>
+          <p:cNvSpPr/>
+          <p:nvPr/>
+        </p:nvSpPr>
+        <p:spPr>
+          <a:xfrm>
+            <a:off x="365760" y="0"/>
+            <a:ext cx="11457432" cy="777240"/>
+          </a:xfrm>
+          <a:prstGeom prst="rect">
+            <a:avLst/>
+          </a:prstGeom>
+          <a:noFill/>
+          <a:ln/>
+        </p:spPr>
+        <p:txBody>
+          <a:bodyPr wrap="square" rtlCol="0" anchor="ctr"/>
+          <a:lstStyle/>
+          <a:p>
+            <a:pPr indent="0" marL="0">
+              <a:buNone/>
+            </a:pPr>
+            <a:r>
+              <a:rPr lang="en-US" sz="2300" b="1" dirty="0">
+                <a:solidFill>
+                  <a:srgbClr val="FFFFFF"/>
+                </a:solidFill>
+                <a:latin typeface="Arial" pitchFamily="34" charset="0"/>
+                <a:ea typeface="Arial" pitchFamily="34" charset="-122"/>
+                <a:cs typeface="Arial" pitchFamily="34" charset="-120"/>
+              </a:rPr>
+              <a:t>Comunicación: la numeración es el tiempo</a:t>
+            </a:r>
+            <a:endParaRPr lang="en-US" sz="2300" dirty="0"/>
+          </a:p>
+        </p:txBody>
+      </p:sp>
+      <p:sp>
+        <p:nvSpPr>
+          <p:cNvPr id="4" name="Text 2"/>
+          <p:cNvSpPr/>
+          <p:nvPr/>
+        </p:nvSpPr>
+        <p:spPr>
+          <a:xfrm>
+            <a:off x="548640" y="1051560"/>
+            <a:ext cx="11091672" cy="1508760"/>
+          </a:xfrm>
+          <a:prstGeom prst="rect">
+            <a:avLst/>
+          </a:prstGeom>
+          <a:noFill/>
+          <a:ln/>
+        </p:spPr>
+        <p:txBody>
+          <a:bodyPr wrap="square" rtlCol="0" anchor="t"/>
+          <a:lstStyle/>
+          <a:p>
+            <a:pPr indent="0" marL="0">
+              <a:spcAft>
+                <a:spcPts val="800"/>
+              </a:spcAft>
+              <a:buNone/>
+            </a:pPr>
+            <a:r>
+              <a:rPr lang="en-US" sz="1500" dirty="0">
+                <a:solidFill>
+                  <a:srgbClr val="212121"/>
+                </a:solidFill>
+                <a:latin typeface="Arial" pitchFamily="34" charset="0"/>
+                <a:ea typeface="Arial" pitchFamily="34" charset="-122"/>
+                <a:cs typeface="Arial" pitchFamily="34" charset="-120"/>
+              </a:rPr>
+              <a:t>Aquí no hay eje vertical: el orden se expresa SOLO con la numeración. Dos convenciones:</a:t>
+            </a:r>
+            <a:endParaRPr lang="en-US" sz="1500" dirty="0"/>
+          </a:p>
+          <a:p>
+            <a:pPr indent="0" marL="0">
+              <a:spcAft>
+                <a:spcPts val="800"/>
+              </a:spcAft>
+              <a:buNone/>
+            </a:pPr>
+            <a:r>
+              <a:rPr lang="en-US" sz="1500" dirty="0">
+                <a:solidFill>
+                  <a:srgbClr val="212121"/>
+                </a:solidFill>
+                <a:latin typeface="Arial" pitchFamily="34" charset="0"/>
+                <a:ea typeface="Arial" pitchFamily="34" charset="-122"/>
+                <a:cs typeface="Arial" pitchFamily="34" charset="-120"/>
+              </a:rPr>
+              <a:t>•  Numeración plana: 1:, 2:, 3:... en el orden global. Suficiente en diagramas pequeños.</a:t>
+            </a:r>
+            <a:endParaRPr lang="en-US" sz="1500" dirty="0"/>
+          </a:p>
+          <a:p>
+            <a:pPr indent="0" marL="0">
+              <a:spcAft>
+                <a:spcPts val="800"/>
+              </a:spcAft>
+              <a:buNone/>
+            </a:pPr>
+            <a:r>
+              <a:rPr lang="en-US" sz="1500" dirty="0">
+                <a:solidFill>
+                  <a:srgbClr val="212121"/>
+                </a:solidFill>
+                <a:latin typeface="Arial" pitchFamily="34" charset="0"/>
+                <a:ea typeface="Arial" pitchFamily="34" charset="-122"/>
+                <a:cs typeface="Arial" pitchFamily="34" charset="-120"/>
+              </a:rPr>
+              <a:t>•  Numeración jerárquica: los mensajes que ocurren DENTRO de la operación desencadenada por otro llevan su número como prefijo (2 → 2.1, 2.2).</a:t>
+            </a:r>
+            <a:endParaRPr lang="en-US" sz="1500" dirty="0"/>
+          </a:p>
+        </p:txBody>
+      </p:sp>
+      <p:sp>
+        <p:nvSpPr>
+          <p:cNvPr id="5" name="Shape 3"/>
+          <p:cNvSpPr/>
+          <p:nvPr/>
+        </p:nvSpPr>
+        <p:spPr>
+          <a:xfrm>
+            <a:off x="640080" y="3703320"/>
+            <a:ext cx="1554480" cy="548640"/>
+          </a:xfrm>
+          <a:prstGeom prst="roundRect">
+            <a:avLst/>
+          </a:prstGeom>
+          <a:solidFill>
+            <a:srgbClr val="E0F2F1"/>
+          </a:solidFill>
+          <a:ln w="19050">
+            <a:solidFill>
+              <a:srgbClr val="009688"/>
+            </a:solidFill>
+            <a:prstDash val="solid"/>
+          </a:ln>
+        </p:spPr>
+      </p:sp>
+      <p:sp>
+        <p:nvSpPr>
+          <p:cNvPr id="6" name="Text 4"/>
+          <p:cNvSpPr/>
+          <p:nvPr/>
+        </p:nvSpPr>
+        <p:spPr>
+          <a:xfrm>
+            <a:off x="640080" y="3703320"/>
+            <a:ext cx="1554480" cy="548640"/>
+          </a:xfrm>
+          <a:prstGeom prst="rect">
+            <a:avLst/>
+          </a:prstGeom>
+          <a:noFill/>
+          <a:ln/>
+        </p:spPr>
+        <p:txBody>
+          <a:bodyPr wrap="square" rtlCol="0" anchor="ctr"/>
+          <a:lstStyle/>
+          <a:p>
+            <a:pPr algn="ctr" indent="0" marL="0">
+              <a:buNone/>
+            </a:pPr>
+            <a:r>
+              <a:rPr lang="en-US" sz="1400" b="1" dirty="0">
+                <a:solidFill>
+                  <a:srgbClr val="212121"/>
+                </a:solidFill>
+                <a:latin typeface="Arial" pitchFamily="34" charset="0"/>
+                <a:ea typeface="Arial" pitchFamily="34" charset="-122"/>
+                <a:cs typeface="Arial" pitchFamily="34" charset="-120"/>
+              </a:rPr>
+              <a:t>Usuario</a:t>
+            </a:r>
+            <a:endParaRPr lang="en-US" sz="1400" dirty="0"/>
+          </a:p>
+        </p:txBody>
+      </p:sp>
+      <p:sp>
+        <p:nvSpPr>
+          <p:cNvPr id="7" name="Shape 5"/>
+          <p:cNvSpPr/>
+          <p:nvPr/>
+        </p:nvSpPr>
+        <p:spPr>
+          <a:xfrm>
+            <a:off x="3657600" y="3703320"/>
+            <a:ext cx="1554480" cy="548640"/>
+          </a:xfrm>
+          <a:prstGeom prst="roundRect">
+            <a:avLst/>
+          </a:prstGeom>
+          <a:solidFill>
+            <a:srgbClr val="E8EAF6"/>
+          </a:solidFill>
+          <a:ln w="19050">
+            <a:solidFill>
+              <a:srgbClr val="3F51B5"/>
+            </a:solidFill>
+            <a:prstDash val="solid"/>
+          </a:ln>
+        </p:spPr>
+      </p:sp>
+      <p:sp>
+        <p:nvSpPr>
+          <p:cNvPr id="8" name="Text 6"/>
+          <p:cNvSpPr/>
+          <p:nvPr/>
+        </p:nvSpPr>
+        <p:spPr>
+          <a:xfrm>
+            <a:off x="3657600" y="3703320"/>
+            <a:ext cx="1554480" cy="548640"/>
+          </a:xfrm>
+          <a:prstGeom prst="rect">
+            <a:avLst/>
+          </a:prstGeom>
+          <a:noFill/>
+          <a:ln/>
+        </p:spPr>
+        <p:txBody>
+          <a:bodyPr wrap="square" rtlCol="0" anchor="ctr"/>
+          <a:lstStyle/>
+          <a:p>
+            <a:pPr algn="ctr" indent="0" marL="0">
+              <a:buNone/>
+            </a:pPr>
+            <a:r>
+              <a:rPr lang="en-US" sz="1400" b="1" dirty="0">
+                <a:solidFill>
+                  <a:srgbClr val="212121"/>
+                </a:solidFill>
+                <a:latin typeface="Arial" pitchFamily="34" charset="0"/>
+                <a:ea typeface="Arial" pitchFamily="34" charset="-122"/>
+                <a:cs typeface="Arial" pitchFamily="34" charset="-120"/>
+              </a:rPr>
+              <a:t>Web</a:t>
+            </a:r>
+            <a:endParaRPr lang="en-US" sz="1400" dirty="0"/>
+          </a:p>
+        </p:txBody>
+      </p:sp>
+      <p:sp>
+        <p:nvSpPr>
+          <p:cNvPr id="9" name="Shape 7"/>
+          <p:cNvSpPr/>
+          <p:nvPr/>
+        </p:nvSpPr>
+        <p:spPr>
+          <a:xfrm>
+            <a:off x="6675120" y="2697480"/>
+            <a:ext cx="1737360" cy="548640"/>
+          </a:xfrm>
+          <a:prstGeom prst="roundRect">
+            <a:avLst/>
+          </a:prstGeom>
+          <a:solidFill>
+            <a:srgbClr val="E8EAF6"/>
+          </a:solidFill>
+          <a:ln w="19050">
+            <a:solidFill>
+              <a:srgbClr val="3F51B5"/>
+            </a:solidFill>
+            <a:prstDash val="solid"/>
+          </a:ln>
+        </p:spPr>
+      </p:sp>
+      <p:sp>
+        <p:nvSpPr>
+          <p:cNvPr id="10" name="Text 8"/>
+          <p:cNvSpPr/>
+          <p:nvPr/>
+        </p:nvSpPr>
+        <p:spPr>
+          <a:xfrm>
+            <a:off x="6675120" y="2697480"/>
+            <a:ext cx="1737360" cy="548640"/>
+          </a:xfrm>
+          <a:prstGeom prst="rect">
+            <a:avLst/>
+          </a:prstGeom>
+          <a:noFill/>
+          <a:ln/>
+        </p:spPr>
+        <p:txBody>
+          <a:bodyPr wrap="square" rtlCol="0" anchor="ctr"/>
+          <a:lstStyle/>
+          <a:p>
+            <a:pPr algn="ctr" indent="0" marL="0">
+              <a:buNone/>
+            </a:pPr>
+            <a:r>
+              <a:rPr lang="en-US" sz="1400" b="1" dirty="0">
+                <a:solidFill>
+                  <a:srgbClr val="212121"/>
+                </a:solidFill>
+                <a:latin typeface="Arial" pitchFamily="34" charset="0"/>
+                <a:ea typeface="Arial" pitchFamily="34" charset="-122"/>
+                <a:cs typeface="Arial" pitchFamily="34" charset="-120"/>
+              </a:rPr>
+              <a:t>Stock</a:t>
+            </a:r>
+            <a:endParaRPr lang="en-US" sz="1400" dirty="0"/>
+          </a:p>
+        </p:txBody>
+      </p:sp>
+      <p:sp>
+        <p:nvSpPr>
+          <p:cNvPr id="11" name="Shape 9"/>
+          <p:cNvSpPr/>
+          <p:nvPr/>
+        </p:nvSpPr>
+        <p:spPr>
+          <a:xfrm>
+            <a:off x="6675120" y="4709160"/>
+            <a:ext cx="1737360" cy="548640"/>
+          </a:xfrm>
+          <a:prstGeom prst="roundRect">
+            <a:avLst/>
+          </a:prstGeom>
+          <a:solidFill>
+            <a:srgbClr val="E8EAF6"/>
+          </a:solidFill>
+          <a:ln w="19050">
+            <a:solidFill>
+              <a:srgbClr val="3F51B5"/>
+            </a:solidFill>
+            <a:prstDash val="solid"/>
+          </a:ln>
+        </p:spPr>
+      </p:sp>
+      <p:sp>
+        <p:nvSpPr>
+          <p:cNvPr id="12" name="Text 10"/>
+          <p:cNvSpPr/>
+          <p:nvPr/>
+        </p:nvSpPr>
+        <p:spPr>
+          <a:xfrm>
+            <a:off x="6675120" y="4709160"/>
+            <a:ext cx="1737360" cy="548640"/>
+          </a:xfrm>
+          <a:prstGeom prst="rect">
+            <a:avLst/>
+          </a:prstGeom>
+          <a:noFill/>
+          <a:ln/>
+        </p:spPr>
+        <p:txBody>
+          <a:bodyPr wrap="square" rtlCol="0" anchor="ctr"/>
+          <a:lstStyle/>
+          <a:p>
+            <a:pPr algn="ctr" indent="0" marL="0">
+              <a:buNone/>
+            </a:pPr>
+            <a:r>
+              <a:rPr lang="en-US" sz="1400" b="1" dirty="0">
+                <a:solidFill>
+                  <a:srgbClr val="212121"/>
+                </a:solidFill>
+                <a:latin typeface="Arial" pitchFamily="34" charset="0"/>
+                <a:ea typeface="Arial" pitchFamily="34" charset="-122"/>
+                <a:cs typeface="Arial" pitchFamily="34" charset="-120"/>
+              </a:rPr>
+              <a:t>Pago</a:t>
+            </a:r>
+            <a:endParaRPr lang="en-US" sz="1400" dirty="0"/>
+          </a:p>
+        </p:txBody>
+      </p:sp>
+      <p:sp>
+        <p:nvSpPr>
+          <p:cNvPr id="13" name="Shape 11"/>
+          <p:cNvSpPr/>
+          <p:nvPr/>
+        </p:nvSpPr>
+        <p:spPr>
+          <a:xfrm>
+            <a:off x="2194560" y="3977640"/>
+            <a:ext cx="1463040" cy="0"/>
+          </a:xfrm>
+          <a:prstGeom prst="line">
+            <a:avLst/>
+          </a:prstGeom>
+          <a:noFill/>
+          <a:ln w="19050">
+            <a:solidFill>
+              <a:srgbClr val="212121"/>
+            </a:solidFill>
+            <a:prstDash val="solid"/>
+            <a:tailEnd type="triangle"/>
+          </a:ln>
+        </p:spPr>
+      </p:sp>
+      <p:sp>
+        <p:nvSpPr>
+          <p:cNvPr id="14" name="Text 12"/>
+          <p:cNvSpPr/>
+          <p:nvPr/>
+        </p:nvSpPr>
+        <p:spPr>
+          <a:xfrm>
+            <a:off x="2148840" y="3639312"/>
+            <a:ext cx="1828800" cy="274320"/>
+          </a:xfrm>
+          <a:prstGeom prst="rect">
+            <a:avLst/>
+          </a:prstGeom>
+          <a:noFill/>
+          <a:ln/>
+        </p:spPr>
+        <p:txBody>
+          <a:bodyPr wrap="square" rtlCol="0" anchor="ctr"/>
+          <a:lstStyle/>
+          <a:p>
+            <a:pPr algn="ctr" indent="0" marL="0">
+              <a:buNone/>
+            </a:pPr>
+            <a:r>
+              <a:rPr lang="en-US" sz="1100" i="1" dirty="0">
+                <a:solidFill>
+                  <a:srgbClr val="757575"/>
+                </a:solidFill>
+                <a:latin typeface="Arial" pitchFamily="34" charset="0"/>
+                <a:ea typeface="Arial" pitchFamily="34" charset="-122"/>
+                <a:cs typeface="Arial" pitchFamily="34" charset="-120"/>
+              </a:rPr>
+              <a:t>1: finalizarCompra()</a:t>
+            </a:r>
+            <a:endParaRPr lang="en-US" sz="1100" dirty="0"/>
+          </a:p>
+        </p:txBody>
+      </p:sp>
+      <p:sp>
+        <p:nvSpPr>
+          <p:cNvPr id="15" name="Shape 13"/>
+          <p:cNvSpPr/>
+          <p:nvPr/>
+        </p:nvSpPr>
+        <p:spPr>
+          <a:xfrm flipV="1">
+            <a:off x="5212080" y="2971800"/>
+            <a:ext cx="1463040" cy="1005840"/>
+          </a:xfrm>
+          <a:prstGeom prst="line">
+            <a:avLst/>
+          </a:prstGeom>
+          <a:noFill/>
+          <a:ln w="19050">
+            <a:solidFill>
+              <a:srgbClr val="212121"/>
+            </a:solidFill>
+            <a:prstDash val="solid"/>
+            <a:tailEnd type="triangle"/>
+          </a:ln>
+        </p:spPr>
+      </p:sp>
+      <p:sp>
+        <p:nvSpPr>
+          <p:cNvPr id="16" name="Text 14"/>
+          <p:cNvSpPr/>
+          <p:nvPr/>
+        </p:nvSpPr>
+        <p:spPr>
+          <a:xfrm>
+            <a:off x="5074920" y="3154680"/>
+            <a:ext cx="2148840" cy="274320"/>
+          </a:xfrm>
+          <a:prstGeom prst="rect">
+            <a:avLst/>
+          </a:prstGeom>
+          <a:noFill/>
+          <a:ln/>
+        </p:spPr>
+        <p:txBody>
+          <a:bodyPr wrap="square" rtlCol="0" anchor="ctr"/>
+          <a:lstStyle/>
+          <a:p>
+            <a:pPr algn="ctr" indent="0" marL="0">
+              <a:buNone/>
+            </a:pPr>
+            <a:r>
+              <a:rPr lang="en-US" sz="1100" i="1" dirty="0">
+                <a:solidFill>
+                  <a:srgbClr val="757575"/>
+                </a:solidFill>
+                <a:latin typeface="Arial" pitchFamily="34" charset="0"/>
+                <a:ea typeface="Arial" pitchFamily="34" charset="-122"/>
+                <a:cs typeface="Arial" pitchFamily="34" charset="-120"/>
+              </a:rPr>
+              <a:t>1.1: reservarProductos()</a:t>
+            </a:r>
+            <a:endParaRPr lang="en-US" sz="1100" dirty="0"/>
+          </a:p>
+        </p:txBody>
+      </p:sp>
+      <p:sp>
+        <p:nvSpPr>
+          <p:cNvPr id="17" name="Shape 15"/>
+          <p:cNvSpPr/>
+          <p:nvPr/>
+        </p:nvSpPr>
+        <p:spPr>
+          <a:xfrm>
+            <a:off x="5212080" y="3977640"/>
+            <a:ext cx="1463040" cy="1005840"/>
+          </a:xfrm>
+          <a:prstGeom prst="line">
+            <a:avLst/>
+          </a:prstGeom>
+          <a:noFill/>
+          <a:ln w="19050">
+            <a:solidFill>
+              <a:srgbClr val="212121"/>
+            </a:solidFill>
+            <a:prstDash val="solid"/>
+            <a:tailEnd type="triangle"/>
+          </a:ln>
+        </p:spPr>
+      </p:sp>
+      <p:sp>
+        <p:nvSpPr>
+          <p:cNvPr id="18" name="Text 16"/>
+          <p:cNvSpPr/>
+          <p:nvPr/>
+        </p:nvSpPr>
+        <p:spPr>
+          <a:xfrm>
+            <a:off x="5349240" y="4343400"/>
+            <a:ext cx="1737360" cy="274320"/>
+          </a:xfrm>
+          <a:prstGeom prst="rect">
+            <a:avLst/>
+          </a:prstGeom>
+          <a:noFill/>
+          <a:ln/>
+        </p:spPr>
+        <p:txBody>
+          <a:bodyPr wrap="square" rtlCol="0" anchor="ctr"/>
+          <a:lstStyle/>
+          <a:p>
+            <a:pPr algn="ctr" indent="0" marL="0">
+              <a:buNone/>
+            </a:pPr>
+            <a:r>
+              <a:rPr lang="en-US" sz="1100" i="1" dirty="0">
+                <a:solidFill>
+                  <a:srgbClr val="757575"/>
+                </a:solidFill>
+                <a:latin typeface="Arial" pitchFamily="34" charset="0"/>
+                <a:ea typeface="Arial" pitchFamily="34" charset="-122"/>
+                <a:cs typeface="Arial" pitchFamily="34" charset="-120"/>
+              </a:rPr>
+              <a:t>1.2: cobrar()</a:t>
+            </a:r>
+            <a:endParaRPr lang="en-US" sz="1100" dirty="0"/>
+          </a:p>
+        </p:txBody>
+      </p:sp>
+      <p:sp>
+        <p:nvSpPr>
+          <p:cNvPr id="19" name="Shape 17"/>
+          <p:cNvSpPr/>
+          <p:nvPr/>
+        </p:nvSpPr>
+        <p:spPr>
+          <a:xfrm>
+            <a:off x="548640" y="5440680"/>
+            <a:ext cx="11091672" cy="868680"/>
+          </a:xfrm>
+          <a:prstGeom prst="roundRect">
+            <a:avLst/>
+          </a:prstGeom>
+          <a:solidFill>
+            <a:srgbClr val="E0F2F1"/>
+          </a:solidFill>
+          <a:ln w="19050">
+            <a:solidFill>
+              <a:srgbClr val="009688"/>
+            </a:solidFill>
+            <a:prstDash val="solid"/>
+          </a:ln>
+        </p:spPr>
+      </p:sp>
+      <p:sp>
+        <p:nvSpPr>
+          <p:cNvPr id="20" name="Text 18"/>
+          <p:cNvSpPr/>
+          <p:nvPr/>
+        </p:nvSpPr>
+        <p:spPr>
+          <a:xfrm>
+            <a:off x="777240" y="5513832"/>
+            <a:ext cx="10634472" cy="722376"/>
+          </a:xfrm>
+          <a:prstGeom prst="rect">
+            <a:avLst/>
+          </a:prstGeom>
+          <a:noFill/>
+          <a:ln/>
+        </p:spPr>
+        <p:txBody>
+          <a:bodyPr wrap="square" rtlCol="0" anchor="ctr"/>
+          <a:lstStyle/>
+          <a:p>
+            <a:pPr indent="0" marL="0">
+              <a:buNone/>
+            </a:pPr>
+            <a:r>
+              <a:rPr lang="en-US" sz="1400" dirty="0">
+                <a:solidFill>
+                  <a:srgbClr val="212121"/>
+                </a:solidFill>
+                <a:latin typeface="Arial" pitchFamily="34" charset="0"/>
+                <a:ea typeface="Arial" pitchFamily="34" charset="-122"/>
+                <a:cs typeface="Arial" pitchFamily="34" charset="-120"/>
+              </a:rPr>
+              <a:t>1.1 y 1.2 cuelgan del 1 porque ambas llamadas ocurren dentro de finalizarCompra(): sin el mensaje 1 no existirían. Si el usuario pidiera después la factura, ese nuevo mensaje sería el 2:.</a:t>
+            </a:r>
+            <a:endParaRPr lang="en-US" sz="1400" dirty="0"/>
+          </a:p>
+        </p:txBody>
+      </p:sp>
+      <p:sp>
+        <p:nvSpPr>
+          <p:cNvPr id="21" name="Text 19"/>
+          <p:cNvSpPr/>
+          <p:nvPr/>
+        </p:nvSpPr>
+        <p:spPr>
+          <a:xfrm>
+            <a:off x="548640" y="6473952"/>
+            <a:ext cx="11091672" cy="292608"/>
+          </a:xfrm>
+          <a:prstGeom prst="rect">
+            <a:avLst/>
+          </a:prstGeom>
+          <a:noFill/>
+          <a:ln/>
+        </p:spPr>
+        <p:txBody>
+          <a:bodyPr wrap="square" rtlCol="0" anchor="ctr"/>
+          <a:lstStyle/>
+          <a:p>
+            <a:pPr algn="r" indent="0" marL="0">
+              <a:buNone/>
+            </a:pPr>
+            <a:r>
+              <a:rPr lang="en-US" sz="1100" dirty="0">
+                <a:solidFill>
+                  <a:srgbClr val="757575"/>
+                </a:solidFill>
+                <a:latin typeface="Arial" pitchFamily="34" charset="0"/>
+                <a:ea typeface="Arial" pitchFamily="34" charset="-122"/>
+                <a:cs typeface="Arial" pitchFamily="34" charset="-120"/>
+              </a:rPr>
+              <a:t>Entornos de Desarrollo — Tema 6 · Diagramas de interacción</a:t>
+            </a:r>
+            <a:endParaRPr lang="en-US" sz="1100" dirty="0"/>
+          </a:p>
+        </p:txBody>
+      </p:sp>
+    </p:spTree>
+  </p:cSld>
+  <p:clrMapOvr>
+    <a:masterClrMapping/>
+  </p:clrMapOvr>
+</p:sld>
+</file>
+
+<file path=ppt/slides/slide16.xml><?xml version="1.0" encoding="utf-8"?>
+<p:sld xmlns:a="http://schemas.openxmlformats.org/drawingml/2006/main" xmlns:r="http://schemas.openxmlformats.org/officeDocument/2006/relationships" xmlns:p="http://schemas.openxmlformats.org/presentationml/2006/main">
+  <p:cSld name="Slide 16">
+    <p:spTree>
+      <p:nvGrpSpPr>
+        <p:cNvPr id="1" name=""/>
+        <p:cNvGrpSpPr/>
+        <p:nvPr/>
+      </p:nvGrpSpPr>
+      <p:grpSpPr>
+        <a:xfrm>
+          <a:off x="0" y="0"/>
+          <a:ext cx="0" cy="0"/>
+          <a:chOff x="0" y="0"/>
+          <a:chExt cx="0" cy="0"/>
+        </a:xfrm>
+      </p:grpSpPr>
+      <p:sp>
+        <p:nvSpPr>
+          <p:cNvPr id="2" name="Shape 0"/>
+          <p:cNvSpPr/>
+          <p:nvPr/>
+        </p:nvSpPr>
+        <p:spPr>
+          <a:xfrm>
+            <a:off x="0" y="0"/>
+            <a:ext cx="12188952" cy="777240"/>
+          </a:xfrm>
+          <a:prstGeom prst="rect">
+            <a:avLst/>
+          </a:prstGeom>
+          <a:solidFill>
+            <a:srgbClr val="303F9F"/>
+          </a:solidFill>
+          <a:ln w="12700">
+            <a:solidFill>
+              <a:srgbClr val="303F9F"/>
+            </a:solidFill>
+            <a:prstDash val="solid"/>
+          </a:ln>
+        </p:spPr>
+      </p:sp>
+      <p:sp>
+        <p:nvSpPr>
+          <p:cNvPr id="3" name="Text 1"/>
+          <p:cNvSpPr/>
+          <p:nvPr/>
+        </p:nvSpPr>
+        <p:spPr>
+          <a:xfrm>
+            <a:off x="365760" y="0"/>
+            <a:ext cx="11457432" cy="777240"/>
+          </a:xfrm>
+          <a:prstGeom prst="rect">
+            <a:avLst/>
+          </a:prstGeom>
+          <a:noFill/>
+          <a:ln/>
+        </p:spPr>
+        <p:txBody>
+          <a:bodyPr wrap="square" rtlCol="0" anchor="ctr"/>
+          <a:lstStyle/>
+          <a:p>
+            <a:pPr indent="0" marL="0">
+              <a:buNone/>
+            </a:pPr>
+            <a:r>
+              <a:rPr lang="en-US" sz="2300" b="1" dirty="0">
+                <a:solidFill>
+                  <a:srgbClr val="FFFFFF"/>
+                </a:solidFill>
+                <a:latin typeface="Arial" pitchFamily="34" charset="0"/>
+                <a:ea typeface="Arial" pitchFamily="34" charset="-122"/>
+                <a:cs typeface="Arial" pitchFamily="34" charset="-120"/>
+              </a:rPr>
+              <a:t>En DIA — mensajes en comunicación</a:t>
+            </a:r>
+            <a:endParaRPr lang="en-US" sz="2300" dirty="0"/>
+          </a:p>
+        </p:txBody>
+      </p:sp>
+      <p:sp>
+        <p:nvSpPr>
+          <p:cNvPr id="4" name="Text 2"/>
+          <p:cNvSpPr/>
+          <p:nvPr/>
+        </p:nvSpPr>
+        <p:spPr>
+          <a:xfrm>
+            <a:off x="548640" y="1188720"/>
+            <a:ext cx="6126480" cy="1371600"/>
+          </a:xfrm>
+          <a:prstGeom prst="rect">
+            <a:avLst/>
+          </a:prstGeom>
+          <a:noFill/>
+          <a:ln/>
+        </p:spPr>
+        <p:txBody>
+          <a:bodyPr wrap="square" rtlCol="0" anchor="t"/>
+          <a:lstStyle/>
+          <a:p>
+            <a:pPr indent="0" marL="0">
+              <a:spcAft>
+                <a:spcPts val="800"/>
+              </a:spcAft>
+              <a:buNone/>
+            </a:pPr>
+            <a:r>
+              <a:rPr lang="en-US" sz="1700" dirty="0">
+                <a:solidFill>
+                  <a:srgbClr val="212121"/>
+                </a:solidFill>
+                <a:latin typeface="Arial" pitchFamily="34" charset="0"/>
+                <a:ea typeface="Arial" pitchFamily="34" charset="-122"/>
+                <a:cs typeface="Arial" pitchFamily="34" charset="-120"/>
+              </a:rPr>
+              <a:t>•  Usa la misma herramienta de mensajes que en secuencia (UML - Message).</a:t>
+            </a:r>
+            <a:endParaRPr lang="en-US" sz="1700" dirty="0"/>
+          </a:p>
+          <a:p>
+            <a:pPr indent="0" marL="0">
+              <a:spcAft>
+                <a:spcPts val="800"/>
+              </a:spcAft>
+              <a:buNone/>
+            </a:pPr>
+            <a:r>
+              <a:rPr lang="en-US" sz="1700" dirty="0">
+                <a:solidFill>
+                  <a:srgbClr val="212121"/>
+                </a:solidFill>
+                <a:latin typeface="Arial" pitchFamily="34" charset="0"/>
+                <a:ea typeface="Arial" pitchFamily="34" charset="-122"/>
+                <a:cs typeface="Arial" pitchFamily="34" charset="-120"/>
+              </a:rPr>
+              <a:t>•  Haz doble clic → elige "Llamada" u otro tipo según corresponda.</a:t>
+            </a:r>
+            <a:endParaRPr lang="en-US" sz="1700" dirty="0"/>
+          </a:p>
+        </p:txBody>
+      </p:sp>
+      <p:sp>
+        <p:nvSpPr>
+          <p:cNvPr id="5" name="Shape 3"/>
+          <p:cNvSpPr/>
+          <p:nvPr/>
+        </p:nvSpPr>
+        <p:spPr>
+          <a:xfrm>
+            <a:off x="7132320" y="1188720"/>
+            <a:ext cx="3657600" cy="3803904"/>
+          </a:xfrm>
+          <a:prstGeom prst="rect">
+            <a:avLst/>
+          </a:prstGeom>
+          <a:ln w="12700">
+            <a:solidFill>
+              <a:srgbClr val="EEEEEE"/>
+            </a:solidFill>
+            <a:prstDash val="solid"/>
+          </a:ln>
+        </p:spPr>
+      </p:sp>
+      <p:pic>
+        <p:nvPicPr>
+          <p:cNvPr id="6" name="Image 0" descr="C:/Users/Aitor/Documents/apuntes-profe/entornos-de-desarrollo/docs/tema6/img/comunicacion-lavadora.png">    </p:cNvPr>
+          <p:cNvPicPr>
+            <a:picLocks noChangeAspect="1"/>
+          </p:cNvPicPr>
+          <p:nvPr/>
+        </p:nvPicPr>
+        <p:blipFill>
+          <a:blip r:embed="rId1"/>
+          <a:stretch>
+            <a:fillRect/>
+          </a:stretch>
+        </p:blipFill>
+        <p:spPr>
+          <a:xfrm>
+            <a:off x="7132320" y="1188720"/>
+            <a:ext cx="3657600" cy="3803904"/>
+          </a:xfrm>
+          <a:prstGeom prst="rect">
+            <a:avLst/>
+          </a:prstGeom>
+        </p:spPr>
+      </p:pic>
+      <p:sp>
+        <p:nvSpPr>
+          <p:cNvPr id="7" name="Text 4"/>
+          <p:cNvSpPr/>
+          <p:nvPr/>
+        </p:nvSpPr>
+        <p:spPr>
+          <a:xfrm>
+            <a:off x="6858000" y="5020056"/>
+            <a:ext cx="4206240" cy="320040"/>
+          </a:xfrm>
+          <a:prstGeom prst="rect">
+            <a:avLst/>
+          </a:prstGeom>
+          <a:noFill/>
+          <a:ln/>
+        </p:spPr>
+        <p:txBody>
+          <a:bodyPr wrap="square" rtlCol="0" anchor="t"/>
+          <a:lstStyle/>
+          <a:p>
+            <a:pPr algn="ctr" indent="0" marL="0">
+              <a:buNone/>
+            </a:pPr>
+            <a:r>
+              <a:rPr lang="en-US" sz="1200" i="1" dirty="0">
+                <a:solidFill>
+                  <a:srgbClr val="757575"/>
+                </a:solidFill>
+                <a:latin typeface="Arial" pitchFamily="34" charset="0"/>
+                <a:ea typeface="Arial" pitchFamily="34" charset="-122"/>
+                <a:cs typeface="Arial" pitchFamily="34" charset="-120"/>
+              </a:rPr>
+              <a:t>Objetos conectados con canal y mensaje tipo "Llamada"</a:t>
+            </a:r>
+            <a:endParaRPr lang="en-US" sz="1200" dirty="0"/>
+          </a:p>
+        </p:txBody>
+      </p:sp>
+      <p:sp>
+        <p:nvSpPr>
+          <p:cNvPr id="8" name="Text 5"/>
+          <p:cNvSpPr/>
+          <p:nvPr/>
+        </p:nvSpPr>
+        <p:spPr>
+          <a:xfrm>
+            <a:off x="548640" y="6473952"/>
+            <a:ext cx="11091672" cy="292608"/>
+          </a:xfrm>
+          <a:prstGeom prst="rect">
+            <a:avLst/>
+          </a:prstGeom>
+          <a:noFill/>
+          <a:ln/>
+        </p:spPr>
+        <p:txBody>
+          <a:bodyPr wrap="square" rtlCol="0" anchor="ctr"/>
+          <a:lstStyle/>
+          <a:p>
+            <a:pPr algn="r" indent="0" marL="0">
+              <a:buNone/>
+            </a:pPr>
+            <a:r>
+              <a:rPr lang="en-US" sz="1100" dirty="0">
+                <a:solidFill>
+                  <a:srgbClr val="757575"/>
+                </a:solidFill>
+                <a:latin typeface="Arial" pitchFamily="34" charset="0"/>
+                <a:ea typeface="Arial" pitchFamily="34" charset="-122"/>
+                <a:cs typeface="Arial" pitchFamily="34" charset="-120"/>
+              </a:rPr>
+              <a:t>Entornos de Desarrollo — Tema 6 · Diagramas de interacción</a:t>
+            </a:r>
+            <a:endParaRPr lang="en-US" sz="1100" dirty="0"/>
+          </a:p>
+        </p:txBody>
+      </p:sp>
+    </p:spTree>
+  </p:cSld>
+  <p:clrMapOvr>
+    <a:masterClrMapping/>
+  </p:clrMapOvr>
+</p:sld>
+</file>
+
+<file path=ppt/slides/slide17.xml><?xml version="1.0" encoding="utf-8"?>
+<p:sld xmlns:a="http://schemas.openxmlformats.org/drawingml/2006/main" xmlns:r="http://schemas.openxmlformats.org/officeDocument/2006/relationships" xmlns:p="http://schemas.openxmlformats.org/presentationml/2006/main">
+  <p:cSld name="Slide 17">
+    <p:spTree>
+      <p:nvGrpSpPr>
+        <p:cNvPr id="1" name=""/>
+        <p:cNvGrpSpPr/>
+        <p:nvPr/>
+      </p:nvGrpSpPr>
+      <p:grpSpPr>
+        <a:xfrm>
+          <a:off x="0" y="0"/>
+          <a:ext cx="0" cy="0"/>
+          <a:chOff x="0" y="0"/>
+          <a:chExt cx="0" cy="0"/>
+        </a:xfrm>
+      </p:grpSpPr>
+      <p:sp>
+        <p:nvSpPr>
+          <p:cNvPr id="2" name="Shape 0"/>
+          <p:cNvSpPr/>
+          <p:nvPr/>
+        </p:nvSpPr>
+        <p:spPr>
+          <a:xfrm>
+            <a:off x="0" y="0"/>
+            <a:ext cx="12188952" cy="777240"/>
+          </a:xfrm>
+          <a:prstGeom prst="rect">
+            <a:avLst/>
+          </a:prstGeom>
+          <a:solidFill>
+            <a:srgbClr val="303F9F"/>
+          </a:solidFill>
+          <a:ln w="12700">
+            <a:solidFill>
+              <a:srgbClr val="303F9F"/>
+            </a:solidFill>
+            <a:prstDash val="solid"/>
+          </a:ln>
+        </p:spPr>
+      </p:sp>
+      <p:sp>
+        <p:nvSpPr>
+          <p:cNvPr id="3" name="Text 1"/>
+          <p:cNvSpPr/>
+          <p:nvPr/>
+        </p:nvSpPr>
+        <p:spPr>
+          <a:xfrm>
+            <a:off x="365760" y="0"/>
+            <a:ext cx="11457432" cy="777240"/>
+          </a:xfrm>
+          <a:prstGeom prst="rect">
+            <a:avLst/>
+          </a:prstGeom>
+          <a:noFill/>
+          <a:ln/>
+        </p:spPr>
+        <p:txBody>
+          <a:bodyPr wrap="square" rtlCol="0" anchor="ctr"/>
+          <a:lstStyle/>
+          <a:p>
+            <a:pPr indent="0" marL="0">
+              <a:buNone/>
+            </a:pPr>
+            <a:r>
+              <a:rPr lang="en-US" sz="2300" b="1" dirty="0">
+                <a:solidFill>
+                  <a:srgbClr val="FFFFFF"/>
+                </a:solidFill>
+                <a:latin typeface="Arial" pitchFamily="34" charset="0"/>
+                <a:ea typeface="Arial" pitchFamily="34" charset="-122"/>
+                <a:cs typeface="Arial" pitchFamily="34" charset="-120"/>
+              </a:rPr>
+              <a:t>De secuencia a comunicación (y vuelta)</a:t>
+            </a:r>
+            <a:endParaRPr lang="en-US" sz="2300" dirty="0"/>
+          </a:p>
+        </p:txBody>
+      </p:sp>
+      <p:sp>
+        <p:nvSpPr>
+          <p:cNvPr id="4" name="Text 2"/>
+          <p:cNvSpPr/>
+          <p:nvPr/>
+        </p:nvSpPr>
+        <p:spPr>
+          <a:xfrm>
+            <a:off x="548640" y="1051560"/>
+            <a:ext cx="5760720" cy="2926080"/>
+          </a:xfrm>
+          <a:prstGeom prst="rect">
+            <a:avLst/>
+          </a:prstGeom>
+          <a:noFill/>
+          <a:ln/>
+        </p:spPr>
+        <p:txBody>
+          <a:bodyPr wrap="square" rtlCol="0" anchor="t"/>
+          <a:lstStyle/>
+          <a:p>
+            <a:pPr indent="0" marL="0">
+              <a:spcAft>
+                <a:spcPts val="800"/>
+              </a:spcAft>
+              <a:buNone/>
+            </a:pPr>
+            <a:r>
+              <a:rPr lang="en-US" sz="1500" dirty="0">
+                <a:solidFill>
+                  <a:srgbClr val="212121"/>
+                </a:solidFill>
+                <a:latin typeface="Arial" pitchFamily="34" charset="0"/>
+                <a:ea typeface="Arial" pitchFamily="34" charset="-122"/>
+                <a:cs typeface="Arial" pitchFamily="34" charset="-120"/>
+              </a:rPr>
+              <a:t>1. Coloca los objetos donde quieras (ya no importa el eje del tiempo) y une con una línea cada pareja que se envíe al menos un mensaje: esos son los canales.</a:t>
+            </a:r>
+            <a:endParaRPr lang="en-US" sz="1500" dirty="0"/>
+          </a:p>
+          <a:p>
+            <a:pPr indent="0" marL="0">
+              <a:spcAft>
+                <a:spcPts val="800"/>
+              </a:spcAft>
+              <a:buNone/>
+            </a:pPr>
+            <a:r>
+              <a:rPr lang="en-US" sz="1500" dirty="0">
+                <a:solidFill>
+                  <a:srgbClr val="212121"/>
+                </a:solidFill>
+                <a:latin typeface="Arial" pitchFamily="34" charset="0"/>
+                <a:ea typeface="Arial" pitchFamily="34" charset="-122"/>
+                <a:cs typeface="Arial" pitchFamily="34" charset="-120"/>
+              </a:rPr>
+              <a:t>2. Copia cada mensaje sobre su canal, como flecha con el nombre de la operación.</a:t>
+            </a:r>
+            <a:endParaRPr lang="en-US" sz="1500" dirty="0"/>
+          </a:p>
+          <a:p>
+            <a:pPr indent="0" marL="0">
+              <a:spcAft>
+                <a:spcPts val="800"/>
+              </a:spcAft>
+              <a:buNone/>
+            </a:pPr>
+            <a:r>
+              <a:rPr lang="en-US" sz="1500" dirty="0">
+                <a:solidFill>
+                  <a:srgbClr val="212121"/>
+                </a:solidFill>
+                <a:latin typeface="Arial" pitchFamily="34" charset="0"/>
+                <a:ea typeface="Arial" pitchFamily="34" charset="-122"/>
+                <a:cs typeface="Arial" pitchFamily="34" charset="-120"/>
+              </a:rPr>
+              <a:t>3. Numera los mensajes en el orden en que ocurrían en el de secuencia.</a:t>
+            </a:r>
+            <a:endParaRPr lang="en-US" sz="1500" dirty="0"/>
+          </a:p>
+        </p:txBody>
+      </p:sp>
+      <p:pic>
+        <p:nvPicPr>
+          <p:cNvPr id="5" name="Image 0" descr="C:/Users/Aitor/Documents/apuntes-profe/entornos-de-desarrollo/docs/tema6/img/comunicacion-lavadora.png">    </p:cNvPr>
+          <p:cNvPicPr>
+            <a:picLocks noChangeAspect="1"/>
+          </p:cNvPicPr>
+          <p:nvPr/>
+        </p:nvPicPr>
+        <p:blipFill>
+          <a:blip r:embed="rId1"/>
+          <a:stretch>
+            <a:fillRect/>
+          </a:stretch>
+        </p:blipFill>
+        <p:spPr>
+          <a:xfrm>
+            <a:off x="6583680" y="1051560"/>
+            <a:ext cx="5029200" cy="3108960"/>
+          </a:xfrm>
+          <a:prstGeom prst="rect">
+            <a:avLst/>
+          </a:prstGeom>
+        </p:spPr>
+      </p:pic>
+      <p:sp>
+        <p:nvSpPr>
+          <p:cNvPr id="6" name="Shape 3"/>
+          <p:cNvSpPr/>
+          <p:nvPr/>
+        </p:nvSpPr>
+        <p:spPr>
+          <a:xfrm>
+            <a:off x="548640" y="4572000"/>
+            <a:ext cx="11091672" cy="1188720"/>
+          </a:xfrm>
+          <a:prstGeom prst="roundRect">
+            <a:avLst/>
+          </a:prstGeom>
+          <a:solidFill>
+            <a:srgbClr val="E0F2F1"/>
+          </a:solidFill>
+          <a:ln w="19050">
+            <a:solidFill>
+              <a:srgbClr val="009688"/>
+            </a:solidFill>
+            <a:prstDash val="solid"/>
+          </a:ln>
+        </p:spPr>
+      </p:sp>
+      <p:sp>
+        <p:nvSpPr>
+          <p:cNvPr id="7" name="Text 4"/>
+          <p:cNvSpPr/>
+          <p:nvPr/>
+        </p:nvSpPr>
+        <p:spPr>
+          <a:xfrm>
+            <a:off x="777240" y="4645152"/>
+            <a:ext cx="10634472" cy="1042416"/>
+          </a:xfrm>
+          <a:prstGeom prst="rect">
+            <a:avLst/>
+          </a:prstGeom>
+          <a:noFill/>
+          <a:ln/>
+        </p:spPr>
+        <p:txBody>
+          <a:bodyPr wrap="square" rtlCol="0" anchor="ctr"/>
+          <a:lstStyle/>
+          <a:p>
+            <a:pPr indent="0" marL="0">
+              <a:buNone/>
+            </a:pPr>
+            <a:r>
+              <a:rPr lang="en-US" sz="1400" dirty="0">
+                <a:solidFill>
+                  <a:srgbClr val="212121"/>
+                </a:solidFill>
+                <a:latin typeface="Arial" pitchFamily="34" charset="0"/>
+                <a:ea typeface="Arial" pitchFamily="34" charset="-122"/>
+                <a:cs typeface="Arial" pitchFamily="34" charset="-120"/>
+              </a:rPr>
+              <a:t>El paso inverso también funciona: la numeración te da el orden vertical. En la práctica, el de secuencia es más habitual; el de comunicación gana con muchos objetos, cuando lo que preocupa es la estructura de conexiones (p. ej., detectar que un objeto habla con demasiados).</a:t>
+            </a:r>
+            <a:endParaRPr lang="en-US" sz="1400" dirty="0"/>
+          </a:p>
+        </p:txBody>
+      </p:sp>
+      <p:sp>
+        <p:nvSpPr>
+          <p:cNvPr id="8" name="Text 5"/>
+          <p:cNvSpPr/>
+          <p:nvPr/>
+        </p:nvSpPr>
+        <p:spPr>
+          <a:xfrm>
+            <a:off x="548640" y="6473952"/>
+            <a:ext cx="11091672" cy="292608"/>
+          </a:xfrm>
+          <a:prstGeom prst="rect">
+            <a:avLst/>
+          </a:prstGeom>
+          <a:noFill/>
+          <a:ln/>
+        </p:spPr>
+        <p:txBody>
+          <a:bodyPr wrap="square" rtlCol="0" anchor="ctr"/>
+          <a:lstStyle/>
+          <a:p>
+            <a:pPr algn="r" indent="0" marL="0">
+              <a:buNone/>
+            </a:pPr>
+            <a:r>
+              <a:rPr lang="en-US" sz="1100" dirty="0">
+                <a:solidFill>
+                  <a:srgbClr val="757575"/>
+                </a:solidFill>
+                <a:latin typeface="Arial" pitchFamily="34" charset="0"/>
+                <a:ea typeface="Arial" pitchFamily="34" charset="-122"/>
+                <a:cs typeface="Arial" pitchFamily="34" charset="-120"/>
+              </a:rPr>
+              <a:t>Entornos de Desarrollo — Tema 6 · Diagramas de interacción</a:t>
+            </a:r>
+            <a:endParaRPr lang="en-US" sz="1100" dirty="0"/>
+          </a:p>
+        </p:txBody>
+      </p:sp>
+    </p:spTree>
+  </p:cSld>
+  <p:clrMapOvr>
+    <a:masterClrMapping/>
+  </p:clrMapOvr>
+</p:sld>
+</file>
+
+<file path=ppt/slides/slide18.xml><?xml version="1.0" encoding="utf-8"?>
+<p:sld xmlns:a="http://schemas.openxmlformats.org/drawingml/2006/main" xmlns:r="http://schemas.openxmlformats.org/officeDocument/2006/relationships" xmlns:p="http://schemas.openxmlformats.org/presentationml/2006/main">
+  <p:cSld name="Slide 18">
+    <p:spTree>
+      <p:nvGrpSpPr>
+        <p:cNvPr id="1" name=""/>
+        <p:cNvGrpSpPr/>
+        <p:nvPr/>
+      </p:nvGrpSpPr>
+      <p:grpSpPr>
+        <a:xfrm>
+          <a:off x="0" y="0"/>
+          <a:ext cx="0" cy="0"/>
+          <a:chOff x="0" y="0"/>
+          <a:chExt cx="0" cy="0"/>
+        </a:xfrm>
+      </p:grpSpPr>
+      <p:sp>
+        <p:nvSpPr>
+          <p:cNvPr id="2" name="Shape 0"/>
+          <p:cNvSpPr/>
+          <p:nvPr/>
+        </p:nvSpPr>
+        <p:spPr>
+          <a:xfrm>
+            <a:off x="0" y="0"/>
+            <a:ext cx="12188952" cy="777240"/>
+          </a:xfrm>
+          <a:prstGeom prst="rect">
+            <a:avLst/>
+          </a:prstGeom>
+          <a:solidFill>
+            <a:srgbClr val="303F9F"/>
+          </a:solidFill>
+          <a:ln w="12700">
+            <a:solidFill>
+              <a:srgbClr val="303F9F"/>
+            </a:solidFill>
+            <a:prstDash val="solid"/>
+          </a:ln>
+        </p:spPr>
+      </p:sp>
+      <p:sp>
+        <p:nvSpPr>
+          <p:cNvPr id="3" name="Text 1"/>
+          <p:cNvSpPr/>
+          <p:nvPr/>
+        </p:nvSpPr>
+        <p:spPr>
+          <a:xfrm>
+            <a:off x="365760" y="0"/>
+            <a:ext cx="11457432" cy="777240"/>
+          </a:xfrm>
+          <a:prstGeom prst="rect">
+            <a:avLst/>
+          </a:prstGeom>
+          <a:noFill/>
+          <a:ln/>
+        </p:spPr>
+        <p:txBody>
+          <a:bodyPr wrap="square" rtlCol="0" anchor="ctr"/>
+          <a:lstStyle/>
+          <a:p>
+            <a:pPr indent="0" marL="0">
+              <a:buNone/>
+            </a:pPr>
+            <a:r>
+              <a:rPr lang="en-US" sz="2300" b="1" dirty="0">
+                <a:solidFill>
+                  <a:srgbClr val="FFFFFF"/>
+                </a:solidFill>
+                <a:latin typeface="Arial" pitchFamily="34" charset="0"/>
+                <a:ea typeface="Arial" pitchFamily="34" charset="-122"/>
+                <a:cs typeface="Arial" pitchFamily="34" charset="-120"/>
+              </a:rPr>
+              <a:t>Un mismo diagrama, dos vistas: secuencia</a:t>
+            </a:r>
+            <a:endParaRPr lang="en-US" sz="2300" dirty="0"/>
+          </a:p>
+        </p:txBody>
+      </p:sp>
+      <p:sp>
+        <p:nvSpPr>
+          <p:cNvPr id="4" name="Text 2"/>
+          <p:cNvSpPr/>
+          <p:nvPr/>
+        </p:nvSpPr>
+        <p:spPr>
+          <a:xfrm>
+            <a:off x="548640" y="914400"/>
+            <a:ext cx="11091672" cy="685800"/>
+          </a:xfrm>
+          <a:prstGeom prst="rect">
+            <a:avLst/>
+          </a:prstGeom>
+          <a:noFill/>
+          <a:ln/>
+        </p:spPr>
+        <p:txBody>
+          <a:bodyPr wrap="square" rtlCol="0" anchor="t"/>
+          <a:lstStyle/>
+          <a:p>
+            <a:pPr indent="0" marL="0">
+              <a:spcAft>
+                <a:spcPts val="800"/>
+              </a:spcAft>
+              <a:buNone/>
+            </a:pPr>
+            <a:r>
+              <a:rPr lang="en-US" sz="1500" dirty="0">
+                <a:solidFill>
+                  <a:srgbClr val="212121"/>
+                </a:solidFill>
+                <a:latin typeface="Arial" pitchFamily="34" charset="0"/>
+                <a:ea typeface="Arial" pitchFamily="34" charset="-122"/>
+                <a:cs typeface="Arial" pitchFamily="34" charset="-120"/>
+              </a:rPr>
+              <a:t>El mismo finalizarCompra() de antes, ahora completo: el tiempo avanza hacia abajo y se ve que Web espera la respuesta de Stock antes de hablar con Pago.</a:t>
+            </a:r>
+            <a:endParaRPr lang="en-US" sz="1500" dirty="0"/>
+          </a:p>
+        </p:txBody>
+      </p:sp>
+      <p:sp>
+        <p:nvSpPr>
+          <p:cNvPr id="5" name="Shape 3"/>
+          <p:cNvSpPr/>
+          <p:nvPr/>
+        </p:nvSpPr>
+        <p:spPr>
+          <a:xfrm>
+            <a:off x="1005840" y="1783080"/>
+            <a:ext cx="2103120" cy="457200"/>
+          </a:xfrm>
+          <a:prstGeom prst="rect">
+            <a:avLst/>
+          </a:prstGeom>
+          <a:solidFill>
+            <a:srgbClr val="E8EAF6"/>
+          </a:solidFill>
+          <a:ln w="19050">
+            <a:solidFill>
+              <a:srgbClr val="3F51B5"/>
+            </a:solidFill>
+            <a:prstDash val="solid"/>
+          </a:ln>
+        </p:spPr>
+      </p:sp>
+      <p:sp>
+        <p:nvSpPr>
+          <p:cNvPr id="6" name="Text 4"/>
+          <p:cNvSpPr/>
+          <p:nvPr/>
+        </p:nvSpPr>
+        <p:spPr>
+          <a:xfrm>
+            <a:off x="1005840" y="1783080"/>
+            <a:ext cx="2103120" cy="457200"/>
+          </a:xfrm>
+          <a:prstGeom prst="rect">
+            <a:avLst/>
+          </a:prstGeom>
+          <a:noFill/>
+          <a:ln/>
+        </p:spPr>
+        <p:txBody>
+          <a:bodyPr wrap="square" rtlCol="0" anchor="ctr"/>
+          <a:lstStyle/>
+          <a:p>
+            <a:pPr algn="ctr" indent="0" marL="0">
+              <a:buNone/>
+            </a:pPr>
+            <a:r>
+              <a:rPr lang="en-US" sz="1300" b="1" dirty="0">
+                <a:solidFill>
+                  <a:srgbClr val="212121"/>
+                </a:solidFill>
+                <a:latin typeface="Arial" pitchFamily="34" charset="0"/>
+                <a:ea typeface="Arial" pitchFamily="34" charset="-122"/>
+                <a:cs typeface="Arial" pitchFamily="34" charset="-120"/>
+              </a:rPr>
+              <a:t>Usuario</a:t>
+            </a:r>
+            <a:endParaRPr lang="en-US" sz="1300" dirty="0"/>
+          </a:p>
+        </p:txBody>
+      </p:sp>
+      <p:sp>
+        <p:nvSpPr>
+          <p:cNvPr id="7" name="Shape 5"/>
+          <p:cNvSpPr/>
+          <p:nvPr/>
+        </p:nvSpPr>
+        <p:spPr>
+          <a:xfrm>
+            <a:off x="4846320" y="1783080"/>
+            <a:ext cx="2103120" cy="457200"/>
+          </a:xfrm>
+          <a:prstGeom prst="rect">
+            <a:avLst/>
+          </a:prstGeom>
+          <a:solidFill>
+            <a:srgbClr val="E8EAF6"/>
+          </a:solidFill>
+          <a:ln w="19050">
+            <a:solidFill>
+              <a:srgbClr val="3F51B5"/>
+            </a:solidFill>
+            <a:prstDash val="solid"/>
+          </a:ln>
+        </p:spPr>
+      </p:sp>
+      <p:sp>
+        <p:nvSpPr>
+          <p:cNvPr id="8" name="Text 6"/>
+          <p:cNvSpPr/>
+          <p:nvPr/>
+        </p:nvSpPr>
+        <p:spPr>
+          <a:xfrm>
+            <a:off x="4846320" y="1783080"/>
+            <a:ext cx="2103120" cy="457200"/>
+          </a:xfrm>
+          <a:prstGeom prst="rect">
+            <a:avLst/>
+          </a:prstGeom>
+          <a:noFill/>
+          <a:ln/>
+        </p:spPr>
+        <p:txBody>
+          <a:bodyPr wrap="square" rtlCol="0" anchor="ctr"/>
+          <a:lstStyle/>
+          <a:p>
+            <a:pPr algn="ctr" indent="0" marL="0">
+              <a:buNone/>
+            </a:pPr>
+            <a:r>
+              <a:rPr lang="en-US" sz="1300" b="1" dirty="0">
+                <a:solidFill>
+                  <a:srgbClr val="212121"/>
+                </a:solidFill>
+                <a:latin typeface="Arial" pitchFamily="34" charset="0"/>
+                <a:ea typeface="Arial" pitchFamily="34" charset="-122"/>
+                <a:cs typeface="Arial" pitchFamily="34" charset="-120"/>
+              </a:rPr>
+              <a:t>Web</a:t>
+            </a:r>
+            <a:endParaRPr lang="en-US" sz="1300" dirty="0"/>
+          </a:p>
+        </p:txBody>
+      </p:sp>
+      <p:sp>
+        <p:nvSpPr>
+          <p:cNvPr id="9" name="Shape 7"/>
+          <p:cNvSpPr/>
+          <p:nvPr/>
+        </p:nvSpPr>
+        <p:spPr>
+          <a:xfrm>
+            <a:off x="8686800" y="1783080"/>
+            <a:ext cx="2103120" cy="457200"/>
+          </a:xfrm>
+          <a:prstGeom prst="rect">
+            <a:avLst/>
+          </a:prstGeom>
+          <a:solidFill>
+            <a:srgbClr val="E8EAF6"/>
+          </a:solidFill>
+          <a:ln w="19050">
+            <a:solidFill>
+              <a:srgbClr val="3F51B5"/>
+            </a:solidFill>
+            <a:prstDash val="solid"/>
+          </a:ln>
+        </p:spPr>
+      </p:sp>
+      <p:sp>
+        <p:nvSpPr>
+          <p:cNvPr id="10" name="Text 8"/>
+          <p:cNvSpPr/>
+          <p:nvPr/>
+        </p:nvSpPr>
+        <p:spPr>
+          <a:xfrm>
+            <a:off x="8686800" y="1783080"/>
+            <a:ext cx="2103120" cy="457200"/>
+          </a:xfrm>
+          <a:prstGeom prst="rect">
+            <a:avLst/>
+          </a:prstGeom>
+          <a:noFill/>
+          <a:ln/>
+        </p:spPr>
+        <p:txBody>
+          <a:bodyPr wrap="square" rtlCol="0" anchor="ctr"/>
+          <a:lstStyle/>
+          <a:p>
+            <a:pPr algn="ctr" indent="0" marL="0">
+              <a:buNone/>
+            </a:pPr>
+            <a:r>
+              <a:rPr lang="en-US" sz="1300" b="1" dirty="0">
+                <a:solidFill>
+                  <a:srgbClr val="212121"/>
+                </a:solidFill>
+                <a:latin typeface="Arial" pitchFamily="34" charset="0"/>
+                <a:ea typeface="Arial" pitchFamily="34" charset="-122"/>
+                <a:cs typeface="Arial" pitchFamily="34" charset="-120"/>
+              </a:rPr>
+              <a:t>Stock / Pago</a:t>
+            </a:r>
+            <a:endParaRPr lang="en-US" sz="1300" dirty="0"/>
+          </a:p>
+        </p:txBody>
+      </p:sp>
+      <p:sp>
+        <p:nvSpPr>
+          <p:cNvPr id="11" name="Shape 9"/>
+          <p:cNvSpPr/>
+          <p:nvPr/>
+        </p:nvSpPr>
+        <p:spPr>
+          <a:xfrm>
+            <a:off x="2057400" y="2240280"/>
+            <a:ext cx="0" cy="3566160"/>
+          </a:xfrm>
+          <a:prstGeom prst="line">
+            <a:avLst/>
+          </a:prstGeom>
+          <a:noFill/>
+          <a:ln w="15240">
+            <a:solidFill>
+              <a:srgbClr val="757575"/>
+            </a:solidFill>
+            <a:prstDash val="dash"/>
+          </a:ln>
+        </p:spPr>
+      </p:sp>
+      <p:sp>
+        <p:nvSpPr>
+          <p:cNvPr id="12" name="Shape 10"/>
+          <p:cNvSpPr/>
+          <p:nvPr/>
+        </p:nvSpPr>
+        <p:spPr>
+          <a:xfrm>
+            <a:off x="5897880" y="2240280"/>
+            <a:ext cx="0" cy="3566160"/>
+          </a:xfrm>
+          <a:prstGeom prst="line">
+            <a:avLst/>
+          </a:prstGeom>
+          <a:noFill/>
+          <a:ln w="15240">
+            <a:solidFill>
+              <a:srgbClr val="757575"/>
+            </a:solidFill>
+            <a:prstDash val="dash"/>
+          </a:ln>
+        </p:spPr>
+      </p:sp>
+      <p:sp>
+        <p:nvSpPr>
+          <p:cNvPr id="13" name="Shape 11"/>
+          <p:cNvSpPr/>
+          <p:nvPr/>
+        </p:nvSpPr>
+        <p:spPr>
+          <a:xfrm>
+            <a:off x="9738360" y="2240280"/>
+            <a:ext cx="0" cy="3566160"/>
+          </a:xfrm>
+          <a:prstGeom prst="line">
+            <a:avLst/>
+          </a:prstGeom>
+          <a:noFill/>
+          <a:ln w="15240">
+            <a:solidFill>
+              <a:srgbClr val="757575"/>
+            </a:solidFill>
+            <a:prstDash val="dash"/>
+          </a:ln>
+        </p:spPr>
+      </p:sp>
+      <p:sp>
+        <p:nvSpPr>
+          <p:cNvPr id="14" name="Shape 12"/>
+          <p:cNvSpPr/>
+          <p:nvPr/>
+        </p:nvSpPr>
+        <p:spPr>
+          <a:xfrm>
+            <a:off x="5833872" y="2468880"/>
+            <a:ext cx="128016" cy="2926080"/>
+          </a:xfrm>
+          <a:prstGeom prst="rect">
+            <a:avLst/>
+          </a:prstGeom>
+          <a:solidFill>
+            <a:srgbClr val="E0F2F1"/>
+          </a:solidFill>
+          <a:ln w="12700">
+            <a:solidFill>
+              <a:srgbClr val="009688"/>
+            </a:solidFill>
+            <a:prstDash val="solid"/>
+          </a:ln>
+        </p:spPr>
+      </p:sp>
+      <p:sp>
+        <p:nvSpPr>
+          <p:cNvPr id="15" name="Shape 13"/>
+          <p:cNvSpPr/>
+          <p:nvPr/>
+        </p:nvSpPr>
+        <p:spPr>
+          <a:xfrm>
+            <a:off x="9674352" y="2880360"/>
+            <a:ext cx="128016" cy="777240"/>
+          </a:xfrm>
+          <a:prstGeom prst="rect">
+            <a:avLst/>
+          </a:prstGeom>
+          <a:solidFill>
+            <a:srgbClr val="E0F2F1"/>
+          </a:solidFill>
+          <a:ln w="12700">
+            <a:solidFill>
+              <a:srgbClr val="009688"/>
+            </a:solidFill>
+            <a:prstDash val="solid"/>
+          </a:ln>
+        </p:spPr>
+      </p:sp>
+      <p:sp>
+        <p:nvSpPr>
+          <p:cNvPr id="16" name="Shape 14"/>
+          <p:cNvSpPr/>
+          <p:nvPr/>
+        </p:nvSpPr>
+        <p:spPr>
+          <a:xfrm>
+            <a:off x="9674352" y="4160520"/>
+            <a:ext cx="128016" cy="777240"/>
+          </a:xfrm>
+          <a:prstGeom prst="rect">
+            <a:avLst/>
+          </a:prstGeom>
+          <a:solidFill>
+            <a:srgbClr val="E0F2F1"/>
+          </a:solidFill>
+          <a:ln w="12700">
+            <a:solidFill>
+              <a:srgbClr val="009688"/>
+            </a:solidFill>
+            <a:prstDash val="solid"/>
+          </a:ln>
+        </p:spPr>
+      </p:sp>
+      <p:sp>
+        <p:nvSpPr>
+          <p:cNvPr id="17" name="Shape 15"/>
+          <p:cNvSpPr/>
+          <p:nvPr/>
+        </p:nvSpPr>
+        <p:spPr>
+          <a:xfrm>
+            <a:off x="2057400" y="2468880"/>
+            <a:ext cx="3776472" cy="0"/>
+          </a:xfrm>
+          <a:prstGeom prst="line">
+            <a:avLst/>
+          </a:prstGeom>
+          <a:noFill/>
+          <a:ln w="19050">
+            <a:solidFill>
+              <a:srgbClr val="212121"/>
+            </a:solidFill>
+            <a:prstDash val="solid"/>
+            <a:tailEnd type="triangle"/>
+          </a:ln>
+        </p:spPr>
+      </p:sp>
+      <p:sp>
+        <p:nvSpPr>
+          <p:cNvPr id="18" name="Text 16"/>
+          <p:cNvSpPr/>
+          <p:nvPr/>
+        </p:nvSpPr>
+        <p:spPr>
+          <a:xfrm>
+            <a:off x="1463040" y="2148840"/>
+            <a:ext cx="2743200" cy="274320"/>
+          </a:xfrm>
+          <a:prstGeom prst="rect">
+            <a:avLst/>
+          </a:prstGeom>
+          <a:noFill/>
+          <a:ln/>
+        </p:spPr>
+        <p:txBody>
+          <a:bodyPr wrap="square" rtlCol="0" anchor="ctr"/>
+          <a:lstStyle/>
+          <a:p>
+            <a:pPr algn="ctr" indent="0" marL="0">
+              <a:buNone/>
+            </a:pPr>
+            <a:r>
+              <a:rPr lang="en-US" sz="1100" i="1" dirty="0">
+                <a:solidFill>
+                  <a:srgbClr val="757575"/>
+                </a:solidFill>
+                <a:latin typeface="Arial" pitchFamily="34" charset="0"/>
+                <a:ea typeface="Arial" pitchFamily="34" charset="-122"/>
+                <a:cs typeface="Arial" pitchFamily="34" charset="-120"/>
+              </a:rPr>
+              <a:t>1: finalizarCompra()</a:t>
+            </a:r>
+            <a:endParaRPr lang="en-US" sz="1100" dirty="0"/>
+          </a:p>
+        </p:txBody>
+      </p:sp>
+      <p:sp>
+        <p:nvSpPr>
+          <p:cNvPr id="19" name="Shape 17"/>
+          <p:cNvSpPr/>
+          <p:nvPr/>
+        </p:nvSpPr>
+        <p:spPr>
+          <a:xfrm>
+            <a:off x="5961888" y="2880360"/>
+            <a:ext cx="3712464" cy="0"/>
+          </a:xfrm>
+          <a:prstGeom prst="line">
+            <a:avLst/>
+          </a:prstGeom>
+          <a:noFill/>
+          <a:ln w="19050">
+            <a:solidFill>
+              <a:srgbClr val="212121"/>
+            </a:solidFill>
+            <a:prstDash val="solid"/>
+            <a:tailEnd type="triangle"/>
+          </a:ln>
+        </p:spPr>
+      </p:sp>
+      <p:sp>
+        <p:nvSpPr>
+          <p:cNvPr id="20" name="Text 18"/>
+          <p:cNvSpPr/>
+          <p:nvPr/>
+        </p:nvSpPr>
+        <p:spPr>
+          <a:xfrm>
+            <a:off x="5486400" y="2560320"/>
+            <a:ext cx="2743200" cy="274320"/>
+          </a:xfrm>
+          <a:prstGeom prst="rect">
+            <a:avLst/>
+          </a:prstGeom>
+          <a:noFill/>
+          <a:ln/>
+        </p:spPr>
+        <p:txBody>
+          <a:bodyPr wrap="square" rtlCol="0" anchor="ctr"/>
+          <a:lstStyle/>
+          <a:p>
+            <a:pPr algn="ctr" indent="0" marL="0">
+              <a:buNone/>
+            </a:pPr>
+            <a:r>
+              <a:rPr lang="en-US" sz="1100" i="1" dirty="0">
+                <a:solidFill>
+                  <a:srgbClr val="757575"/>
+                </a:solidFill>
+                <a:latin typeface="Arial" pitchFamily="34" charset="0"/>
+                <a:ea typeface="Arial" pitchFamily="34" charset="-122"/>
+                <a:cs typeface="Arial" pitchFamily="34" charset="-120"/>
+              </a:rPr>
+              <a:t>1.1: reservarProductos()</a:t>
+            </a:r>
+            <a:endParaRPr lang="en-US" sz="1100" dirty="0"/>
+          </a:p>
+        </p:txBody>
+      </p:sp>
+      <p:sp>
+        <p:nvSpPr>
+          <p:cNvPr id="21" name="Shape 19"/>
+          <p:cNvSpPr/>
+          <p:nvPr/>
+        </p:nvSpPr>
+        <p:spPr>
+          <a:xfrm flipH="1">
+            <a:off x="5961888" y="3657600"/>
+            <a:ext cx="3712464" cy="0"/>
+          </a:xfrm>
+          <a:prstGeom prst="line">
+            <a:avLst/>
+          </a:prstGeom>
+          <a:noFill/>
+          <a:ln w="19050">
+            <a:solidFill>
+              <a:srgbClr val="212121"/>
+            </a:solidFill>
+            <a:prstDash val="dash"/>
+            <a:tailEnd type="triangle"/>
+          </a:ln>
+        </p:spPr>
+      </p:sp>
+      <p:sp>
+        <p:nvSpPr>
+          <p:cNvPr id="22" name="Text 20"/>
+          <p:cNvSpPr/>
+          <p:nvPr/>
+        </p:nvSpPr>
+        <p:spPr>
+          <a:xfrm>
+            <a:off x="6949440" y="3337560"/>
+            <a:ext cx="1097280" cy="274320"/>
+          </a:xfrm>
+          <a:prstGeom prst="rect">
+            <a:avLst/>
+          </a:prstGeom>
+          <a:noFill/>
+          <a:ln/>
+        </p:spPr>
+        <p:txBody>
+          <a:bodyPr wrap="square" rtlCol="0" anchor="ctr"/>
+          <a:lstStyle/>
+          <a:p>
+            <a:pPr algn="ctr" indent="0" marL="0">
+              <a:buNone/>
+            </a:pPr>
+            <a:r>
+              <a:rPr lang="en-US" sz="1100" i="1" dirty="0">
+                <a:solidFill>
+                  <a:srgbClr val="757575"/>
+                </a:solidFill>
+                <a:latin typeface="Arial" pitchFamily="34" charset="0"/>
+                <a:ea typeface="Arial" pitchFamily="34" charset="-122"/>
+                <a:cs typeface="Arial" pitchFamily="34" charset="-120"/>
+              </a:rPr>
+              <a:t>ok</a:t>
+            </a:r>
+            <a:endParaRPr lang="en-US" sz="1100" dirty="0"/>
+          </a:p>
+        </p:txBody>
+      </p:sp>
+      <p:sp>
+        <p:nvSpPr>
+          <p:cNvPr id="23" name="Shape 21"/>
+          <p:cNvSpPr/>
+          <p:nvPr/>
+        </p:nvSpPr>
+        <p:spPr>
+          <a:xfrm>
+            <a:off x="5961888" y="4160520"/>
+            <a:ext cx="3712464" cy="0"/>
+          </a:xfrm>
+          <a:prstGeom prst="line">
+            <a:avLst/>
+          </a:prstGeom>
+          <a:noFill/>
+          <a:ln w="19050">
+            <a:solidFill>
+              <a:srgbClr val="212121"/>
+            </a:solidFill>
+            <a:prstDash val="solid"/>
+            <a:tailEnd type="triangle"/>
+          </a:ln>
+        </p:spPr>
+      </p:sp>
+      <p:sp>
+        <p:nvSpPr>
+          <p:cNvPr id="24" name="Text 22"/>
+          <p:cNvSpPr/>
+          <p:nvPr/>
+        </p:nvSpPr>
+        <p:spPr>
+          <a:xfrm>
+            <a:off x="5852160" y="3840480"/>
+            <a:ext cx="2194560" cy="274320"/>
+          </a:xfrm>
+          <a:prstGeom prst="rect">
+            <a:avLst/>
+          </a:prstGeom>
+          <a:noFill/>
+          <a:ln/>
+        </p:spPr>
+        <p:txBody>
+          <a:bodyPr wrap="square" rtlCol="0" anchor="ctr"/>
+          <a:lstStyle/>
+          <a:p>
+            <a:pPr algn="ctr" indent="0" marL="0">
+              <a:buNone/>
+            </a:pPr>
+            <a:r>
+              <a:rPr lang="en-US" sz="1100" i="1" dirty="0">
+                <a:solidFill>
+                  <a:srgbClr val="757575"/>
+                </a:solidFill>
+                <a:latin typeface="Arial" pitchFamily="34" charset="0"/>
+                <a:ea typeface="Arial" pitchFamily="34" charset="-122"/>
+                <a:cs typeface="Arial" pitchFamily="34" charset="-120"/>
+              </a:rPr>
+              <a:t>1.2: cobrar()</a:t>
+            </a:r>
+            <a:endParaRPr lang="en-US" sz="1100" dirty="0"/>
+          </a:p>
+        </p:txBody>
+      </p:sp>
+      <p:sp>
+        <p:nvSpPr>
+          <p:cNvPr id="25" name="Shape 23"/>
+          <p:cNvSpPr/>
+          <p:nvPr/>
+        </p:nvSpPr>
+        <p:spPr>
+          <a:xfrm flipH="1">
+            <a:off x="5961888" y="4937760"/>
+            <a:ext cx="3712464" cy="0"/>
+          </a:xfrm>
+          <a:prstGeom prst="line">
+            <a:avLst/>
+          </a:prstGeom>
+          <a:noFill/>
+          <a:ln w="19050">
+            <a:solidFill>
+              <a:srgbClr val="212121"/>
+            </a:solidFill>
+            <a:prstDash val="dash"/>
+            <a:tailEnd type="triangle"/>
+          </a:ln>
+        </p:spPr>
+      </p:sp>
+      <p:sp>
+        <p:nvSpPr>
+          <p:cNvPr id="26" name="Text 24"/>
+          <p:cNvSpPr/>
+          <p:nvPr/>
+        </p:nvSpPr>
+        <p:spPr>
+          <a:xfrm>
+            <a:off x="6949440" y="4617720"/>
+            <a:ext cx="1097280" cy="274320"/>
+          </a:xfrm>
+          <a:prstGeom prst="rect">
+            <a:avLst/>
+          </a:prstGeom>
+          <a:noFill/>
+          <a:ln/>
+        </p:spPr>
+        <p:txBody>
+          <a:bodyPr wrap="square" rtlCol="0" anchor="ctr"/>
+          <a:lstStyle/>
+          <a:p>
+            <a:pPr algn="ctr" indent="0" marL="0">
+              <a:buNone/>
+            </a:pPr>
+            <a:r>
+              <a:rPr lang="en-US" sz="1100" i="1" dirty="0">
+                <a:solidFill>
+                  <a:srgbClr val="757575"/>
+                </a:solidFill>
+                <a:latin typeface="Arial" pitchFamily="34" charset="0"/>
+                <a:ea typeface="Arial" pitchFamily="34" charset="-122"/>
+                <a:cs typeface="Arial" pitchFamily="34" charset="-120"/>
+              </a:rPr>
+              <a:t>ok</a:t>
+            </a:r>
+            <a:endParaRPr lang="en-US" sz="1100" dirty="0"/>
+          </a:p>
+        </p:txBody>
+      </p:sp>
+      <p:sp>
+        <p:nvSpPr>
+          <p:cNvPr id="27" name="Text 25"/>
+          <p:cNvSpPr/>
+          <p:nvPr/>
+        </p:nvSpPr>
+        <p:spPr>
+          <a:xfrm>
+            <a:off x="548640" y="6473952"/>
+            <a:ext cx="11091672" cy="292608"/>
+          </a:xfrm>
+          <a:prstGeom prst="rect">
+            <a:avLst/>
+          </a:prstGeom>
+          <a:noFill/>
+          <a:ln/>
+        </p:spPr>
+        <p:txBody>
+          <a:bodyPr wrap="square" rtlCol="0" anchor="ctr"/>
+          <a:lstStyle/>
+          <a:p>
+            <a:pPr algn="r" indent="0" marL="0">
+              <a:buNone/>
+            </a:pPr>
+            <a:r>
+              <a:rPr lang="en-US" sz="1100" dirty="0">
+                <a:solidFill>
+                  <a:srgbClr val="757575"/>
+                </a:solidFill>
+                <a:latin typeface="Arial" pitchFamily="34" charset="0"/>
+                <a:ea typeface="Arial" pitchFamily="34" charset="-122"/>
+                <a:cs typeface="Arial" pitchFamily="34" charset="-120"/>
+              </a:rPr>
+              <a:t>Entornos de Desarrollo — Tema 6 · Diagramas de interacción</a:t>
+            </a:r>
+            <a:endParaRPr lang="en-US" sz="1100" dirty="0"/>
+          </a:p>
+        </p:txBody>
+      </p:sp>
+    </p:spTree>
+  </p:cSld>
+  <p:clrMapOvr>
+    <a:masterClrMapping/>
+  </p:clrMapOvr>
+</p:sld>
+</file>
+
+<file path=ppt/slides/slide19.xml><?xml version="1.0" encoding="utf-8"?>
+<p:sld xmlns:a="http://schemas.openxmlformats.org/drawingml/2006/main" xmlns:r="http://schemas.openxmlformats.org/officeDocument/2006/relationships" xmlns:p="http://schemas.openxmlformats.org/presentationml/2006/main">
+  <p:cSld name="Slide 19">
+    <p:spTree>
+      <p:nvGrpSpPr>
+        <p:cNvPr id="1" name=""/>
+        <p:cNvGrpSpPr/>
+        <p:nvPr/>
+      </p:nvGrpSpPr>
+      <p:grpSpPr>
+        <a:xfrm>
+          <a:off x="0" y="0"/>
+          <a:ext cx="0" cy="0"/>
+          <a:chOff x="0" y="0"/>
+          <a:chExt cx="0" cy="0"/>
+        </a:xfrm>
+      </p:grpSpPr>
+      <p:sp>
+        <p:nvSpPr>
+          <p:cNvPr id="2" name="Shape 0"/>
+          <p:cNvSpPr/>
+          <p:nvPr/>
+        </p:nvSpPr>
+        <p:spPr>
+          <a:xfrm>
+            <a:off x="0" y="0"/>
+            <a:ext cx="12188952" cy="777240"/>
+          </a:xfrm>
+          <a:prstGeom prst="rect">
+            <a:avLst/>
+          </a:prstGeom>
+          <a:solidFill>
+            <a:srgbClr val="303F9F"/>
+          </a:solidFill>
+          <a:ln w="12700">
+            <a:solidFill>
+              <a:srgbClr val="303F9F"/>
+            </a:solidFill>
+            <a:prstDash val="solid"/>
+          </a:ln>
+        </p:spPr>
+      </p:sp>
+      <p:sp>
+        <p:nvSpPr>
+          <p:cNvPr id="3" name="Text 1"/>
+          <p:cNvSpPr/>
+          <p:nvPr/>
+        </p:nvSpPr>
+        <p:spPr>
+          <a:xfrm>
+            <a:off x="365760" y="0"/>
+            <a:ext cx="11457432" cy="777240"/>
+          </a:xfrm>
+          <a:prstGeom prst="rect">
+            <a:avLst/>
+          </a:prstGeom>
+          <a:noFill/>
+          <a:ln/>
+        </p:spPr>
+        <p:txBody>
+          <a:bodyPr wrap="square" rtlCol="0" anchor="ctr"/>
+          <a:lstStyle/>
+          <a:p>
+            <a:pPr indent="0" marL="0">
+              <a:buNone/>
+            </a:pPr>
+            <a:r>
+              <a:rPr lang="en-US" sz="2300" b="1" dirty="0">
+                <a:solidFill>
+                  <a:srgbClr val="FFFFFF"/>
+                </a:solidFill>
+                <a:latin typeface="Arial" pitchFamily="34" charset="0"/>
+                <a:ea typeface="Arial" pitchFamily="34" charset="-122"/>
+                <a:cs typeface="Arial" pitchFamily="34" charset="-120"/>
+              </a:rPr>
+              <a:t>Un mismo diagrama, dos vistas: comunicación</a:t>
+            </a:r>
+            <a:endParaRPr lang="en-US" sz="2300" dirty="0"/>
+          </a:p>
+        </p:txBody>
+      </p:sp>
+      <p:sp>
+        <p:nvSpPr>
+          <p:cNvPr id="4" name="Shape 2"/>
+          <p:cNvSpPr/>
+          <p:nvPr/>
+        </p:nvSpPr>
+        <p:spPr>
+          <a:xfrm>
+            <a:off x="640080" y="2148840"/>
+            <a:ext cx="1554480" cy="548640"/>
+          </a:xfrm>
+          <a:prstGeom prst="roundRect">
+            <a:avLst/>
+          </a:prstGeom>
+          <a:solidFill>
+            <a:srgbClr val="E0F2F1"/>
+          </a:solidFill>
+          <a:ln w="19050">
+            <a:solidFill>
+              <a:srgbClr val="009688"/>
+            </a:solidFill>
+            <a:prstDash val="solid"/>
+          </a:ln>
+        </p:spPr>
+      </p:sp>
+      <p:sp>
+        <p:nvSpPr>
+          <p:cNvPr id="5" name="Text 3"/>
+          <p:cNvSpPr/>
+          <p:nvPr/>
+        </p:nvSpPr>
+        <p:spPr>
+          <a:xfrm>
+            <a:off x="640080" y="2148840"/>
+            <a:ext cx="1554480" cy="548640"/>
+          </a:xfrm>
+          <a:prstGeom prst="rect">
+            <a:avLst/>
+          </a:prstGeom>
+          <a:noFill/>
+          <a:ln/>
+        </p:spPr>
+        <p:txBody>
+          <a:bodyPr wrap="square" rtlCol="0" anchor="ctr"/>
+          <a:lstStyle/>
+          <a:p>
+            <a:pPr algn="ctr" indent="0" marL="0">
+              <a:buNone/>
+            </a:pPr>
+            <a:r>
+              <a:rPr lang="en-US" sz="1400" b="1" dirty="0">
+                <a:solidFill>
+                  <a:srgbClr val="212121"/>
+                </a:solidFill>
+                <a:latin typeface="Arial" pitchFamily="34" charset="0"/>
+                <a:ea typeface="Arial" pitchFamily="34" charset="-122"/>
+                <a:cs typeface="Arial" pitchFamily="34" charset="-120"/>
+              </a:rPr>
+              <a:t>Usuario</a:t>
+            </a:r>
+            <a:endParaRPr lang="en-US" sz="1400" dirty="0"/>
+          </a:p>
+        </p:txBody>
+      </p:sp>
+      <p:sp>
+        <p:nvSpPr>
+          <p:cNvPr id="6" name="Shape 4"/>
+          <p:cNvSpPr/>
+          <p:nvPr/>
+        </p:nvSpPr>
+        <p:spPr>
+          <a:xfrm>
+            <a:off x="3657600" y="2148840"/>
+            <a:ext cx="1554480" cy="548640"/>
+          </a:xfrm>
+          <a:prstGeom prst="roundRect">
+            <a:avLst/>
+          </a:prstGeom>
+          <a:solidFill>
+            <a:srgbClr val="E8EAF6"/>
+          </a:solidFill>
+          <a:ln w="19050">
+            <a:solidFill>
+              <a:srgbClr val="3F51B5"/>
+            </a:solidFill>
+            <a:prstDash val="solid"/>
+          </a:ln>
+        </p:spPr>
+      </p:sp>
+      <p:sp>
+        <p:nvSpPr>
+          <p:cNvPr id="7" name="Text 5"/>
+          <p:cNvSpPr/>
+          <p:nvPr/>
+        </p:nvSpPr>
+        <p:spPr>
+          <a:xfrm>
+            <a:off x="3657600" y="2148840"/>
+            <a:ext cx="1554480" cy="548640"/>
+          </a:xfrm>
+          <a:prstGeom prst="rect">
+            <a:avLst/>
+          </a:prstGeom>
+          <a:noFill/>
+          <a:ln/>
+        </p:spPr>
+        <p:txBody>
+          <a:bodyPr wrap="square" rtlCol="0" anchor="ctr"/>
+          <a:lstStyle/>
+          <a:p>
+            <a:pPr algn="ctr" indent="0" marL="0">
+              <a:buNone/>
+            </a:pPr>
+            <a:r>
+              <a:rPr lang="en-US" sz="1400" b="1" dirty="0">
+                <a:solidFill>
+                  <a:srgbClr val="212121"/>
+                </a:solidFill>
+                <a:latin typeface="Arial" pitchFamily="34" charset="0"/>
+                <a:ea typeface="Arial" pitchFamily="34" charset="-122"/>
+                <a:cs typeface="Arial" pitchFamily="34" charset="-120"/>
+              </a:rPr>
+              <a:t>Web</a:t>
+            </a:r>
+            <a:endParaRPr lang="en-US" sz="1400" dirty="0"/>
+          </a:p>
+        </p:txBody>
+      </p:sp>
+      <p:sp>
+        <p:nvSpPr>
+          <p:cNvPr id="8" name="Shape 6"/>
+          <p:cNvSpPr/>
+          <p:nvPr/>
+        </p:nvSpPr>
+        <p:spPr>
+          <a:xfrm>
+            <a:off x="6675120" y="1143000"/>
+            <a:ext cx="1737360" cy="548640"/>
+          </a:xfrm>
+          <a:prstGeom prst="roundRect">
+            <a:avLst/>
+          </a:prstGeom>
+          <a:solidFill>
+            <a:srgbClr val="E8EAF6"/>
+          </a:solidFill>
+          <a:ln w="19050">
+            <a:solidFill>
+              <a:srgbClr val="3F51B5"/>
+            </a:solidFill>
+            <a:prstDash val="solid"/>
+          </a:ln>
+        </p:spPr>
+      </p:sp>
+      <p:sp>
+        <p:nvSpPr>
+          <p:cNvPr id="9" name="Text 7"/>
+          <p:cNvSpPr/>
+          <p:nvPr/>
+        </p:nvSpPr>
+        <p:spPr>
+          <a:xfrm>
+            <a:off x="6675120" y="1143000"/>
+            <a:ext cx="1737360" cy="548640"/>
+          </a:xfrm>
+          <a:prstGeom prst="rect">
+            <a:avLst/>
+          </a:prstGeom>
+          <a:noFill/>
+          <a:ln/>
+        </p:spPr>
+        <p:txBody>
+          <a:bodyPr wrap="square" rtlCol="0" anchor="ctr"/>
+          <a:lstStyle/>
+          <a:p>
+            <a:pPr algn="ctr" indent="0" marL="0">
+              <a:buNone/>
+            </a:pPr>
+            <a:r>
+              <a:rPr lang="en-US" sz="1400" b="1" dirty="0">
+                <a:solidFill>
+                  <a:srgbClr val="212121"/>
+                </a:solidFill>
+                <a:latin typeface="Arial" pitchFamily="34" charset="0"/>
+                <a:ea typeface="Arial" pitchFamily="34" charset="-122"/>
+                <a:cs typeface="Arial" pitchFamily="34" charset="-120"/>
+              </a:rPr>
+              <a:t>Stock</a:t>
+            </a:r>
+            <a:endParaRPr lang="en-US" sz="1400" dirty="0"/>
+          </a:p>
+        </p:txBody>
+      </p:sp>
+      <p:sp>
+        <p:nvSpPr>
+          <p:cNvPr id="10" name="Shape 8"/>
+          <p:cNvSpPr/>
+          <p:nvPr/>
+        </p:nvSpPr>
+        <p:spPr>
+          <a:xfrm>
+            <a:off x="6675120" y="3154680"/>
+            <a:ext cx="1737360" cy="548640"/>
+          </a:xfrm>
+          <a:prstGeom prst="roundRect">
+            <a:avLst/>
+          </a:prstGeom>
+          <a:solidFill>
+            <a:srgbClr val="E8EAF6"/>
+          </a:solidFill>
+          <a:ln w="19050">
+            <a:solidFill>
+              <a:srgbClr val="3F51B5"/>
+            </a:solidFill>
+            <a:prstDash val="solid"/>
+          </a:ln>
+        </p:spPr>
+      </p:sp>
+      <p:sp>
+        <p:nvSpPr>
+          <p:cNvPr id="11" name="Text 9"/>
+          <p:cNvSpPr/>
+          <p:nvPr/>
+        </p:nvSpPr>
+        <p:spPr>
+          <a:xfrm>
+            <a:off x="6675120" y="3154680"/>
+            <a:ext cx="1737360" cy="548640"/>
+          </a:xfrm>
+          <a:prstGeom prst="rect">
+            <a:avLst/>
+          </a:prstGeom>
+          <a:noFill/>
+          <a:ln/>
+        </p:spPr>
+        <p:txBody>
+          <a:bodyPr wrap="square" rtlCol="0" anchor="ctr"/>
+          <a:lstStyle/>
+          <a:p>
+            <a:pPr algn="ctr" indent="0" marL="0">
+              <a:buNone/>
+            </a:pPr>
+            <a:r>
+              <a:rPr lang="en-US" sz="1400" b="1" dirty="0">
+                <a:solidFill>
+                  <a:srgbClr val="212121"/>
+                </a:solidFill>
+                <a:latin typeface="Arial" pitchFamily="34" charset="0"/>
+                <a:ea typeface="Arial" pitchFamily="34" charset="-122"/>
+                <a:cs typeface="Arial" pitchFamily="34" charset="-120"/>
+              </a:rPr>
+              <a:t>Pago</a:t>
+            </a:r>
+            <a:endParaRPr lang="en-US" sz="1400" dirty="0"/>
+          </a:p>
+        </p:txBody>
+      </p:sp>
+      <p:sp>
+        <p:nvSpPr>
+          <p:cNvPr id="12" name="Shape 10"/>
+          <p:cNvSpPr/>
+          <p:nvPr/>
+        </p:nvSpPr>
+        <p:spPr>
+          <a:xfrm>
+            <a:off x="2194560" y="2423160"/>
+            <a:ext cx="1463040" cy="0"/>
+          </a:xfrm>
+          <a:prstGeom prst="line">
+            <a:avLst/>
+          </a:prstGeom>
+          <a:noFill/>
+          <a:ln w="19050">
+            <a:solidFill>
+              <a:srgbClr val="212121"/>
+            </a:solidFill>
+            <a:prstDash val="solid"/>
+            <a:tailEnd type="triangle"/>
+          </a:ln>
+        </p:spPr>
+      </p:sp>
+      <p:sp>
+        <p:nvSpPr>
+          <p:cNvPr id="13" name="Text 11"/>
+          <p:cNvSpPr/>
+          <p:nvPr/>
+        </p:nvSpPr>
+        <p:spPr>
+          <a:xfrm>
+            <a:off x="2148840" y="2084832"/>
+            <a:ext cx="1828800" cy="274320"/>
+          </a:xfrm>
+          <a:prstGeom prst="rect">
+            <a:avLst/>
+          </a:prstGeom>
+          <a:noFill/>
+          <a:ln/>
+        </p:spPr>
+        <p:txBody>
+          <a:bodyPr wrap="square" rtlCol="0" anchor="ctr"/>
+          <a:lstStyle/>
+          <a:p>
+            <a:pPr algn="ctr" indent="0" marL="0">
+              <a:buNone/>
+            </a:pPr>
+            <a:r>
+              <a:rPr lang="en-US" sz="1100" i="1" dirty="0">
+                <a:solidFill>
+                  <a:srgbClr val="757575"/>
+                </a:solidFill>
+                <a:latin typeface="Arial" pitchFamily="34" charset="0"/>
+                <a:ea typeface="Arial" pitchFamily="34" charset="-122"/>
+                <a:cs typeface="Arial" pitchFamily="34" charset="-120"/>
+              </a:rPr>
+              <a:t>1: finalizarCompra()</a:t>
+            </a:r>
+            <a:endParaRPr lang="en-US" sz="1100" dirty="0"/>
+          </a:p>
+        </p:txBody>
+      </p:sp>
+      <p:sp>
+        <p:nvSpPr>
+          <p:cNvPr id="14" name="Shape 12"/>
+          <p:cNvSpPr/>
+          <p:nvPr/>
+        </p:nvSpPr>
+        <p:spPr>
+          <a:xfrm flipV="1">
+            <a:off x="5212080" y="1417320"/>
+            <a:ext cx="1463040" cy="1005840"/>
+          </a:xfrm>
+          <a:prstGeom prst="line">
+            <a:avLst/>
+          </a:prstGeom>
+          <a:noFill/>
+          <a:ln w="19050">
+            <a:solidFill>
+              <a:srgbClr val="212121"/>
+            </a:solidFill>
+            <a:prstDash val="solid"/>
+            <a:tailEnd type="triangle"/>
+          </a:ln>
+        </p:spPr>
+      </p:sp>
+      <p:sp>
+        <p:nvSpPr>
+          <p:cNvPr id="15" name="Text 13"/>
+          <p:cNvSpPr/>
+          <p:nvPr/>
+        </p:nvSpPr>
+        <p:spPr>
+          <a:xfrm>
+            <a:off x="5074920" y="1600200"/>
+            <a:ext cx="2148840" cy="274320"/>
+          </a:xfrm>
+          <a:prstGeom prst="rect">
+            <a:avLst/>
+          </a:prstGeom>
+          <a:noFill/>
+          <a:ln/>
+        </p:spPr>
+        <p:txBody>
+          <a:bodyPr wrap="square" rtlCol="0" anchor="ctr"/>
+          <a:lstStyle/>
+          <a:p>
+            <a:pPr algn="ctr" indent="0" marL="0">
+              <a:buNone/>
+            </a:pPr>
+            <a:r>
+              <a:rPr lang="en-US" sz="1100" i="1" dirty="0">
+                <a:solidFill>
+                  <a:srgbClr val="757575"/>
+                </a:solidFill>
+                <a:latin typeface="Arial" pitchFamily="34" charset="0"/>
+                <a:ea typeface="Arial" pitchFamily="34" charset="-122"/>
+                <a:cs typeface="Arial" pitchFamily="34" charset="-120"/>
+              </a:rPr>
+              <a:t>1.1: reservarProductos()</a:t>
+            </a:r>
+            <a:endParaRPr lang="en-US" sz="1100" dirty="0"/>
+          </a:p>
+        </p:txBody>
+      </p:sp>
+      <p:sp>
+        <p:nvSpPr>
+          <p:cNvPr id="16" name="Shape 14"/>
+          <p:cNvSpPr/>
+          <p:nvPr/>
+        </p:nvSpPr>
+        <p:spPr>
+          <a:xfrm>
+            <a:off x="5212080" y="2423160"/>
+            <a:ext cx="1463040" cy="1005840"/>
+          </a:xfrm>
+          <a:prstGeom prst="line">
+            <a:avLst/>
+          </a:prstGeom>
+          <a:noFill/>
+          <a:ln w="19050">
+            <a:solidFill>
+              <a:srgbClr val="212121"/>
+            </a:solidFill>
+            <a:prstDash val="solid"/>
+            <a:tailEnd type="triangle"/>
+          </a:ln>
+        </p:spPr>
+      </p:sp>
+      <p:sp>
+        <p:nvSpPr>
+          <p:cNvPr id="17" name="Text 15"/>
+          <p:cNvSpPr/>
+          <p:nvPr/>
+        </p:nvSpPr>
+        <p:spPr>
+          <a:xfrm>
+            <a:off x="5349240" y="2788920"/>
+            <a:ext cx="1737360" cy="274320"/>
+          </a:xfrm>
+          <a:prstGeom prst="rect">
+            <a:avLst/>
+          </a:prstGeom>
+          <a:noFill/>
+          <a:ln/>
+        </p:spPr>
+        <p:txBody>
+          <a:bodyPr wrap="square" rtlCol="0" anchor="ctr"/>
+          <a:lstStyle/>
+          <a:p>
+            <a:pPr algn="ctr" indent="0" marL="0">
+              <a:buNone/>
+            </a:pPr>
+            <a:r>
+              <a:rPr lang="en-US" sz="1100" i="1" dirty="0">
+                <a:solidFill>
+                  <a:srgbClr val="757575"/>
+                </a:solidFill>
+                <a:latin typeface="Arial" pitchFamily="34" charset="0"/>
+                <a:ea typeface="Arial" pitchFamily="34" charset="-122"/>
+                <a:cs typeface="Arial" pitchFamily="34" charset="-120"/>
+              </a:rPr>
+              <a:t>1.2: cobrar()</a:t>
+            </a:r>
+            <a:endParaRPr lang="en-US" sz="1100" dirty="0"/>
+          </a:p>
+        </p:txBody>
+      </p:sp>
+      <p:sp>
+        <p:nvSpPr>
+          <p:cNvPr id="18" name="Shape 16"/>
+          <p:cNvSpPr/>
+          <p:nvPr/>
+        </p:nvSpPr>
+        <p:spPr>
+          <a:xfrm>
+            <a:off x="548640" y="3977640"/>
+            <a:ext cx="11091672" cy="594360"/>
+          </a:xfrm>
+          <a:prstGeom prst="roundRect">
+            <a:avLst/>
+          </a:prstGeom>
+          <a:solidFill>
+            <a:srgbClr val="E0F2F1"/>
+          </a:solidFill>
+          <a:ln w="19050">
+            <a:solidFill>
+              <a:srgbClr val="009688"/>
+            </a:solidFill>
+            <a:prstDash val="solid"/>
+          </a:ln>
+        </p:spPr>
+      </p:sp>
+      <p:sp>
+        <p:nvSpPr>
+          <p:cNvPr id="19" name="Text 17"/>
+          <p:cNvSpPr/>
+          <p:nvPr/>
+        </p:nvSpPr>
+        <p:spPr>
+          <a:xfrm>
+            <a:off x="777240" y="4050792"/>
+            <a:ext cx="10634472" cy="448056"/>
+          </a:xfrm>
+          <a:prstGeom prst="rect">
+            <a:avLst/>
+          </a:prstGeom>
+          <a:noFill/>
+          <a:ln/>
+        </p:spPr>
+        <p:txBody>
+          <a:bodyPr wrap="square" rtlCol="0" anchor="ctr"/>
+          <a:lstStyle/>
+          <a:p>
+            <a:pPr indent="0" marL="0">
+              <a:buNone/>
+            </a:pPr>
+            <a:r>
+              <a:rPr lang="en-US" sz="1400" dirty="0">
+                <a:solidFill>
+                  <a:srgbClr val="212121"/>
+                </a:solidFill>
+                <a:latin typeface="Arial" pitchFamily="34" charset="0"/>
+                <a:ea typeface="Arial" pitchFamily="34" charset="-122"/>
+                <a:cs typeface="Arial" pitchFamily="34" charset="-120"/>
+              </a:rPr>
+              <a:t>Ya no hay eje temporal: se ven los objetos y sus canales; el orden queda solo en las etiquetas.</a:t>
+            </a:r>
+            <a:endParaRPr lang="en-US" sz="1400" dirty="0"/>
+          </a:p>
+        </p:txBody>
+      </p:sp>
+      <p:sp>
+        <p:nvSpPr>
+          <p:cNvPr id="20" name="Shape 18"/>
+          <p:cNvSpPr/>
+          <p:nvPr/>
+        </p:nvSpPr>
+        <p:spPr>
+          <a:xfrm>
+            <a:off x="548640" y="4754880"/>
+            <a:ext cx="11091672" cy="1051560"/>
+          </a:xfrm>
+          <a:prstGeom prst="roundRect">
+            <a:avLst/>
+          </a:prstGeom>
+          <a:solidFill>
+            <a:srgbClr val="E0F2F1"/>
+          </a:solidFill>
+          <a:ln w="19050">
+            <a:solidFill>
+              <a:srgbClr val="009688"/>
+            </a:solidFill>
+            <a:prstDash val="solid"/>
+          </a:ln>
+        </p:spPr>
+      </p:sp>
+      <p:sp>
+        <p:nvSpPr>
+          <p:cNvPr id="21" name="Text 19"/>
+          <p:cNvSpPr/>
+          <p:nvPr/>
+        </p:nvSpPr>
+        <p:spPr>
+          <a:xfrm>
+            <a:off x="777240" y="4828032"/>
+            <a:ext cx="10634472" cy="905256"/>
+          </a:xfrm>
+          <a:prstGeom prst="rect">
+            <a:avLst/>
+          </a:prstGeom>
+          <a:noFill/>
+          <a:ln/>
+        </p:spPr>
+        <p:txBody>
+          <a:bodyPr wrap="square" rtlCol="0" anchor="ctr"/>
+          <a:lstStyle/>
+          <a:p>
+            <a:pPr indent="0" marL="0">
+              <a:buNone/>
+            </a:pPr>
+            <a:r>
+              <a:rPr lang="en-US" sz="1400" dirty="0">
+                <a:solidFill>
+                  <a:srgbClr val="212121"/>
+                </a:solidFill>
+                <a:latin typeface="Arial" pitchFamily="34" charset="0"/>
+                <a:ea typeface="Arial" pitchFamily="34" charset="-122"/>
+                <a:cs typeface="Arial" pitchFamily="34" charset="-120"/>
+              </a:rPr>
+              <a:t>La diferencia, de un vistazo: en SECUENCIA ves el orden temporal y cuánto tiempo está activo cada objeto. En COMUNICACIÓN ves las relaciones (quién habla con quién) y el orden se lee en las etiquetas 1, 1.1, 1.2.</a:t>
+            </a:r>
+            <a:endParaRPr lang="en-US" sz="1400" dirty="0"/>
+          </a:p>
+        </p:txBody>
+      </p:sp>
+      <p:sp>
+        <p:nvSpPr>
+          <p:cNvPr id="22" name="Text 20"/>
+          <p:cNvSpPr/>
+          <p:nvPr/>
+        </p:nvSpPr>
+        <p:spPr>
+          <a:xfrm>
+            <a:off x="548640" y="6473952"/>
+            <a:ext cx="11091672" cy="292608"/>
+          </a:xfrm>
+          <a:prstGeom prst="rect">
+            <a:avLst/>
+          </a:prstGeom>
+          <a:noFill/>
+          <a:ln/>
+        </p:spPr>
+        <p:txBody>
+          <a:bodyPr wrap="square" rtlCol="0" anchor="ctr"/>
+          <a:lstStyle/>
+          <a:p>
+            <a:pPr algn="r" indent="0" marL="0">
+              <a:buNone/>
+            </a:pPr>
+            <a:r>
+              <a:rPr lang="en-US" sz="1100" dirty="0">
+                <a:solidFill>
+                  <a:srgbClr val="757575"/>
+                </a:solidFill>
+                <a:latin typeface="Arial" pitchFamily="34" charset="0"/>
+                <a:ea typeface="Arial" pitchFamily="34" charset="-122"/>
+                <a:cs typeface="Arial" pitchFamily="34" charset="-120"/>
+              </a:rPr>
+              <a:t>Entornos de Desarrollo — Tema 6 · Diagramas de interacción</a:t>
+            </a:r>
+            <a:endParaRPr lang="en-US" sz="1100" dirty="0"/>
+          </a:p>
+        </p:txBody>
+      </p:sp>
+    </p:spTree>
+  </p:cSld>
+  <p:clrMapOvr>
+    <a:masterClrMapping/>
+  </p:clrMapOvr>
+</p:sld>
+</file>
+
 <file path=ppt/slides/slide2.xml><?xml version="1.0" encoding="utf-8"?>
 <p:sld xmlns:a="http://schemas.openxmlformats.org/drawingml/2006/main" xmlns:r="http://schemas.openxmlformats.org/officeDocument/2006/relationships" xmlns:p="http://schemas.openxmlformats.org/presentationml/2006/main">
   <p:cSld name="Slide 2">
@@ -4354,6 +10058,876 @@
                 <a:ea typeface="Arial" pitchFamily="34" charset="-122"/>
                 <a:cs typeface="Arial" pitchFamily="34" charset="-120"/>
               </a:rPr>
+              <a:t>En DIA — objeto y activación</a:t>
+            </a:r>
+            <a:endParaRPr lang="en-US" sz="2300" dirty="0"/>
+          </a:p>
+        </p:txBody>
+      </p:sp>
+      <p:sp>
+        <p:nvSpPr>
+          <p:cNvPr id="4" name="Shape 2"/>
+          <p:cNvSpPr/>
+          <p:nvPr/>
+        </p:nvSpPr>
+        <p:spPr>
+          <a:xfrm>
+            <a:off x="548640" y="1051560"/>
+            <a:ext cx="5394960" cy="411480"/>
+          </a:xfrm>
+          <a:prstGeom prst="rect">
+            <a:avLst/>
+          </a:prstGeom>
+          <a:solidFill>
+            <a:srgbClr val="3F51B5"/>
+          </a:solidFill>
+          <a:ln w="12700">
+            <a:solidFill>
+              <a:srgbClr val="3F51B5"/>
+            </a:solidFill>
+            <a:prstDash val="solid"/>
+          </a:ln>
+        </p:spPr>
+      </p:sp>
+      <p:sp>
+        <p:nvSpPr>
+          <p:cNvPr id="5" name="Text 3"/>
+          <p:cNvSpPr/>
+          <p:nvPr/>
+        </p:nvSpPr>
+        <p:spPr>
+          <a:xfrm>
+            <a:off x="685800" y="1051560"/>
+            <a:ext cx="5120640" cy="411480"/>
+          </a:xfrm>
+          <a:prstGeom prst="rect">
+            <a:avLst/>
+          </a:prstGeom>
+          <a:noFill/>
+          <a:ln/>
+        </p:spPr>
+        <p:txBody>
+          <a:bodyPr wrap="square" rtlCol="0" anchor="ctr"/>
+          <a:lstStyle/>
+          <a:p>
+            <a:pPr indent="0" marL="0">
+              <a:buNone/>
+            </a:pPr>
+            <a:r>
+              <a:rPr lang="en-US" sz="1600" b="1" dirty="0">
+                <a:solidFill>
+                  <a:srgbClr val="FFFFFF"/>
+                </a:solidFill>
+                <a:latin typeface="Arial" pitchFamily="34" charset="0"/>
+                <a:ea typeface="Arial" pitchFamily="34" charset="-122"/>
+                <a:cs typeface="Arial" pitchFamily="34" charset="-120"/>
+              </a:rPr>
+              <a:t>Añadir un objeto</a:t>
+            </a:r>
+            <a:endParaRPr lang="en-US" sz="1600" dirty="0"/>
+          </a:p>
+        </p:txBody>
+      </p:sp>
+      <p:sp>
+        <p:nvSpPr>
+          <p:cNvPr id="6" name="Text 4"/>
+          <p:cNvSpPr/>
+          <p:nvPr/>
+        </p:nvSpPr>
+        <p:spPr>
+          <a:xfrm>
+            <a:off x="548640" y="1600200"/>
+            <a:ext cx="5394960" cy="822960"/>
+          </a:xfrm>
+          <a:prstGeom prst="rect">
+            <a:avLst/>
+          </a:prstGeom>
+          <a:noFill/>
+          <a:ln/>
+        </p:spPr>
+        <p:txBody>
+          <a:bodyPr wrap="square" rtlCol="0" anchor="t"/>
+          <a:lstStyle/>
+          <a:p>
+            <a:pPr indent="0" marL="0">
+              <a:spcAft>
+                <a:spcPts val="800"/>
+              </a:spcAft>
+              <a:buNone/>
+            </a:pPr>
+            <a:r>
+              <a:rPr lang="en-US" sz="1400" dirty="0">
+                <a:solidFill>
+                  <a:srgbClr val="212121"/>
+                </a:solidFill>
+                <a:latin typeface="Arial" pitchFamily="34" charset="0"/>
+                <a:ea typeface="Arial" pitchFamily="34" charset="-122"/>
+                <a:cs typeface="Arial" pitchFamily="34" charset="-120"/>
+              </a:rPr>
+              <a:t>•  Usa el elemento UML - Object de la paleta UML: el rectángulo con el nombre subrayado.</a:t>
+            </a:r>
+            <a:endParaRPr lang="en-US" sz="1400" dirty="0"/>
+          </a:p>
+        </p:txBody>
+      </p:sp>
+      <p:sp>
+        <p:nvSpPr>
+          <p:cNvPr id="7" name="Shape 5"/>
+          <p:cNvSpPr/>
+          <p:nvPr/>
+        </p:nvSpPr>
+        <p:spPr>
+          <a:xfrm>
+            <a:off x="2331720" y="2606040"/>
+            <a:ext cx="1554480" cy="1353312"/>
+          </a:xfrm>
+          <a:prstGeom prst="rect">
+            <a:avLst/>
+          </a:prstGeom>
+          <a:ln w="12700">
+            <a:solidFill>
+              <a:srgbClr val="EEEEEE"/>
+            </a:solidFill>
+            <a:prstDash val="solid"/>
+          </a:ln>
+        </p:spPr>
+      </p:sp>
+      <p:pic>
+        <p:nvPicPr>
+          <p:cNvPr id="8" name="Image 0" descr="C:/Users/Aitor/Documents/apuntes-profe/entornos-de-desarrollo/docs/tema6/img/secuencia-lifeline-paleta.png">    </p:cNvPr>
+          <p:cNvPicPr>
+            <a:picLocks noChangeAspect="1"/>
+          </p:cNvPicPr>
+          <p:nvPr/>
+        </p:nvPicPr>
+        <p:blipFill>
+          <a:blip r:embed="rId1"/>
+          <a:stretch>
+            <a:fillRect/>
+          </a:stretch>
+        </p:blipFill>
+        <p:spPr>
+          <a:xfrm>
+            <a:off x="2331720" y="2606040"/>
+            <a:ext cx="1554480" cy="1353312"/>
+          </a:xfrm>
+          <a:prstGeom prst="rect">
+            <a:avLst/>
+          </a:prstGeom>
+        </p:spPr>
+      </p:pic>
+      <p:sp>
+        <p:nvSpPr>
+          <p:cNvPr id="9" name="Text 6"/>
+          <p:cNvSpPr/>
+          <p:nvPr/>
+        </p:nvSpPr>
+        <p:spPr>
+          <a:xfrm>
+            <a:off x="2057400" y="3986784"/>
+            <a:ext cx="2103120" cy="320040"/>
+          </a:xfrm>
+          <a:prstGeom prst="rect">
+            <a:avLst/>
+          </a:prstGeom>
+          <a:noFill/>
+          <a:ln/>
+        </p:spPr>
+        <p:txBody>
+          <a:bodyPr wrap="square" rtlCol="0" anchor="t"/>
+          <a:lstStyle/>
+          <a:p>
+            <a:pPr algn="ctr" indent="0" marL="0">
+              <a:buNone/>
+            </a:pPr>
+            <a:r>
+              <a:rPr lang="en-US" sz="1000" i="1" dirty="0">
+                <a:solidFill>
+                  <a:srgbClr val="757575"/>
+                </a:solidFill>
+                <a:latin typeface="Arial" pitchFamily="34" charset="0"/>
+                <a:ea typeface="Arial" pitchFamily="34" charset="-122"/>
+                <a:cs typeface="Arial" pitchFamily="34" charset="-120"/>
+              </a:rPr>
+              <a:t>Icono de línea de vida (objeto) en la paleta UML de DIA</a:t>
+            </a:r>
+            <a:endParaRPr lang="en-US" sz="1000" dirty="0"/>
+          </a:p>
+        </p:txBody>
+      </p:sp>
+      <p:sp>
+        <p:nvSpPr>
+          <p:cNvPr id="10" name="Shape 7"/>
+          <p:cNvSpPr/>
+          <p:nvPr/>
+        </p:nvSpPr>
+        <p:spPr>
+          <a:xfrm>
+            <a:off x="6263640" y="1051560"/>
+            <a:ext cx="5394960" cy="411480"/>
+          </a:xfrm>
+          <a:prstGeom prst="rect">
+            <a:avLst/>
+          </a:prstGeom>
+          <a:solidFill>
+            <a:srgbClr val="3F51B5"/>
+          </a:solidFill>
+          <a:ln w="12700">
+            <a:solidFill>
+              <a:srgbClr val="3F51B5"/>
+            </a:solidFill>
+            <a:prstDash val="solid"/>
+          </a:ln>
+        </p:spPr>
+      </p:sp>
+      <p:sp>
+        <p:nvSpPr>
+          <p:cNvPr id="11" name="Text 8"/>
+          <p:cNvSpPr/>
+          <p:nvPr/>
+        </p:nvSpPr>
+        <p:spPr>
+          <a:xfrm>
+            <a:off x="6400800" y="1051560"/>
+            <a:ext cx="5120640" cy="411480"/>
+          </a:xfrm>
+          <a:prstGeom prst="rect">
+            <a:avLst/>
+          </a:prstGeom>
+          <a:noFill/>
+          <a:ln/>
+        </p:spPr>
+        <p:txBody>
+          <a:bodyPr wrap="square" rtlCol="0" anchor="ctr"/>
+          <a:lstStyle/>
+          <a:p>
+            <a:pPr indent="0" marL="0">
+              <a:buNone/>
+            </a:pPr>
+            <a:r>
+              <a:rPr lang="en-US" sz="1600" b="1" dirty="0">
+                <a:solidFill>
+                  <a:srgbClr val="FFFFFF"/>
+                </a:solidFill>
+                <a:latin typeface="Arial" pitchFamily="34" charset="0"/>
+                <a:ea typeface="Arial" pitchFamily="34" charset="-122"/>
+                <a:cs typeface="Arial" pitchFamily="34" charset="-120"/>
+              </a:rPr>
+              <a:t>Añadir activación</a:t>
+            </a:r>
+            <a:endParaRPr lang="en-US" sz="1600" dirty="0"/>
+          </a:p>
+        </p:txBody>
+      </p:sp>
+      <p:sp>
+        <p:nvSpPr>
+          <p:cNvPr id="12" name="Text 9"/>
+          <p:cNvSpPr/>
+          <p:nvPr/>
+        </p:nvSpPr>
+        <p:spPr>
+          <a:xfrm>
+            <a:off x="6263640" y="1600200"/>
+            <a:ext cx="5394960" cy="822960"/>
+          </a:xfrm>
+          <a:prstGeom prst="rect">
+            <a:avLst/>
+          </a:prstGeom>
+          <a:noFill/>
+          <a:ln/>
+        </p:spPr>
+        <p:txBody>
+          <a:bodyPr wrap="square" rtlCol="0" anchor="t"/>
+          <a:lstStyle/>
+          <a:p>
+            <a:pPr indent="0" marL="0">
+              <a:spcAft>
+                <a:spcPts val="800"/>
+              </a:spcAft>
+              <a:buNone/>
+            </a:pPr>
+            <a:r>
+              <a:rPr lang="en-US" sz="1400" dirty="0">
+                <a:solidFill>
+                  <a:srgbClr val="212121"/>
+                </a:solidFill>
+                <a:latin typeface="Arial" pitchFamily="34" charset="0"/>
+                <a:ea typeface="Arial" pitchFamily="34" charset="-122"/>
+                <a:cs typeface="Arial" pitchFamily="34" charset="-120"/>
+              </a:rPr>
+              <a:t>•  Usa el elemento de activación de la paleta UML: la barra rectangular.</a:t>
+            </a:r>
+            <a:endParaRPr lang="en-US" sz="1400" dirty="0"/>
+          </a:p>
+        </p:txBody>
+      </p:sp>
+      <p:sp>
+        <p:nvSpPr>
+          <p:cNvPr id="13" name="Shape 10"/>
+          <p:cNvSpPr/>
+          <p:nvPr/>
+        </p:nvSpPr>
+        <p:spPr>
+          <a:xfrm>
+            <a:off x="8412480" y="2606040"/>
+            <a:ext cx="1737360" cy="1335024"/>
+          </a:xfrm>
+          <a:prstGeom prst="rect">
+            <a:avLst/>
+          </a:prstGeom>
+          <a:ln w="12700">
+            <a:solidFill>
+              <a:srgbClr val="EEEEEE"/>
+            </a:solidFill>
+            <a:prstDash val="solid"/>
+          </a:ln>
+        </p:spPr>
+      </p:sp>
+      <p:pic>
+        <p:nvPicPr>
+          <p:cNvPr id="14" name="Image 1" descr="C:/Users/Aitor/Documents/apuntes-profe/entornos-de-desarrollo/docs/tema6/img/secuencia-activacion-canvas.png">    </p:cNvPr>
+          <p:cNvPicPr>
+            <a:picLocks noChangeAspect="1"/>
+          </p:cNvPicPr>
+          <p:nvPr/>
+        </p:nvPicPr>
+        <p:blipFill>
+          <a:blip r:embed="rId2"/>
+          <a:stretch>
+            <a:fillRect/>
+          </a:stretch>
+        </p:blipFill>
+        <p:spPr>
+          <a:xfrm>
+            <a:off x="8412480" y="2606040"/>
+            <a:ext cx="1737360" cy="1335024"/>
+          </a:xfrm>
+          <a:prstGeom prst="rect">
+            <a:avLst/>
+          </a:prstGeom>
+        </p:spPr>
+      </p:pic>
+      <p:sp>
+        <p:nvSpPr>
+          <p:cNvPr id="15" name="Text 11"/>
+          <p:cNvSpPr/>
+          <p:nvPr/>
+        </p:nvSpPr>
+        <p:spPr>
+          <a:xfrm>
+            <a:off x="8138160" y="3968496"/>
+            <a:ext cx="2286000" cy="320040"/>
+          </a:xfrm>
+          <a:prstGeom prst="rect">
+            <a:avLst/>
+          </a:prstGeom>
+          <a:noFill/>
+          <a:ln/>
+        </p:spPr>
+        <p:txBody>
+          <a:bodyPr wrap="square" rtlCol="0" anchor="t"/>
+          <a:lstStyle/>
+          <a:p>
+            <a:pPr algn="ctr" indent="0" marL="0">
+              <a:buNone/>
+            </a:pPr>
+            <a:r>
+              <a:rPr lang="en-US" sz="1000" i="1" dirty="0">
+                <a:solidFill>
+                  <a:srgbClr val="757575"/>
+                </a:solidFill>
+                <a:latin typeface="Arial" pitchFamily="34" charset="0"/>
+                <a:ea typeface="Arial" pitchFamily="34" charset="-122"/>
+                <a:cs typeface="Arial" pitchFamily="34" charset="-120"/>
+              </a:rPr>
+              <a:t>Barra de activación sobre la línea de vida en DIA</a:t>
+            </a:r>
+            <a:endParaRPr lang="en-US" sz="1000" dirty="0"/>
+          </a:p>
+        </p:txBody>
+      </p:sp>
+      <p:sp>
+        <p:nvSpPr>
+          <p:cNvPr id="16" name="Text 12"/>
+          <p:cNvSpPr/>
+          <p:nvPr/>
+        </p:nvSpPr>
+        <p:spPr>
+          <a:xfrm>
+            <a:off x="548640" y="6473952"/>
+            <a:ext cx="11091672" cy="292608"/>
+          </a:xfrm>
+          <a:prstGeom prst="rect">
+            <a:avLst/>
+          </a:prstGeom>
+          <a:noFill/>
+          <a:ln/>
+        </p:spPr>
+        <p:txBody>
+          <a:bodyPr wrap="square" rtlCol="0" anchor="ctr"/>
+          <a:lstStyle/>
+          <a:p>
+            <a:pPr algn="r" indent="0" marL="0">
+              <a:buNone/>
+            </a:pPr>
+            <a:r>
+              <a:rPr lang="en-US" sz="1100" dirty="0">
+                <a:solidFill>
+                  <a:srgbClr val="757575"/>
+                </a:solidFill>
+                <a:latin typeface="Arial" pitchFamily="34" charset="0"/>
+                <a:ea typeface="Arial" pitchFamily="34" charset="-122"/>
+                <a:cs typeface="Arial" pitchFamily="34" charset="-120"/>
+              </a:rPr>
+              <a:t>Entornos de Desarrollo — Tema 6 · Diagramas de interacción</a:t>
+            </a:r>
+            <a:endParaRPr lang="en-US" sz="1100" dirty="0"/>
+          </a:p>
+        </p:txBody>
+      </p:sp>
+    </p:spTree>
+  </p:cSld>
+  <p:clrMapOvr>
+    <a:masterClrMapping/>
+  </p:clrMapOvr>
+</p:sld>
+</file>
+
+<file path=ppt/slides/slide6.xml><?xml version="1.0" encoding="utf-8"?>
+<p:sld xmlns:a="http://schemas.openxmlformats.org/drawingml/2006/main" xmlns:r="http://schemas.openxmlformats.org/officeDocument/2006/relationships" xmlns:p="http://schemas.openxmlformats.org/presentationml/2006/main">
+  <p:cSld name="Slide 6">
+    <p:spTree>
+      <p:nvGrpSpPr>
+        <p:cNvPr id="1" name=""/>
+        <p:cNvGrpSpPr/>
+        <p:nvPr/>
+      </p:nvGrpSpPr>
+      <p:grpSpPr>
+        <a:xfrm>
+          <a:off x="0" y="0"/>
+          <a:ext cx="0" cy="0"/>
+          <a:chOff x="0" y="0"/>
+          <a:chExt cx="0" cy="0"/>
+        </a:xfrm>
+      </p:grpSpPr>
+      <p:sp>
+        <p:nvSpPr>
+          <p:cNvPr id="2" name="Shape 0"/>
+          <p:cNvSpPr/>
+          <p:nvPr/>
+        </p:nvSpPr>
+        <p:spPr>
+          <a:xfrm>
+            <a:off x="0" y="0"/>
+            <a:ext cx="12188952" cy="777240"/>
+          </a:xfrm>
+          <a:prstGeom prst="rect">
+            <a:avLst/>
+          </a:prstGeom>
+          <a:solidFill>
+            <a:srgbClr val="303F9F"/>
+          </a:solidFill>
+          <a:ln w="12700">
+            <a:solidFill>
+              <a:srgbClr val="303F9F"/>
+            </a:solidFill>
+            <a:prstDash val="solid"/>
+          </a:ln>
+        </p:spPr>
+      </p:sp>
+      <p:sp>
+        <p:nvSpPr>
+          <p:cNvPr id="3" name="Text 1"/>
+          <p:cNvSpPr/>
+          <p:nvPr/>
+        </p:nvSpPr>
+        <p:spPr>
+          <a:xfrm>
+            <a:off x="365760" y="0"/>
+            <a:ext cx="11457432" cy="777240"/>
+          </a:xfrm>
+          <a:prstGeom prst="rect">
+            <a:avLst/>
+          </a:prstGeom>
+          <a:noFill/>
+          <a:ln/>
+        </p:spPr>
+        <p:txBody>
+          <a:bodyPr wrap="square" rtlCol="0" anchor="ctr"/>
+          <a:lstStyle/>
+          <a:p>
+            <a:pPr indent="0" marL="0">
+              <a:buNone/>
+            </a:pPr>
+            <a:r>
+              <a:rPr lang="en-US" sz="2300" b="1" dirty="0">
+                <a:solidFill>
+                  <a:srgbClr val="FFFFFF"/>
+                </a:solidFill>
+                <a:latin typeface="Arial" pitchFamily="34" charset="0"/>
+                <a:ea typeface="Arial" pitchFamily="34" charset="-122"/>
+                <a:cs typeface="Arial" pitchFamily="34" charset="-120"/>
+              </a:rPr>
+              <a:t>En DIA — configurar la línea de vida</a:t>
+            </a:r>
+            <a:endParaRPr lang="en-US" sz="2300" dirty="0"/>
+          </a:p>
+        </p:txBody>
+      </p:sp>
+      <p:sp>
+        <p:nvSpPr>
+          <p:cNvPr id="4" name="Text 2"/>
+          <p:cNvSpPr/>
+          <p:nvPr/>
+        </p:nvSpPr>
+        <p:spPr>
+          <a:xfrm>
+            <a:off x="548640" y="1097280"/>
+            <a:ext cx="11091672" cy="1554480"/>
+          </a:xfrm>
+          <a:prstGeom prst="rect">
+            <a:avLst/>
+          </a:prstGeom>
+          <a:noFill/>
+          <a:ln/>
+        </p:spPr>
+        <p:txBody>
+          <a:bodyPr wrap="square" rtlCol="0" anchor="t"/>
+          <a:lstStyle/>
+          <a:p>
+            <a:pPr indent="0" marL="0">
+              <a:spcAft>
+                <a:spcPts val="1000"/>
+              </a:spcAft>
+              <a:buNone/>
+            </a:pPr>
+            <a:r>
+              <a:rPr lang="en-US" sz="1600" dirty="0">
+                <a:solidFill>
+                  <a:srgbClr val="212121"/>
+                </a:solidFill>
+                <a:latin typeface="Arial" pitchFamily="34" charset="0"/>
+                <a:ea typeface="Arial" pitchFamily="34" charset="-122"/>
+                <a:cs typeface="Arial" pitchFamily="34" charset="-120"/>
+              </a:rPr>
+              <a:t>•  Sin barra de activación: doble clic sobre la línea de vida → "Dibujar foco de control" → No.</a:t>
+            </a:r>
+            <a:endParaRPr lang="en-US" sz="1600" dirty="0"/>
+          </a:p>
+          <a:p>
+            <a:pPr indent="0" marL="0">
+              <a:spcAft>
+                <a:spcPts val="1000"/>
+              </a:spcAft>
+              <a:buNone/>
+            </a:pPr>
+            <a:r>
+              <a:rPr lang="en-US" sz="1600" dirty="0">
+                <a:solidFill>
+                  <a:srgbClr val="212121"/>
+                </a:solidFill>
+                <a:latin typeface="Arial" pitchFamily="34" charset="0"/>
+                <a:ea typeface="Arial" pitchFamily="34" charset="-122"/>
+                <a:cs typeface="Arial" pitchFamily="34" charset="-120"/>
+              </a:rPr>
+              <a:t>•  Puntos de conexión muy separados: clic derecho sobre la línea → "Reducir la distancia entre los puntos de conexión".</a:t>
+            </a:r>
+            <a:endParaRPr lang="en-US" sz="1600" dirty="0"/>
+          </a:p>
+        </p:txBody>
+      </p:sp>
+      <p:sp>
+        <p:nvSpPr>
+          <p:cNvPr id="5" name="Shape 3"/>
+          <p:cNvSpPr/>
+          <p:nvPr/>
+        </p:nvSpPr>
+        <p:spPr>
+          <a:xfrm>
+            <a:off x="1097280" y="2926080"/>
+            <a:ext cx="4206240" cy="2633472"/>
+          </a:xfrm>
+          <a:prstGeom prst="rect">
+            <a:avLst/>
+          </a:prstGeom>
+          <a:ln w="12700">
+            <a:solidFill>
+              <a:srgbClr val="EEEEEE"/>
+            </a:solidFill>
+            <a:prstDash val="solid"/>
+          </a:ln>
+        </p:spPr>
+      </p:sp>
+      <p:pic>
+        <p:nvPicPr>
+          <p:cNvPr id="6" name="Image 0" descr="C:/Users/Aitor/Documents/apuntes-profe/entornos-de-desarrollo/docs/tema6/img/dia-lifeline-foco-no.png">    </p:cNvPr>
+          <p:cNvPicPr>
+            <a:picLocks noChangeAspect="1"/>
+          </p:cNvPicPr>
+          <p:nvPr/>
+        </p:nvPicPr>
+        <p:blipFill>
+          <a:blip r:embed="rId1"/>
+          <a:stretch>
+            <a:fillRect/>
+          </a:stretch>
+        </p:blipFill>
+        <p:spPr>
+          <a:xfrm>
+            <a:off x="1097280" y="2926080"/>
+            <a:ext cx="4206240" cy="2633472"/>
+          </a:xfrm>
+          <a:prstGeom prst="rect">
+            <a:avLst/>
+          </a:prstGeom>
+        </p:spPr>
+      </p:pic>
+      <p:sp>
+        <p:nvSpPr>
+          <p:cNvPr id="7" name="Text 4"/>
+          <p:cNvSpPr/>
+          <p:nvPr/>
+        </p:nvSpPr>
+        <p:spPr>
+          <a:xfrm>
+            <a:off x="822960" y="5586984"/>
+            <a:ext cx="4754880" cy="320040"/>
+          </a:xfrm>
+          <a:prstGeom prst="rect">
+            <a:avLst/>
+          </a:prstGeom>
+          <a:noFill/>
+          <a:ln/>
+        </p:spPr>
+        <p:txBody>
+          <a:bodyPr wrap="square" rtlCol="0" anchor="t"/>
+          <a:lstStyle/>
+          <a:p>
+            <a:pPr algn="ctr" indent="0" marL="0">
+              <a:buNone/>
+            </a:pPr>
+            <a:r>
+              <a:rPr lang="en-US" sz="1100" i="1" dirty="0">
+                <a:solidFill>
+                  <a:srgbClr val="757575"/>
+                </a:solidFill>
+                <a:latin typeface="Arial" pitchFamily="34" charset="0"/>
+                <a:ea typeface="Arial" pitchFamily="34" charset="-122"/>
+                <a:cs typeface="Arial" pitchFamily="34" charset="-120"/>
+              </a:rPr>
+              <a:t>Desactivar "Dibujar foco de control" en las propiedades de la línea de vida</a:t>
+            </a:r>
+            <a:endParaRPr lang="en-US" sz="1100" dirty="0"/>
+          </a:p>
+        </p:txBody>
+      </p:sp>
+      <p:sp>
+        <p:nvSpPr>
+          <p:cNvPr id="8" name="Shape 5"/>
+          <p:cNvSpPr/>
+          <p:nvPr/>
+        </p:nvSpPr>
+        <p:spPr>
+          <a:xfrm>
+            <a:off x="6035040" y="3291840"/>
+            <a:ext cx="5120640" cy="2212848"/>
+          </a:xfrm>
+          <a:prstGeom prst="rect">
+            <a:avLst/>
+          </a:prstGeom>
+          <a:ln w="12700">
+            <a:solidFill>
+              <a:srgbClr val="EEEEEE"/>
+            </a:solidFill>
+            <a:prstDash val="solid"/>
+          </a:ln>
+        </p:spPr>
+      </p:sp>
+      <p:pic>
+        <p:nvPicPr>
+          <p:cNvPr id="9" name="Image 1" descr="C:/Users/Aitor/Documents/apuntes-profe/entornos-de-desarrollo/docs/tema6/img/dia-lifeline-reducir-distancia.png">    </p:cNvPr>
+          <p:cNvPicPr>
+            <a:picLocks noChangeAspect="1"/>
+          </p:cNvPicPr>
+          <p:nvPr/>
+        </p:nvPicPr>
+        <p:blipFill>
+          <a:blip r:embed="rId2"/>
+          <a:stretch>
+            <a:fillRect/>
+          </a:stretch>
+        </p:blipFill>
+        <p:spPr>
+          <a:xfrm>
+            <a:off x="6035040" y="3291840"/>
+            <a:ext cx="5120640" cy="2212848"/>
+          </a:xfrm>
+          <a:prstGeom prst="rect">
+            <a:avLst/>
+          </a:prstGeom>
+        </p:spPr>
+      </p:pic>
+      <p:sp>
+        <p:nvSpPr>
+          <p:cNvPr id="10" name="Text 6"/>
+          <p:cNvSpPr/>
+          <p:nvPr/>
+        </p:nvSpPr>
+        <p:spPr>
+          <a:xfrm>
+            <a:off x="5760720" y="5532120"/>
+            <a:ext cx="5669280" cy="320040"/>
+          </a:xfrm>
+          <a:prstGeom prst="rect">
+            <a:avLst/>
+          </a:prstGeom>
+          <a:noFill/>
+          <a:ln/>
+        </p:spPr>
+        <p:txBody>
+          <a:bodyPr wrap="square" rtlCol="0" anchor="t"/>
+          <a:lstStyle/>
+          <a:p>
+            <a:pPr algn="ctr" indent="0" marL="0">
+              <a:buNone/>
+            </a:pPr>
+            <a:r>
+              <a:rPr lang="en-US" sz="1100" i="1" dirty="0">
+                <a:solidFill>
+                  <a:srgbClr val="757575"/>
+                </a:solidFill>
+                <a:latin typeface="Arial" pitchFamily="34" charset="0"/>
+                <a:ea typeface="Arial" pitchFamily="34" charset="-122"/>
+                <a:cs typeface="Arial" pitchFamily="34" charset="-120"/>
+              </a:rPr>
+              <a:t>Menú contextual para reducir la distancia entre puntos de conexión</a:t>
+            </a:r>
+            <a:endParaRPr lang="en-US" sz="1100" dirty="0"/>
+          </a:p>
+        </p:txBody>
+      </p:sp>
+      <p:sp>
+        <p:nvSpPr>
+          <p:cNvPr id="11" name="Text 7"/>
+          <p:cNvSpPr/>
+          <p:nvPr/>
+        </p:nvSpPr>
+        <p:spPr>
+          <a:xfrm>
+            <a:off x="548640" y="6473952"/>
+            <a:ext cx="11091672" cy="292608"/>
+          </a:xfrm>
+          <a:prstGeom prst="rect">
+            <a:avLst/>
+          </a:prstGeom>
+          <a:noFill/>
+          <a:ln/>
+        </p:spPr>
+        <p:txBody>
+          <a:bodyPr wrap="square" rtlCol="0" anchor="ctr"/>
+          <a:lstStyle/>
+          <a:p>
+            <a:pPr algn="r" indent="0" marL="0">
+              <a:buNone/>
+            </a:pPr>
+            <a:r>
+              <a:rPr lang="en-US" sz="1100" dirty="0">
+                <a:solidFill>
+                  <a:srgbClr val="757575"/>
+                </a:solidFill>
+                <a:latin typeface="Arial" pitchFamily="34" charset="0"/>
+                <a:ea typeface="Arial" pitchFamily="34" charset="-122"/>
+                <a:cs typeface="Arial" pitchFamily="34" charset="-120"/>
+              </a:rPr>
+              <a:t>Entornos de Desarrollo — Tema 6 · Diagramas de interacción</a:t>
+            </a:r>
+            <a:endParaRPr lang="en-US" sz="1100" dirty="0"/>
+          </a:p>
+        </p:txBody>
+      </p:sp>
+    </p:spTree>
+  </p:cSld>
+  <p:clrMapOvr>
+    <a:masterClrMapping/>
+  </p:clrMapOvr>
+</p:sld>
+</file>
+
+<file path=ppt/slides/slide7.xml><?xml version="1.0" encoding="utf-8"?>
+<p:sld xmlns:a="http://schemas.openxmlformats.org/drawingml/2006/main" xmlns:r="http://schemas.openxmlformats.org/officeDocument/2006/relationships" xmlns:p="http://schemas.openxmlformats.org/presentationml/2006/main">
+  <p:cSld name="Slide 7">
+    <p:spTree>
+      <p:nvGrpSpPr>
+        <p:cNvPr id="1" name=""/>
+        <p:cNvGrpSpPr/>
+        <p:nvPr/>
+      </p:nvGrpSpPr>
+      <p:grpSpPr>
+        <a:xfrm>
+          <a:off x="0" y="0"/>
+          <a:ext cx="0" cy="0"/>
+          <a:chOff x="0" y="0"/>
+          <a:chExt cx="0" cy="0"/>
+        </a:xfrm>
+      </p:grpSpPr>
+      <p:sp>
+        <p:nvSpPr>
+          <p:cNvPr id="2" name="Shape 0"/>
+          <p:cNvSpPr/>
+          <p:nvPr/>
+        </p:nvSpPr>
+        <p:spPr>
+          <a:xfrm>
+            <a:off x="0" y="0"/>
+            <a:ext cx="12188952" cy="777240"/>
+          </a:xfrm>
+          <a:prstGeom prst="rect">
+            <a:avLst/>
+          </a:prstGeom>
+          <a:solidFill>
+            <a:srgbClr val="303F9F"/>
+          </a:solidFill>
+          <a:ln w="12700">
+            <a:solidFill>
+              <a:srgbClr val="303F9F"/>
+            </a:solidFill>
+            <a:prstDash val="solid"/>
+          </a:ln>
+        </p:spPr>
+      </p:sp>
+      <p:sp>
+        <p:nvSpPr>
+          <p:cNvPr id="3" name="Text 1"/>
+          <p:cNvSpPr/>
+          <p:nvPr/>
+        </p:nvSpPr>
+        <p:spPr>
+          <a:xfrm>
+            <a:off x="365760" y="0"/>
+            <a:ext cx="11457432" cy="777240"/>
+          </a:xfrm>
+          <a:prstGeom prst="rect">
+            <a:avLst/>
+          </a:prstGeom>
+          <a:noFill/>
+          <a:ln/>
+        </p:spPr>
+        <p:txBody>
+          <a:bodyPr wrap="square" rtlCol="0" anchor="ctr"/>
+          <a:lstStyle/>
+          <a:p>
+            <a:pPr indent="0" marL="0">
+              <a:buNone/>
+            </a:pPr>
+            <a:r>
+              <a:rPr lang="en-US" sz="2300" b="1" dirty="0">
+                <a:solidFill>
+                  <a:srgbClr val="FFFFFF"/>
+                </a:solidFill>
+                <a:latin typeface="Arial" pitchFamily="34" charset="0"/>
+                <a:ea typeface="Arial" pitchFamily="34" charset="-122"/>
+                <a:cs typeface="Arial" pitchFamily="34" charset="-120"/>
+              </a:rPr>
               <a:t>Secuencia: tipos de mensaje</a:t>
             </a:r>
             <a:endParaRPr lang="en-US" sz="2300" dirty="0"/>
@@ -4362,7 +10936,7 @@
       </p:sp>
       <p:graphicFrame>
         <p:nvGraphicFramePr>
-          <p:cNvPr id="6" name="Table 0"/>
+          <p:cNvPr id="8" name="Table 0"/>
           <p:cNvGraphicFramePr>
             <a:graphicFrameLocks noGrp="1"/>
           </p:cNvGraphicFramePr>
@@ -5841,8 +12415,8 @@
         </p:nvSpPr>
         <p:spPr>
           <a:xfrm>
-            <a:off x="548640" y="4892040"/>
-            <a:ext cx="11091672" cy="868680"/>
+            <a:off x="548640" y="5166360"/>
+            <a:ext cx="11091672" cy="822960"/>
           </a:xfrm>
           <a:prstGeom prst="roundRect">
             <a:avLst/>
@@ -5866,8 +12440,8 @@
         </p:nvSpPr>
         <p:spPr>
           <a:xfrm>
-            <a:off x="777240" y="4965192"/>
-            <a:ext cx="10634472" cy="722376"/>
+            <a:off x="777240" y="5239512"/>
+            <a:ext cx="10634472" cy="676656"/>
           </a:xfrm>
           <a:prstGeom prst="rect">
             <a:avLst/>
@@ -5883,7 +12457,7 @@
               <a:buNone/>
             </a:pPr>
             <a:r>
-              <a:rPr lang="en-US" sz="1400" dirty="0">
+              <a:rPr lang="en-US" sz="1300" dirty="0">
                 <a:solidFill>
                   <a:srgbClr val="212121"/>
                 </a:solidFill>
@@ -5893,1227 +12467,13 @@
               </a:rPr>
               <a:t>Un mensaje de creación siempre apunta a un OBJETO, nunca a una clase. Y el objeto creado aparece a la altura de su creación, no arriba con los que existen desde el principio.</a:t>
             </a:r>
-            <a:endParaRPr lang="en-US" sz="1400" dirty="0"/>
+            <a:endParaRPr lang="en-US" sz="1300" dirty="0"/>
           </a:p>
         </p:txBody>
       </p:sp>
       <p:sp>
         <p:nvSpPr>
           <p:cNvPr id="7" name="Text 4"/>
-          <p:cNvSpPr/>
-          <p:nvPr/>
-        </p:nvSpPr>
-        <p:spPr>
-          <a:xfrm>
-            <a:off x="548640" y="6473952"/>
-            <a:ext cx="11091672" cy="292608"/>
-          </a:xfrm>
-          <a:prstGeom prst="rect">
-            <a:avLst/>
-          </a:prstGeom>
-          <a:noFill/>
-          <a:ln/>
-        </p:spPr>
-        <p:txBody>
-          <a:bodyPr wrap="square" rtlCol="0" anchor="ctr"/>
-          <a:lstStyle/>
-          <a:p>
-            <a:pPr algn="r" indent="0" marL="0">
-              <a:buNone/>
-            </a:pPr>
-            <a:r>
-              <a:rPr lang="en-US" sz="1100" dirty="0">
-                <a:solidFill>
-                  <a:srgbClr val="757575"/>
-                </a:solidFill>
-                <a:latin typeface="Arial" pitchFamily="34" charset="0"/>
-                <a:ea typeface="Arial" pitchFamily="34" charset="-122"/>
-                <a:cs typeface="Arial" pitchFamily="34" charset="-120"/>
-              </a:rPr>
-              <a:t>Entornos de Desarrollo — Tema 6 · Diagramas de interacción</a:t>
-            </a:r>
-            <a:endParaRPr lang="en-US" sz="1100" dirty="0"/>
-          </a:p>
-        </p:txBody>
-      </p:sp>
-    </p:spTree>
-  </p:cSld>
-  <p:clrMapOvr>
-    <a:masterClrMapping/>
-  </p:clrMapOvr>
-</p:sld>
-</file>
-
-<file path=ppt/slides/slide6.xml><?xml version="1.0" encoding="utf-8"?>
-<p:sld xmlns:a="http://schemas.openxmlformats.org/drawingml/2006/main" xmlns:r="http://schemas.openxmlformats.org/officeDocument/2006/relationships" xmlns:p="http://schemas.openxmlformats.org/presentationml/2006/main">
-  <p:cSld name="Slide 6">
-    <p:spTree>
-      <p:nvGrpSpPr>
-        <p:cNvPr id="1" name=""/>
-        <p:cNvGrpSpPr/>
-        <p:nvPr/>
-      </p:nvGrpSpPr>
-      <p:grpSpPr>
-        <a:xfrm>
-          <a:off x="0" y="0"/>
-          <a:ext cx="0" cy="0"/>
-          <a:chOff x="0" y="0"/>
-          <a:chExt cx="0" cy="0"/>
-        </a:xfrm>
-      </p:grpSpPr>
-      <p:sp>
-        <p:nvSpPr>
-          <p:cNvPr id="2" name="Shape 0"/>
-          <p:cNvSpPr/>
-          <p:nvPr/>
-        </p:nvSpPr>
-        <p:spPr>
-          <a:xfrm>
-            <a:off x="0" y="0"/>
-            <a:ext cx="12188952" cy="777240"/>
-          </a:xfrm>
-          <a:prstGeom prst="rect">
-            <a:avLst/>
-          </a:prstGeom>
-          <a:solidFill>
-            <a:srgbClr val="303F9F"/>
-          </a:solidFill>
-          <a:ln w="12700">
-            <a:solidFill>
-              <a:srgbClr val="303F9F"/>
-            </a:solidFill>
-            <a:prstDash val="solid"/>
-          </a:ln>
-        </p:spPr>
-      </p:sp>
-      <p:sp>
-        <p:nvSpPr>
-          <p:cNvPr id="3" name="Text 1"/>
-          <p:cNvSpPr/>
-          <p:nvPr/>
-        </p:nvSpPr>
-        <p:spPr>
-          <a:xfrm>
-            <a:off x="365760" y="0"/>
-            <a:ext cx="11457432" cy="777240"/>
-          </a:xfrm>
-          <a:prstGeom prst="rect">
-            <a:avLst/>
-          </a:prstGeom>
-          <a:noFill/>
-          <a:ln/>
-        </p:spPr>
-        <p:txBody>
-          <a:bodyPr wrap="square" rtlCol="0" anchor="ctr"/>
-          <a:lstStyle/>
-          <a:p>
-            <a:pPr indent="0" marL="0">
-              <a:buNone/>
-            </a:pPr>
-            <a:r>
-              <a:rPr lang="en-US" sz="2300" b="1" dirty="0">
-                <a:solidFill>
-                  <a:srgbClr val="FFFFFF"/>
-                </a:solidFill>
-                <a:latin typeface="Arial" pitchFamily="34" charset="0"/>
-                <a:ea typeface="Arial" pitchFamily="34" charset="-122"/>
-                <a:cs typeface="Arial" pitchFamily="34" charset="-120"/>
-              </a:rPr>
-              <a:t>Ejemplo leído paso a paso: llamada telefónica</a:t>
-            </a:r>
-            <a:endParaRPr lang="en-US" sz="2300" dirty="0"/>
-          </a:p>
-        </p:txBody>
-      </p:sp>
-      <p:pic>
-        <p:nvPicPr>
-          <p:cNvPr id="4" name="Image 0" descr="C:/Users/Aitor/Documents/apuntes-profe/entornos-de-desarrollo/docs/tema6/img/secuencia-llamada-completo.png">    </p:cNvPr>
-          <p:cNvPicPr>
-            <a:picLocks noChangeAspect="1"/>
-          </p:cNvPicPr>
-          <p:nvPr/>
-        </p:nvPicPr>
-        <p:blipFill>
-          <a:blip r:embed="rId1"/>
-          <a:stretch>
-            <a:fillRect/>
-          </a:stretch>
-        </p:blipFill>
-        <p:spPr>
-          <a:xfrm>
-            <a:off x="457200" y="1051560"/>
-            <a:ext cx="5577840" cy="3749040"/>
-          </a:xfrm>
-          <a:prstGeom prst="rect">
-            <a:avLst/>
-          </a:prstGeom>
-        </p:spPr>
-      </p:pic>
-      <p:sp>
-        <p:nvSpPr>
-          <p:cNvPr id="5" name="Text 2"/>
-          <p:cNvSpPr/>
-          <p:nvPr/>
-        </p:nvSpPr>
-        <p:spPr>
-          <a:xfrm>
-            <a:off x="6309360" y="1097280"/>
-            <a:ext cx="5394960" cy="3657600"/>
-          </a:xfrm>
-          <a:prstGeom prst="rect">
-            <a:avLst/>
-          </a:prstGeom>
-          <a:noFill/>
-          <a:ln/>
-        </p:spPr>
-        <p:txBody>
-          <a:bodyPr wrap="square" rtlCol="0" anchor="t"/>
-          <a:lstStyle/>
-          <a:p>
-            <a:pPr indent="0" marL="0">
-              <a:spcAft>
-                <a:spcPts val="800"/>
-              </a:spcAft>
-              <a:buNone/>
-            </a:pPr>
-            <a:r>
-              <a:rPr lang="en-US" sz="1300" dirty="0">
-                <a:solidFill>
-                  <a:srgbClr val="212121"/>
-                </a:solidFill>
-                <a:latin typeface="Arial" pitchFamily="34" charset="0"/>
-                <a:ea typeface="Arial" pitchFamily="34" charset="-122"/>
-                <a:cs typeface="Arial" pitchFamily="34" charset="-120"/>
-              </a:rPr>
-              <a:t>•  1. Marcar Número(): el vendedor llama a la centralita; su activación se abre.</a:t>
-            </a:r>
-            <a:endParaRPr lang="en-US" sz="1300" dirty="0"/>
-          </a:p>
-          <a:p>
-            <a:pPr indent="0" marL="0">
-              <a:spcAft>
-                <a:spcPts val="800"/>
-              </a:spcAft>
-              <a:buNone/>
-            </a:pPr>
-            <a:r>
-              <a:rPr lang="en-US" sz="1300" dirty="0">
-                <a:solidFill>
-                  <a:srgbClr val="212121"/>
-                </a:solidFill>
-                <a:latin typeface="Arial" pitchFamily="34" charset="0"/>
-                <a:ea typeface="Arial" pitchFamily="34" charset="-122"/>
-                <a:cs typeface="Arial" pitchFamily="34" charset="-120"/>
-              </a:rPr>
-              <a:t>•  2. Dar Tonos(): la empresa responde con los tonos de espera.</a:t>
-            </a:r>
-            <a:endParaRPr lang="en-US" sz="1300" dirty="0"/>
-          </a:p>
-          <a:p>
-            <a:pPr indent="0" marL="0">
-              <a:spcAft>
-                <a:spcPts val="800"/>
-              </a:spcAft>
-              <a:buNone/>
-            </a:pPr>
-            <a:r>
-              <a:rPr lang="en-US" sz="1300" dirty="0">
-                <a:solidFill>
-                  <a:srgbClr val="212121"/>
-                </a:solidFill>
-                <a:latin typeface="Arial" pitchFamily="34" charset="0"/>
-                <a:ea typeface="Arial" pitchFamily="34" charset="-122"/>
-                <a:cs typeface="Arial" pitchFamily="34" charset="-120"/>
-              </a:rPr>
-              <a:t>•  3. Sonar Timbre(): a la vez, hace sonar el teléfono del abonado.</a:t>
-            </a:r>
-            <a:endParaRPr lang="en-US" sz="1300" dirty="0"/>
-          </a:p>
-          <a:p>
-            <a:pPr indent="0" marL="0">
-              <a:spcAft>
-                <a:spcPts val="800"/>
-              </a:spcAft>
-              <a:buNone/>
-            </a:pPr>
-            <a:r>
-              <a:rPr lang="en-US" sz="1300" dirty="0">
-                <a:solidFill>
-                  <a:srgbClr val="212121"/>
-                </a:solidFill>
-                <a:latin typeface="Arial" pitchFamily="34" charset="0"/>
-                <a:ea typeface="Arial" pitchFamily="34" charset="-122"/>
-                <a:cs typeface="Arial" pitchFamily="34" charset="-120"/>
-              </a:rPr>
-              <a:t>•  4. Descolgar(): el abonado responde.</a:t>
-            </a:r>
-            <a:endParaRPr lang="en-US" sz="1300" dirty="0"/>
-          </a:p>
-          <a:p>
-            <a:pPr indent="0" marL="0">
-              <a:spcAft>
-                <a:spcPts val="800"/>
-              </a:spcAft>
-              <a:buNone/>
-            </a:pPr>
-            <a:r>
-              <a:rPr lang="en-US" sz="1300" dirty="0">
-                <a:solidFill>
-                  <a:srgbClr val="212121"/>
-                </a:solidFill>
-                <a:latin typeface="Arial" pitchFamily="34" charset="0"/>
-                <a:ea typeface="Arial" pitchFamily="34" charset="-122"/>
-                <a:cs typeface="Arial" pitchFamily="34" charset="-120"/>
-              </a:rPr>
-              <a:t>•  5. Llamada Aceptada(): la empresa avisa al vendedor de que hay línea.</a:t>
-            </a:r>
-            <a:endParaRPr lang="en-US" sz="1300" dirty="0"/>
-          </a:p>
-          <a:p>
-            <a:pPr indent="0" marL="0">
-              <a:spcAft>
-                <a:spcPts val="800"/>
-              </a:spcAft>
-              <a:buNone/>
-            </a:pPr>
-            <a:r>
-              <a:rPr lang="en-US" sz="1300" dirty="0">
-                <a:solidFill>
-                  <a:srgbClr val="212121"/>
-                </a:solidFill>
-                <a:latin typeface="Arial" pitchFamily="34" charset="0"/>
-                <a:ea typeface="Arial" pitchFamily="34" charset="-122"/>
-                <a:cs typeface="Arial" pitchFamily="34" charset="-120"/>
-              </a:rPr>
-              <a:t>•  6. Vender Producto(): el vendedor habla DIRECTAMENTE con el abonado.</a:t>
-            </a:r>
-            <a:endParaRPr lang="en-US" sz="1300" dirty="0"/>
-          </a:p>
-          <a:p>
-            <a:pPr indent="0" marL="0">
-              <a:spcAft>
-                <a:spcPts val="800"/>
-              </a:spcAft>
-              <a:buNone/>
-            </a:pPr>
-            <a:r>
-              <a:rPr lang="en-US" sz="1300" dirty="0">
-                <a:solidFill>
-                  <a:srgbClr val="212121"/>
-                </a:solidFill>
-                <a:latin typeface="Arial" pitchFamily="34" charset="0"/>
-                <a:ea typeface="Arial" pitchFamily="34" charset="-122"/>
-                <a:cs typeface="Arial" pitchFamily="34" charset="-120"/>
-              </a:rPr>
-              <a:t>•  7. Colgar(): el vendedor termina la llamada.</a:t>
-            </a:r>
-            <a:endParaRPr lang="en-US" sz="1300" dirty="0"/>
-          </a:p>
-        </p:txBody>
-      </p:sp>
-      <p:sp>
-        <p:nvSpPr>
-          <p:cNvPr id="6" name="Shape 3"/>
-          <p:cNvSpPr/>
-          <p:nvPr/>
-        </p:nvSpPr>
-        <p:spPr>
-          <a:xfrm>
-            <a:off x="548640" y="5120640"/>
-            <a:ext cx="11091672" cy="822960"/>
-          </a:xfrm>
-          <a:prstGeom prst="roundRect">
-            <a:avLst/>
-          </a:prstGeom>
-          <a:solidFill>
-            <a:srgbClr val="E0F2F1"/>
-          </a:solidFill>
-          <a:ln w="19050">
-            <a:solidFill>
-              <a:srgbClr val="009688"/>
-            </a:solidFill>
-            <a:prstDash val="solid"/>
-          </a:ln>
-        </p:spPr>
-      </p:sp>
-      <p:sp>
-        <p:nvSpPr>
-          <p:cNvPr id="7" name="Text 4"/>
-          <p:cNvSpPr/>
-          <p:nvPr/>
-        </p:nvSpPr>
-        <p:spPr>
-          <a:xfrm>
-            <a:off x="777240" y="5193792"/>
-            <a:ext cx="10634472" cy="676656"/>
-          </a:xfrm>
-          <a:prstGeom prst="rect">
-            <a:avLst/>
-          </a:prstGeom>
-          <a:noFill/>
-          <a:ln/>
-        </p:spPr>
-        <p:txBody>
-          <a:bodyPr wrap="square" rtlCol="0" anchor="ctr"/>
-          <a:lstStyle/>
-          <a:p>
-            <a:pPr indent="0" marL="0">
-              <a:buNone/>
-            </a:pPr>
-            <a:r>
-              <a:rPr lang="en-US" sz="1400" dirty="0">
-                <a:solidFill>
-                  <a:srgbClr val="212121"/>
-                </a:solidFill>
-                <a:latin typeface="Arial" pitchFamily="34" charset="0"/>
-                <a:ea typeface="Arial" pitchFamily="34" charset="-122"/>
-                <a:cs typeface="Arial" pitchFamily="34" charset="-120"/>
-              </a:rPr>
-              <a:t>Al interpretar, pregúntate en cada mensaje: ¿quién lo envía? ¿espera respuesta o continúa? ¿qué activaciones están abiertas?</a:t>
-            </a:r>
-            <a:endParaRPr lang="en-US" sz="1400" dirty="0"/>
-          </a:p>
-        </p:txBody>
-      </p:sp>
-      <p:sp>
-        <p:nvSpPr>
-          <p:cNvPr id="8" name="Text 5"/>
-          <p:cNvSpPr/>
-          <p:nvPr/>
-        </p:nvSpPr>
-        <p:spPr>
-          <a:xfrm>
-            <a:off x="548640" y="6473952"/>
-            <a:ext cx="11091672" cy="292608"/>
-          </a:xfrm>
-          <a:prstGeom prst="rect">
-            <a:avLst/>
-          </a:prstGeom>
-          <a:noFill/>
-          <a:ln/>
-        </p:spPr>
-        <p:txBody>
-          <a:bodyPr wrap="square" rtlCol="0" anchor="ctr"/>
-          <a:lstStyle/>
-          <a:p>
-            <a:pPr algn="r" indent="0" marL="0">
-              <a:buNone/>
-            </a:pPr>
-            <a:r>
-              <a:rPr lang="en-US" sz="1100" dirty="0">
-                <a:solidFill>
-                  <a:srgbClr val="757575"/>
-                </a:solidFill>
-                <a:latin typeface="Arial" pitchFamily="34" charset="0"/>
-                <a:ea typeface="Arial" pitchFamily="34" charset="-122"/>
-                <a:cs typeface="Arial" pitchFamily="34" charset="-120"/>
-              </a:rPr>
-              <a:t>Entornos de Desarrollo — Tema 6 · Diagramas de interacción</a:t>
-            </a:r>
-            <a:endParaRPr lang="en-US" sz="1100" dirty="0"/>
-          </a:p>
-        </p:txBody>
-      </p:sp>
-    </p:spTree>
-  </p:cSld>
-  <p:clrMapOvr>
-    <a:masterClrMapping/>
-  </p:clrMapOvr>
-</p:sld>
-</file>
-
-<file path=ppt/slides/slide7.xml><?xml version="1.0" encoding="utf-8"?>
-<p:sld xmlns:a="http://schemas.openxmlformats.org/drawingml/2006/main" xmlns:r="http://schemas.openxmlformats.org/officeDocument/2006/relationships" xmlns:p="http://schemas.openxmlformats.org/presentationml/2006/main">
-  <p:cSld name="Slide 7">
-    <p:spTree>
-      <p:nvGrpSpPr>
-        <p:cNvPr id="1" name=""/>
-        <p:cNvGrpSpPr/>
-        <p:nvPr/>
-      </p:nvGrpSpPr>
-      <p:grpSpPr>
-        <a:xfrm>
-          <a:off x="0" y="0"/>
-          <a:ext cx="0" cy="0"/>
-          <a:chOff x="0" y="0"/>
-          <a:chExt cx="0" cy="0"/>
-        </a:xfrm>
-      </p:grpSpPr>
-      <p:sp>
-        <p:nvSpPr>
-          <p:cNvPr id="2" name="Shape 0"/>
-          <p:cNvSpPr/>
-          <p:nvPr/>
-        </p:nvSpPr>
-        <p:spPr>
-          <a:xfrm>
-            <a:off x="0" y="0"/>
-            <a:ext cx="12188952" cy="777240"/>
-          </a:xfrm>
-          <a:prstGeom prst="rect">
-            <a:avLst/>
-          </a:prstGeom>
-          <a:solidFill>
-            <a:srgbClr val="303F9F"/>
-          </a:solidFill>
-          <a:ln w="12700">
-            <a:solidFill>
-              <a:srgbClr val="303F9F"/>
-            </a:solidFill>
-            <a:prstDash val="solid"/>
-          </a:ln>
-        </p:spPr>
-      </p:sp>
-      <p:sp>
-        <p:nvSpPr>
-          <p:cNvPr id="3" name="Text 1"/>
-          <p:cNvSpPr/>
-          <p:nvPr/>
-        </p:nvSpPr>
-        <p:spPr>
-          <a:xfrm>
-            <a:off x="365760" y="0"/>
-            <a:ext cx="11457432" cy="777240"/>
-          </a:xfrm>
-          <a:prstGeom prst="rect">
-            <a:avLst/>
-          </a:prstGeom>
-          <a:noFill/>
-          <a:ln/>
-        </p:spPr>
-        <p:txBody>
-          <a:bodyPr wrap="square" rtlCol="0" anchor="ctr"/>
-          <a:lstStyle/>
-          <a:p>
-            <a:pPr indent="0" marL="0">
-              <a:buNone/>
-            </a:pPr>
-            <a:r>
-              <a:rPr lang="en-US" sz="2300" b="1" dirty="0">
-                <a:solidFill>
-                  <a:srgbClr val="FFFFFF"/>
-                </a:solidFill>
-                <a:latin typeface="Arial" pitchFamily="34" charset="0"/>
-                <a:ea typeface="Arial" pitchFamily="34" charset="-122"/>
-                <a:cs typeface="Arial" pitchFamily="34" charset="-120"/>
-              </a:rPr>
-              <a:t>Diagrama de comunicación: ¿para qué sirve?</a:t>
-            </a:r>
-            <a:endParaRPr lang="en-US" sz="2300" dirty="0"/>
-          </a:p>
-        </p:txBody>
-      </p:sp>
-      <p:sp>
-        <p:nvSpPr>
-          <p:cNvPr id="4" name="Text 2"/>
-          <p:cNvSpPr/>
-          <p:nvPr/>
-        </p:nvSpPr>
-        <p:spPr>
-          <a:xfrm>
-            <a:off x="548640" y="1097280"/>
-            <a:ext cx="11091672" cy="1188720"/>
-          </a:xfrm>
-          <a:prstGeom prst="rect">
-            <a:avLst/>
-          </a:prstGeom>
-          <a:noFill/>
-          <a:ln/>
-        </p:spPr>
-        <p:txBody>
-          <a:bodyPr wrap="square" rtlCol="0" anchor="t"/>
-          <a:lstStyle/>
-          <a:p>
-            <a:pPr indent="0" marL="0">
-              <a:spcAft>
-                <a:spcPts val="800"/>
-              </a:spcAft>
-              <a:buNone/>
-            </a:pPr>
-            <a:r>
-              <a:rPr lang="en-US" sz="1700" dirty="0">
-                <a:solidFill>
-                  <a:srgbClr val="212121"/>
-                </a:solidFill>
-                <a:latin typeface="Arial" pitchFamily="34" charset="0"/>
-                <a:ea typeface="Arial" pitchFamily="34" charset="-122"/>
-                <a:cs typeface="Arial" pitchFamily="34" charset="-120"/>
-              </a:rPr>
-              <a:t>Representa la comunicación entre objetos poniendo el acento en las RELACIONES y el flujo de control, no en el tiempo.</a:t>
-            </a:r>
-            <a:endParaRPr lang="en-US" sz="1700" dirty="0"/>
-          </a:p>
-          <a:p>
-            <a:pPr indent="0" marL="0">
-              <a:spcAft>
-                <a:spcPts val="800"/>
-              </a:spcAft>
-              <a:buNone/>
-            </a:pPr>
-            <a:r>
-              <a:rPr lang="en-US" sz="1700" dirty="0">
-                <a:solidFill>
-                  <a:srgbClr val="757575"/>
-                </a:solidFill>
-                <a:latin typeface="Arial" pitchFamily="34" charset="0"/>
-                <a:ea typeface="Arial" pitchFamily="34" charset="-122"/>
-                <a:cs typeface="Arial" pitchFamily="34" charset="-120"/>
-              </a:rPr>
-              <a:t>En versiones antiguas de UML se llamaba "diagrama de colaboración".</a:t>
-            </a:r>
-            <a:endParaRPr lang="en-US" sz="1700" dirty="0"/>
-          </a:p>
-        </p:txBody>
-      </p:sp>
-      <p:sp>
-        <p:nvSpPr>
-          <p:cNvPr id="5" name="Shape 3"/>
-          <p:cNvSpPr/>
-          <p:nvPr/>
-        </p:nvSpPr>
-        <p:spPr>
-          <a:xfrm>
-            <a:off x="548640" y="2560320"/>
-            <a:ext cx="11091672" cy="960120"/>
-          </a:xfrm>
-          <a:prstGeom prst="roundRect">
-            <a:avLst/>
-          </a:prstGeom>
-          <a:solidFill>
-            <a:srgbClr val="E0F2F1"/>
-          </a:solidFill>
-          <a:ln w="19050">
-            <a:solidFill>
-              <a:srgbClr val="009688"/>
-            </a:solidFill>
-            <a:prstDash val="solid"/>
-          </a:ln>
-        </p:spPr>
-      </p:sp>
-      <p:sp>
-        <p:nvSpPr>
-          <p:cNvPr id="6" name="Text 4"/>
-          <p:cNvSpPr/>
-          <p:nvPr/>
-        </p:nvSpPr>
-        <p:spPr>
-          <a:xfrm>
-            <a:off x="777240" y="2633472"/>
-            <a:ext cx="10634472" cy="813816"/>
-          </a:xfrm>
-          <a:prstGeom prst="rect">
-            <a:avLst/>
-          </a:prstGeom>
-          <a:noFill/>
-          <a:ln/>
-        </p:spPr>
-        <p:txBody>
-          <a:bodyPr wrap="square" rtlCol="0" anchor="ctr"/>
-          <a:lstStyle/>
-          <a:p>
-            <a:pPr indent="0" marL="0">
-              <a:buNone/>
-            </a:pPr>
-            <a:r>
-              <a:rPr lang="en-US" sz="1600" dirty="0">
-                <a:solidFill>
-                  <a:srgbClr val="212121"/>
-                </a:solidFill>
-                <a:latin typeface="Arial" pitchFamily="34" charset="0"/>
-                <a:ea typeface="Arial" pitchFamily="34" charset="-122"/>
-                <a:cs typeface="Arial" pitchFamily="34" charset="-120"/>
-              </a:rPr>
-              <a:t>Idea clave: secuencia y comunicación muestran LO MISMO (quién habla con quién). Cambia el enfoque — orden cronológico (secuencia) vs relaciones entre objetos (comunicación).</a:t>
-            </a:r>
-            <a:endParaRPr lang="en-US" sz="1600" dirty="0"/>
-          </a:p>
-        </p:txBody>
-      </p:sp>
-      <p:graphicFrame>
-        <p:nvGraphicFramePr>
-          <p:cNvPr id="8" name="Table 0"/>
-          <p:cNvGraphicFramePr>
-            <a:graphicFrameLocks noGrp="1"/>
-          </p:cNvGraphicFramePr>
-          <p:nvPr>
-            <p:extLst>
-              <p:ext uri="{D42A27DB-BD31-4B8C-83A1-F6EECF244321}">
-                <p14:modId xmlns:p14="http://schemas.microsoft.com/office/powerpoint/2010/main" val="1579011935"/>
-              </p:ext>
-            </p:extLst>
-          </p:nvPr>
-        </p:nvGraphicFramePr>
-        <p:xfrm>
-          <a:off x="548640" y="3794760"/>
-          <a:ext cx="11091672" cy="914400"/>
-        </p:xfrm>
-        <a:graphic>
-          <a:graphicData uri="http://schemas.openxmlformats.org/drawingml/2006/table">
-            <a:tbl>
-              <a:tblPr/>
-              <a:tblGrid>
-                <a:gridCol w="3105668"/>
-                <a:gridCol w="7986004"/>
-              </a:tblGrid>
-              <a:tr h="685800">
-                <a:tc>
-                  <a:txBody>
-                    <a:bodyPr/>
-                    <a:lstStyle/>
-                    <a:p>
-                      <a:pPr algn="ctr" indent="0" marL="0">
-                        <a:buNone/>
-                      </a:pPr>
-                      <a:r>
-                        <a:rPr lang="en-US" sz="1400" b="1" dirty="0">
-                          <a:solidFill>
-                            <a:srgbClr val="FFFFFF"/>
-                          </a:solidFill>
-                          <a:latin typeface="Arial" pitchFamily="34" charset="0"/>
-                          <a:ea typeface="Arial" pitchFamily="34" charset="-122"/>
-                          <a:cs typeface="Arial" pitchFamily="34" charset="-120"/>
-                        </a:rPr>
-                        <a:t>Elemento</a:t>
-                      </a:r>
-                      <a:endParaRPr lang="en-US" sz="1400" dirty="0">
-                        <a:latin typeface="Arial" charset="0"/>
-                        <a:ea typeface="Arial" charset="0"/>
-                        <a:cs typeface="Arial" charset="0"/>
-                      </a:endParaRPr>
-                    </a:p>
-                  </a:txBody>
-                  <a:tcPr marL="54864" marR="54864" marT="54864" marB="54864" anchor="ctr">
-                    <a:lnL w="12700" cap="flat" cmpd="sng" algn="ctr">
-                      <a:solidFill>
-                        <a:srgbClr val="EEEEEE"/>
-                      </a:solidFill>
-                      <a:prstDash val="solid"/>
-                      <a:round/>
-                      <a:headEnd type="none" w="med" len="med"/>
-                      <a:tailEnd type="none" w="med" len="med"/>
-                    </a:lnL>
-                    <a:lnR w="12700" cap="flat" cmpd="sng" algn="ctr">
-                      <a:solidFill>
-                        <a:srgbClr val="EEEEEE"/>
-                      </a:solidFill>
-                      <a:prstDash val="solid"/>
-                      <a:round/>
-                      <a:headEnd type="none" w="med" len="med"/>
-                      <a:tailEnd type="none" w="med" len="med"/>
-                    </a:lnR>
-                    <a:lnT w="12700" cap="flat" cmpd="sng" algn="ctr">
-                      <a:solidFill>
-                        <a:srgbClr val="EEEEEE"/>
-                      </a:solidFill>
-                      <a:prstDash val="solid"/>
-                      <a:round/>
-                      <a:headEnd type="none" w="med" len="med"/>
-                      <a:tailEnd type="none" w="med" len="med"/>
-                    </a:lnT>
-                    <a:lnB w="12700" cap="flat" cmpd="sng" algn="ctr">
-                      <a:solidFill>
-                        <a:srgbClr val="EEEEEE"/>
-                      </a:solidFill>
-                      <a:prstDash val="solid"/>
-                      <a:round/>
-                      <a:headEnd type="none" w="med" len="med"/>
-                      <a:tailEnd type="none" w="med" len="med"/>
-                    </a:lnB>
-                    <a:solidFill>
-                      <a:srgbClr val="3F51B5"/>
-                    </a:solidFill>
-                  </a:tcPr>
-                </a:tc>
-                <a:tc>
-                  <a:txBody>
-                    <a:bodyPr/>
-                    <a:lstStyle/>
-                    <a:p>
-                      <a:pPr algn="ctr" indent="0" marL="0">
-                        <a:buNone/>
-                      </a:pPr>
-                      <a:r>
-                        <a:rPr lang="en-US" sz="1400" b="1" dirty="0">
-                          <a:solidFill>
-                            <a:srgbClr val="FFFFFF"/>
-                          </a:solidFill>
-                          <a:latin typeface="Arial" pitchFamily="34" charset="0"/>
-                          <a:ea typeface="Arial" pitchFamily="34" charset="-122"/>
-                          <a:cs typeface="Arial" pitchFamily="34" charset="-120"/>
-                        </a:rPr>
-                        <a:t>Qué es</a:t>
-                      </a:r>
-                      <a:endParaRPr lang="en-US" sz="1400" dirty="0">
-                        <a:latin typeface="Arial" charset="0"/>
-                        <a:ea typeface="Arial" charset="0"/>
-                        <a:cs typeface="Arial" charset="0"/>
-                      </a:endParaRPr>
-                    </a:p>
-                  </a:txBody>
-                  <a:tcPr marL="54864" marR="54864" marT="54864" marB="54864" anchor="ctr">
-                    <a:lnL w="12700" cap="flat" cmpd="sng" algn="ctr">
-                      <a:solidFill>
-                        <a:srgbClr val="EEEEEE"/>
-                      </a:solidFill>
-                      <a:prstDash val="solid"/>
-                      <a:round/>
-                      <a:headEnd type="none" w="med" len="med"/>
-                      <a:tailEnd type="none" w="med" len="med"/>
-                    </a:lnL>
-                    <a:lnR w="12700" cap="flat" cmpd="sng" algn="ctr">
-                      <a:solidFill>
-                        <a:srgbClr val="EEEEEE"/>
-                      </a:solidFill>
-                      <a:prstDash val="solid"/>
-                      <a:round/>
-                      <a:headEnd type="none" w="med" len="med"/>
-                      <a:tailEnd type="none" w="med" len="med"/>
-                    </a:lnR>
-                    <a:lnT w="12700" cap="flat" cmpd="sng" algn="ctr">
-                      <a:solidFill>
-                        <a:srgbClr val="EEEEEE"/>
-                      </a:solidFill>
-                      <a:prstDash val="solid"/>
-                      <a:round/>
-                      <a:headEnd type="none" w="med" len="med"/>
-                      <a:tailEnd type="none" w="med" len="med"/>
-                    </a:lnT>
-                    <a:lnB w="12700" cap="flat" cmpd="sng" algn="ctr">
-                      <a:solidFill>
-                        <a:srgbClr val="EEEEEE"/>
-                      </a:solidFill>
-                      <a:prstDash val="solid"/>
-                      <a:round/>
-                      <a:headEnd type="none" w="med" len="med"/>
-                      <a:tailEnd type="none" w="med" len="med"/>
-                    </a:lnB>
-                    <a:solidFill>
-                      <a:srgbClr val="3F51B5"/>
-                    </a:solidFill>
-                  </a:tcPr>
-                </a:tc>
-              </a:tr>
-              <a:tr h="685800">
-                <a:tc>
-                  <a:txBody>
-                    <a:bodyPr/>
-                    <a:lstStyle/>
-                    <a:p>
-                      <a:pPr algn="l" indent="0" marL="0">
-                        <a:buNone/>
-                      </a:pPr>
-                      <a:r>
-                        <a:rPr lang="en-US" sz="1400" b="1" dirty="0">
-                          <a:solidFill>
-                            <a:srgbClr val="212121"/>
-                          </a:solidFill>
-                          <a:latin typeface="Arial" pitchFamily="34" charset="0"/>
-                          <a:ea typeface="Arial" pitchFamily="34" charset="-122"/>
-                          <a:cs typeface="Arial" pitchFamily="34" charset="-120"/>
-                        </a:rPr>
-                        <a:t>Nodo de comunicación</a:t>
-                      </a:r>
-                      <a:endParaRPr lang="en-US" sz="1400" dirty="0">
-                        <a:latin typeface="Arial" charset="0"/>
-                        <a:ea typeface="Arial" charset="0"/>
-                        <a:cs typeface="Arial" charset="0"/>
-                      </a:endParaRPr>
-                    </a:p>
-                  </a:txBody>
-                  <a:tcPr marL="54864" marR="54864" marT="54864" marB="54864" anchor="ctr">
-                    <a:lnL w="12700" cap="flat" cmpd="sng" algn="ctr">
-                      <a:solidFill>
-                        <a:srgbClr val="EEEEEE"/>
-                      </a:solidFill>
-                      <a:prstDash val="solid"/>
-                      <a:round/>
-                      <a:headEnd type="none" w="med" len="med"/>
-                      <a:tailEnd type="none" w="med" len="med"/>
-                    </a:lnL>
-                    <a:lnR w="12700" cap="flat" cmpd="sng" algn="ctr">
-                      <a:solidFill>
-                        <a:srgbClr val="EEEEEE"/>
-                      </a:solidFill>
-                      <a:prstDash val="solid"/>
-                      <a:round/>
-                      <a:headEnd type="none" w="med" len="med"/>
-                      <a:tailEnd type="none" w="med" len="med"/>
-                    </a:lnR>
-                    <a:lnT w="12700" cap="flat" cmpd="sng" algn="ctr">
-                      <a:solidFill>
-                        <a:srgbClr val="EEEEEE"/>
-                      </a:solidFill>
-                      <a:prstDash val="solid"/>
-                      <a:round/>
-                      <a:headEnd type="none" w="med" len="med"/>
-                      <a:tailEnd type="none" w="med" len="med"/>
-                    </a:lnT>
-                    <a:lnB w="12700" cap="flat" cmpd="sng" algn="ctr">
-                      <a:solidFill>
-                        <a:srgbClr val="EEEEEE"/>
-                      </a:solidFill>
-                      <a:prstDash val="solid"/>
-                      <a:round/>
-                      <a:headEnd type="none" w="med" len="med"/>
-                      <a:tailEnd type="none" w="med" len="med"/>
-                    </a:lnB>
-                    <a:solidFill>
-                      <a:srgbClr val="FFFFFF"/>
-                    </a:solidFill>
-                  </a:tcPr>
-                </a:tc>
-                <a:tc>
-                  <a:txBody>
-                    <a:bodyPr/>
-                    <a:lstStyle/>
-                    <a:p>
-                      <a:pPr algn="l" indent="0" marL="0">
-                        <a:buNone/>
-                      </a:pPr>
-                      <a:r>
-                        <a:rPr lang="en-US" sz="1400" dirty="0">
-                          <a:solidFill>
-                            <a:srgbClr val="212121"/>
-                          </a:solidFill>
-                          <a:latin typeface="Arial" pitchFamily="34" charset="0"/>
-                          <a:ea typeface="Arial" pitchFamily="34" charset="-122"/>
-                          <a:cs typeface="Arial" pitchFamily="34" charset="-120"/>
-                        </a:rPr>
-                        <a:t>Cada objeto del sistema (mismo concepto que en secuencia)</a:t>
-                      </a:r>
-                      <a:endParaRPr lang="en-US" sz="1400" dirty="0">
-                        <a:latin typeface="Arial" charset="0"/>
-                        <a:ea typeface="Arial" charset="0"/>
-                        <a:cs typeface="Arial" charset="0"/>
-                      </a:endParaRPr>
-                    </a:p>
-                  </a:txBody>
-                  <a:tcPr marL="54864" marR="54864" marT="54864" marB="54864" anchor="ctr">
-                    <a:lnL w="12700" cap="flat" cmpd="sng" algn="ctr">
-                      <a:solidFill>
-                        <a:srgbClr val="EEEEEE"/>
-                      </a:solidFill>
-                      <a:prstDash val="solid"/>
-                      <a:round/>
-                      <a:headEnd type="none" w="med" len="med"/>
-                      <a:tailEnd type="none" w="med" len="med"/>
-                    </a:lnL>
-                    <a:lnR w="12700" cap="flat" cmpd="sng" algn="ctr">
-                      <a:solidFill>
-                        <a:srgbClr val="EEEEEE"/>
-                      </a:solidFill>
-                      <a:prstDash val="solid"/>
-                      <a:round/>
-                      <a:headEnd type="none" w="med" len="med"/>
-                      <a:tailEnd type="none" w="med" len="med"/>
-                    </a:lnR>
-                    <a:lnT w="12700" cap="flat" cmpd="sng" algn="ctr">
-                      <a:solidFill>
-                        <a:srgbClr val="EEEEEE"/>
-                      </a:solidFill>
-                      <a:prstDash val="solid"/>
-                      <a:round/>
-                      <a:headEnd type="none" w="med" len="med"/>
-                      <a:tailEnd type="none" w="med" len="med"/>
-                    </a:lnT>
-                    <a:lnB w="12700" cap="flat" cmpd="sng" algn="ctr">
-                      <a:solidFill>
-                        <a:srgbClr val="EEEEEE"/>
-                      </a:solidFill>
-                      <a:prstDash val="solid"/>
-                      <a:round/>
-                      <a:headEnd type="none" w="med" len="med"/>
-                      <a:tailEnd type="none" w="med" len="med"/>
-                    </a:lnB>
-                    <a:solidFill>
-                      <a:srgbClr val="FFFFFF"/>
-                    </a:solidFill>
-                  </a:tcPr>
-                </a:tc>
-              </a:tr>
-              <a:tr h="685800">
-                <a:tc>
-                  <a:txBody>
-                    <a:bodyPr/>
-                    <a:lstStyle/>
-                    <a:p>
-                      <a:pPr algn="l" indent="0" marL="0">
-                        <a:buNone/>
-                      </a:pPr>
-                      <a:r>
-                        <a:rPr lang="en-US" sz="1400" b="1" dirty="0">
-                          <a:solidFill>
-                            <a:srgbClr val="212121"/>
-                          </a:solidFill>
-                          <a:latin typeface="Arial" pitchFamily="34" charset="0"/>
-                          <a:ea typeface="Arial" pitchFamily="34" charset="-122"/>
-                          <a:cs typeface="Arial" pitchFamily="34" charset="-120"/>
-                        </a:rPr>
-                        <a:t>Canal</a:t>
-                      </a:r>
-                      <a:endParaRPr lang="en-US" sz="1400" dirty="0">
-                        <a:latin typeface="Arial" charset="0"/>
-                        <a:ea typeface="Arial" charset="0"/>
-                        <a:cs typeface="Arial" charset="0"/>
-                      </a:endParaRPr>
-                    </a:p>
-                  </a:txBody>
-                  <a:tcPr marL="54864" marR="54864" marT="54864" marB="54864" anchor="ctr">
-                    <a:lnL w="12700" cap="flat" cmpd="sng" algn="ctr">
-                      <a:solidFill>
-                        <a:srgbClr val="EEEEEE"/>
-                      </a:solidFill>
-                      <a:prstDash val="solid"/>
-                      <a:round/>
-                      <a:headEnd type="none" w="med" len="med"/>
-                      <a:tailEnd type="none" w="med" len="med"/>
-                    </a:lnL>
-                    <a:lnR w="12700" cap="flat" cmpd="sng" algn="ctr">
-                      <a:solidFill>
-                        <a:srgbClr val="EEEEEE"/>
-                      </a:solidFill>
-                      <a:prstDash val="solid"/>
-                      <a:round/>
-                      <a:headEnd type="none" w="med" len="med"/>
-                      <a:tailEnd type="none" w="med" len="med"/>
-                    </a:lnR>
-                    <a:lnT w="12700" cap="flat" cmpd="sng" algn="ctr">
-                      <a:solidFill>
-                        <a:srgbClr val="EEEEEE"/>
-                      </a:solidFill>
-                      <a:prstDash val="solid"/>
-                      <a:round/>
-                      <a:headEnd type="none" w="med" len="med"/>
-                      <a:tailEnd type="none" w="med" len="med"/>
-                    </a:lnT>
-                    <a:lnB w="12700" cap="flat" cmpd="sng" algn="ctr">
-                      <a:solidFill>
-                        <a:srgbClr val="EEEEEE"/>
-                      </a:solidFill>
-                      <a:prstDash val="solid"/>
-                      <a:round/>
-                      <a:headEnd type="none" w="med" len="med"/>
-                      <a:tailEnd type="none" w="med" len="med"/>
-                    </a:lnB>
-                    <a:solidFill>
-                      <a:srgbClr val="F5F5F5"/>
-                    </a:solidFill>
-                  </a:tcPr>
-                </a:tc>
-                <a:tc>
-                  <a:txBody>
-                    <a:bodyPr/>
-                    <a:lstStyle/>
-                    <a:p>
-                      <a:pPr algn="l" indent="0" marL="0">
-                        <a:buNone/>
-                      </a:pPr>
-                      <a:r>
-                        <a:rPr lang="en-US" sz="1400" dirty="0">
-                          <a:solidFill>
-                            <a:srgbClr val="212121"/>
-                          </a:solidFill>
-                          <a:latin typeface="Arial" pitchFamily="34" charset="0"/>
-                          <a:ea typeface="Arial" pitchFamily="34" charset="-122"/>
-                          <a:cs typeface="Arial" pitchFamily="34" charset="-120"/>
-                        </a:rPr>
-                        <a:t>Línea recta entre dos objetos que se hablan. Es ÚNICO por pareja: cinco mensajes = un canal con cinco etiquetas</a:t>
-                      </a:r>
-                      <a:endParaRPr lang="en-US" sz="1400" dirty="0">
-                        <a:latin typeface="Arial" charset="0"/>
-                        <a:ea typeface="Arial" charset="0"/>
-                        <a:cs typeface="Arial" charset="0"/>
-                      </a:endParaRPr>
-                    </a:p>
-                  </a:txBody>
-                  <a:tcPr marL="54864" marR="54864" marT="54864" marB="54864" anchor="ctr">
-                    <a:lnL w="12700" cap="flat" cmpd="sng" algn="ctr">
-                      <a:solidFill>
-                        <a:srgbClr val="EEEEEE"/>
-                      </a:solidFill>
-                      <a:prstDash val="solid"/>
-                      <a:round/>
-                      <a:headEnd type="none" w="med" len="med"/>
-                      <a:tailEnd type="none" w="med" len="med"/>
-                    </a:lnL>
-                    <a:lnR w="12700" cap="flat" cmpd="sng" algn="ctr">
-                      <a:solidFill>
-                        <a:srgbClr val="EEEEEE"/>
-                      </a:solidFill>
-                      <a:prstDash val="solid"/>
-                      <a:round/>
-                      <a:headEnd type="none" w="med" len="med"/>
-                      <a:tailEnd type="none" w="med" len="med"/>
-                    </a:lnR>
-                    <a:lnT w="12700" cap="flat" cmpd="sng" algn="ctr">
-                      <a:solidFill>
-                        <a:srgbClr val="EEEEEE"/>
-                      </a:solidFill>
-                      <a:prstDash val="solid"/>
-                      <a:round/>
-                      <a:headEnd type="none" w="med" len="med"/>
-                      <a:tailEnd type="none" w="med" len="med"/>
-                    </a:lnT>
-                    <a:lnB w="12700" cap="flat" cmpd="sng" algn="ctr">
-                      <a:solidFill>
-                        <a:srgbClr val="EEEEEE"/>
-                      </a:solidFill>
-                      <a:prstDash val="solid"/>
-                      <a:round/>
-                      <a:headEnd type="none" w="med" len="med"/>
-                      <a:tailEnd type="none" w="med" len="med"/>
-                    </a:lnB>
-                    <a:solidFill>
-                      <a:srgbClr val="F5F5F5"/>
-                    </a:solidFill>
-                  </a:tcPr>
-                </a:tc>
-              </a:tr>
-              <a:tr h="685800">
-                <a:tc>
-                  <a:txBody>
-                    <a:bodyPr/>
-                    <a:lstStyle/>
-                    <a:p>
-                      <a:pPr algn="l" indent="0" marL="0">
-                        <a:buNone/>
-                      </a:pPr>
-                      <a:r>
-                        <a:rPr lang="en-US" sz="1400" b="1" dirty="0">
-                          <a:solidFill>
-                            <a:srgbClr val="212121"/>
-                          </a:solidFill>
-                          <a:latin typeface="Arial" pitchFamily="34" charset="0"/>
-                          <a:ea typeface="Arial" pitchFamily="34" charset="-122"/>
-                          <a:cs typeface="Arial" pitchFamily="34" charset="-120"/>
-                        </a:rPr>
-                        <a:t>Mensaje</a:t>
-                      </a:r>
-                      <a:endParaRPr lang="en-US" sz="1400" dirty="0">
-                        <a:latin typeface="Arial" charset="0"/>
-                        <a:ea typeface="Arial" charset="0"/>
-                        <a:cs typeface="Arial" charset="0"/>
-                      </a:endParaRPr>
-                    </a:p>
-                  </a:txBody>
-                  <a:tcPr marL="54864" marR="54864" marT="54864" marB="54864" anchor="ctr">
-                    <a:lnL w="12700" cap="flat" cmpd="sng" algn="ctr">
-                      <a:solidFill>
-                        <a:srgbClr val="EEEEEE"/>
-                      </a:solidFill>
-                      <a:prstDash val="solid"/>
-                      <a:round/>
-                      <a:headEnd type="none" w="med" len="med"/>
-                      <a:tailEnd type="none" w="med" len="med"/>
-                    </a:lnL>
-                    <a:lnR w="12700" cap="flat" cmpd="sng" algn="ctr">
-                      <a:solidFill>
-                        <a:srgbClr val="EEEEEE"/>
-                      </a:solidFill>
-                      <a:prstDash val="solid"/>
-                      <a:round/>
-                      <a:headEnd type="none" w="med" len="med"/>
-                      <a:tailEnd type="none" w="med" len="med"/>
-                    </a:lnR>
-                    <a:lnT w="12700" cap="flat" cmpd="sng" algn="ctr">
-                      <a:solidFill>
-                        <a:srgbClr val="EEEEEE"/>
-                      </a:solidFill>
-                      <a:prstDash val="solid"/>
-                      <a:round/>
-                      <a:headEnd type="none" w="med" len="med"/>
-                      <a:tailEnd type="none" w="med" len="med"/>
-                    </a:lnT>
-                    <a:lnB w="12700" cap="flat" cmpd="sng" algn="ctr">
-                      <a:solidFill>
-                        <a:srgbClr val="EEEEEE"/>
-                      </a:solidFill>
-                      <a:prstDash val="solid"/>
-                      <a:round/>
-                      <a:headEnd type="none" w="med" len="med"/>
-                      <a:tailEnd type="none" w="med" len="med"/>
-                    </a:lnB>
-                    <a:solidFill>
-                      <a:srgbClr val="FFFFFF"/>
-                    </a:solidFill>
-                  </a:tcPr>
-                </a:tc>
-                <a:tc>
-                  <a:txBody>
-                    <a:bodyPr/>
-                    <a:lstStyle/>
-                    <a:p>
-                      <a:pPr algn="l" indent="0" marL="0">
-                        <a:buNone/>
-                      </a:pPr>
-                      <a:r>
-                        <a:rPr lang="en-US" sz="1400" dirty="0">
-                          <a:solidFill>
-                            <a:srgbClr val="212121"/>
-                          </a:solidFill>
-                          <a:latin typeface="Arial" pitchFamily="34" charset="0"/>
-                          <a:ea typeface="Arial" pitchFamily="34" charset="-122"/>
-                          <a:cs typeface="Arial" pitchFamily="34" charset="-120"/>
-                        </a:rPr>
-                        <a:t>Flecha con etiqueta sobre el canal: número de orden + nombre de la operación + dirección</a:t>
-                      </a:r>
-                      <a:endParaRPr lang="en-US" sz="1400" dirty="0">
-                        <a:latin typeface="Arial" charset="0"/>
-                        <a:ea typeface="Arial" charset="0"/>
-                        <a:cs typeface="Arial" charset="0"/>
-                      </a:endParaRPr>
-                    </a:p>
-                  </a:txBody>
-                  <a:tcPr marL="54864" marR="54864" marT="54864" marB="54864" anchor="ctr">
-                    <a:lnL w="12700" cap="flat" cmpd="sng" algn="ctr">
-                      <a:solidFill>
-                        <a:srgbClr val="EEEEEE"/>
-                      </a:solidFill>
-                      <a:prstDash val="solid"/>
-                      <a:round/>
-                      <a:headEnd type="none" w="med" len="med"/>
-                      <a:tailEnd type="none" w="med" len="med"/>
-                    </a:lnL>
-                    <a:lnR w="12700" cap="flat" cmpd="sng" algn="ctr">
-                      <a:solidFill>
-                        <a:srgbClr val="EEEEEE"/>
-                      </a:solidFill>
-                      <a:prstDash val="solid"/>
-                      <a:round/>
-                      <a:headEnd type="none" w="med" len="med"/>
-                      <a:tailEnd type="none" w="med" len="med"/>
-                    </a:lnR>
-                    <a:lnT w="12700" cap="flat" cmpd="sng" algn="ctr">
-                      <a:solidFill>
-                        <a:srgbClr val="EEEEEE"/>
-                      </a:solidFill>
-                      <a:prstDash val="solid"/>
-                      <a:round/>
-                      <a:headEnd type="none" w="med" len="med"/>
-                      <a:tailEnd type="none" w="med" len="med"/>
-                    </a:lnT>
-                    <a:lnB w="12700" cap="flat" cmpd="sng" algn="ctr">
-                      <a:solidFill>
-                        <a:srgbClr val="EEEEEE"/>
-                      </a:solidFill>
-                      <a:prstDash val="solid"/>
-                      <a:round/>
-                      <a:headEnd type="none" w="med" len="med"/>
-                      <a:tailEnd type="none" w="med" len="med"/>
-                    </a:lnB>
-                    <a:solidFill>
-                      <a:srgbClr val="FFFFFF"/>
-                    </a:solidFill>
-                  </a:tcPr>
-                </a:tc>
-              </a:tr>
-            </a:tbl>
-          </a:graphicData>
-        </a:graphic>
-      </p:graphicFrame>
-      <p:sp>
-        <p:nvSpPr>
-          <p:cNvPr id="8" name="Text 5"/>
           <p:cNvSpPr/>
           <p:nvPr/>
         </p:nvSpPr>
@@ -7233,7 +12593,7 @@
                 <a:ea typeface="Arial" pitchFamily="34" charset="-122"/>
                 <a:cs typeface="Arial" pitchFamily="34" charset="-120"/>
               </a:rPr>
-              <a:t>Comunicación: la numeración es el tiempo</a:t>
+              <a:t>En DIA — tipos de mensaje (I)</a:t>
             </a:r>
             <a:endParaRPr lang="en-US" sz="2300" dirty="0"/>
           </a:p>
@@ -7248,7 +12608,7 @@
         <p:spPr>
           <a:xfrm>
             <a:off x="548640" y="1051560"/>
-            <a:ext cx="11091672" cy="1920240"/>
+            <a:ext cx="11091672" cy="822960"/>
           </a:xfrm>
           <a:prstGeom prst="rect">
             <a:avLst/>
@@ -7264,233 +12624,6 @@
               <a:spcAft>
                 <a:spcPts val="800"/>
               </a:spcAft>
-              <a:buNone/>
-            </a:pPr>
-            <a:r>
-              <a:rPr lang="en-US" sz="1600" dirty="0">
-                <a:solidFill>
-                  <a:srgbClr val="212121"/>
-                </a:solidFill>
-                <a:latin typeface="Arial" pitchFamily="34" charset="0"/>
-                <a:ea typeface="Arial" pitchFamily="34" charset="-122"/>
-                <a:cs typeface="Arial" pitchFamily="34" charset="-120"/>
-              </a:rPr>
-              <a:t>Aquí no hay eje vertical: el orden se expresa SOLO con la numeración. Dos convenciones:</a:t>
-            </a:r>
-            <a:endParaRPr lang="en-US" sz="1600" dirty="0"/>
-          </a:p>
-          <a:p>
-            <a:pPr indent="0" marL="0">
-              <a:spcAft>
-                <a:spcPts val="800"/>
-              </a:spcAft>
-              <a:buNone/>
-            </a:pPr>
-            <a:r>
-              <a:rPr lang="en-US" sz="1600" dirty="0">
-                <a:solidFill>
-                  <a:srgbClr val="212121"/>
-                </a:solidFill>
-                <a:latin typeface="Arial" pitchFamily="34" charset="0"/>
-                <a:ea typeface="Arial" pitchFamily="34" charset="-122"/>
-                <a:cs typeface="Arial" pitchFamily="34" charset="-120"/>
-              </a:rPr>
-              <a:t>•  Numeración plana: 1:, 2:, 3:... en el orden global. Suficiente en diagramas pequeños.</a:t>
-            </a:r>
-            <a:endParaRPr lang="en-US" sz="1600" dirty="0"/>
-          </a:p>
-          <a:p>
-            <a:pPr indent="0" marL="0">
-              <a:spcAft>
-                <a:spcPts val="800"/>
-              </a:spcAft>
-              <a:buNone/>
-            </a:pPr>
-            <a:r>
-              <a:rPr lang="en-US" sz="1600" dirty="0">
-                <a:solidFill>
-                  <a:srgbClr val="212121"/>
-                </a:solidFill>
-                <a:latin typeface="Arial" pitchFamily="34" charset="0"/>
-                <a:ea typeface="Arial" pitchFamily="34" charset="-122"/>
-                <a:cs typeface="Arial" pitchFamily="34" charset="-120"/>
-              </a:rPr>
-              <a:t>•  Numeración jerárquica: los mensajes que ocurren DENTRO de la operación desencadenada por otro llevan su número como prefijo (2 → 2.1, 2.2).</a:t>
-            </a:r>
-            <a:endParaRPr lang="en-US" sz="1600" dirty="0"/>
-          </a:p>
-        </p:txBody>
-      </p:sp>
-      <p:sp>
-        <p:nvSpPr>
-          <p:cNvPr id="5" name="Shape 3"/>
-          <p:cNvSpPr/>
-          <p:nvPr/>
-        </p:nvSpPr>
-        <p:spPr>
-          <a:xfrm>
-            <a:off x="548640" y="3200400"/>
-            <a:ext cx="11091672" cy="1234440"/>
-          </a:xfrm>
-          <a:prstGeom prst="rect">
-            <a:avLst/>
-          </a:prstGeom>
-          <a:solidFill>
-            <a:srgbClr val="ECEFF1"/>
-          </a:solidFill>
-          <a:ln w="12700">
-            <a:solidFill>
-              <a:srgbClr val="EEEEEE"/>
-            </a:solidFill>
-            <a:prstDash val="solid"/>
-          </a:ln>
-        </p:spPr>
-      </p:sp>
-      <p:sp>
-        <p:nvSpPr>
-          <p:cNvPr id="6" name="Shape 4"/>
-          <p:cNvSpPr/>
-          <p:nvPr/>
-        </p:nvSpPr>
-        <p:spPr>
-          <a:xfrm>
-            <a:off x="548640" y="3200400"/>
-            <a:ext cx="64008" cy="1234440"/>
-          </a:xfrm>
-          <a:prstGeom prst="rect">
-            <a:avLst/>
-          </a:prstGeom>
-          <a:solidFill>
-            <a:srgbClr val="009688"/>
-          </a:solidFill>
-          <a:ln w="12700">
-            <a:solidFill>
-              <a:srgbClr val="009688"/>
-            </a:solidFill>
-            <a:prstDash val="solid"/>
-          </a:ln>
-        </p:spPr>
-      </p:sp>
-      <p:sp>
-        <p:nvSpPr>
-          <p:cNvPr id="7" name="Text 5"/>
-          <p:cNvSpPr/>
-          <p:nvPr/>
-        </p:nvSpPr>
-        <p:spPr>
-          <a:xfrm>
-            <a:off x="777240" y="3291840"/>
-            <a:ext cx="10680192" cy="1051560"/>
-          </a:xfrm>
-          <a:prstGeom prst="rect">
-            <a:avLst/>
-          </a:prstGeom>
-          <a:noFill/>
-          <a:ln/>
-        </p:spPr>
-        <p:txBody>
-          <a:bodyPr wrap="square" rtlCol="0" anchor="t"/>
-          <a:lstStyle/>
-          <a:p>
-            <a:pPr indent="0" marL="0">
-              <a:buNone/>
-            </a:pPr>
-            <a:r>
-              <a:rPr lang="en-US" sz="1300" dirty="0">
-                <a:solidFill>
-                  <a:srgbClr val="263238"/>
-                </a:solidFill>
-                <a:latin typeface="Courier New" pitchFamily="34" charset="0"/>
-                <a:ea typeface="Courier New" pitchFamily="34" charset="-122"/>
-                <a:cs typeface="Courier New" pitchFamily="34" charset="-120"/>
-              </a:rPr>
-              <a:t>Usuario ───── Web       1: finalizarCompra()</a:t>
-            </a:r>
-            <a:endParaRPr lang="en-US" sz="1300" dirty="0"/>
-          </a:p>
-          <a:p>
-            <a:pPr indent="0" marL="0">
-              <a:buNone/>
-            </a:pPr>
-            <a:r>
-              <a:rPr lang="en-US" sz="1300" dirty="0">
-                <a:solidFill>
-                  <a:srgbClr val="263238"/>
-                </a:solidFill>
-                <a:latin typeface="Courier New" pitchFamily="34" charset="0"/>
-                <a:ea typeface="Courier New" pitchFamily="34" charset="-122"/>
-                <a:cs typeface="Courier New" pitchFamily="34" charset="-120"/>
-              </a:rPr>
-              <a:t>Web ───── Stock         1.1: reservarProductos()</a:t>
-            </a:r>
-            <a:endParaRPr lang="en-US" sz="1300" dirty="0"/>
-          </a:p>
-          <a:p>
-            <a:pPr indent="0" marL="0">
-              <a:buNone/>
-            </a:pPr>
-            <a:r>
-              <a:rPr lang="en-US" sz="1300" dirty="0">
-                <a:solidFill>
-                  <a:srgbClr val="263238"/>
-                </a:solidFill>
-                <a:latin typeface="Courier New" pitchFamily="34" charset="0"/>
-                <a:ea typeface="Courier New" pitchFamily="34" charset="-122"/>
-                <a:cs typeface="Courier New" pitchFamily="34" charset="-120"/>
-              </a:rPr>
-              <a:t>Web ───── Pago          1.2: cobrar()</a:t>
-            </a:r>
-            <a:endParaRPr lang="en-US" sz="1300" dirty="0"/>
-          </a:p>
-        </p:txBody>
-      </p:sp>
-      <p:sp>
-        <p:nvSpPr>
-          <p:cNvPr id="8" name="Shape 6"/>
-          <p:cNvSpPr/>
-          <p:nvPr/>
-        </p:nvSpPr>
-        <p:spPr>
-          <a:xfrm>
-            <a:off x="548640" y="4754880"/>
-            <a:ext cx="11091672" cy="960120"/>
-          </a:xfrm>
-          <a:prstGeom prst="roundRect">
-            <a:avLst/>
-          </a:prstGeom>
-          <a:solidFill>
-            <a:srgbClr val="E0F2F1"/>
-          </a:solidFill>
-          <a:ln w="19050">
-            <a:solidFill>
-              <a:srgbClr val="009688"/>
-            </a:solidFill>
-            <a:prstDash val="solid"/>
-          </a:ln>
-        </p:spPr>
-      </p:sp>
-      <p:sp>
-        <p:nvSpPr>
-          <p:cNvPr id="9" name="Text 7"/>
-          <p:cNvSpPr/>
-          <p:nvPr/>
-        </p:nvSpPr>
-        <p:spPr>
-          <a:xfrm>
-            <a:off x="777240" y="4828032"/>
-            <a:ext cx="10634472" cy="813816"/>
-          </a:xfrm>
-          <a:prstGeom prst="rect">
-            <a:avLst/>
-          </a:prstGeom>
-          <a:noFill/>
-          <a:ln/>
-        </p:spPr>
-        <p:txBody>
-          <a:bodyPr wrap="square" rtlCol="0" anchor="ctr"/>
-          <a:lstStyle/>
-          <a:p>
-            <a:pPr indent="0" marL="0">
               <a:buNone/>
             </a:pPr>
             <a:r>
@@ -7502,7 +12635,7 @@
                 <a:ea typeface="Arial" pitchFamily="34" charset="-122"/>
                 <a:cs typeface="Arial" pitchFamily="34" charset="-120"/>
               </a:rPr>
-              <a:t>1.1 y 1.2 cuelgan del 1 porque ambas llamadas ocurren dentro de finalizarCompra(): sin el mensaje 1 no existirían. Si el usuario pidiera después la factura, ese nuevo mensaje sería el 2:.</a:t>
+              <a:t>•  Dibuja la flecha con la herramienta de mensajes de la paleta UML y haz doble clic sobre ella: en "Tipo de mensaje" eliges el que necesites.</a:t>
             </a:r>
             <a:endParaRPr lang="en-US" sz="1500" dirty="0"/>
           </a:p>
@@ -7510,7 +12643,262 @@
       </p:sp>
       <p:sp>
         <p:nvSpPr>
-          <p:cNvPr id="10" name="Text 8"/>
+          <p:cNvPr id="5" name="Shape 3"/>
+          <p:cNvSpPr/>
+          <p:nvPr/>
+        </p:nvSpPr>
+        <p:spPr>
+          <a:xfrm>
+            <a:off x="731520" y="2057400"/>
+            <a:ext cx="3566160" cy="2423160"/>
+          </a:xfrm>
+          <a:prstGeom prst="rect">
+            <a:avLst/>
+          </a:prstGeom>
+          <a:ln w="12700">
+            <a:solidFill>
+              <a:srgbClr val="EEEEEE"/>
+            </a:solidFill>
+            <a:prstDash val="solid"/>
+          </a:ln>
+        </p:spPr>
+      </p:sp>
+      <p:pic>
+        <p:nvPicPr>
+          <p:cNvPr id="6" name="Image 0" descr="C:/Users/Aitor/Documents/apuntes-profe/entornos-de-desarrollo/docs/tema6/img/secuencia-mensaje-llamada.png">    </p:cNvPr>
+          <p:cNvPicPr>
+            <a:picLocks noChangeAspect="1"/>
+          </p:cNvPicPr>
+          <p:nvPr/>
+        </p:nvPicPr>
+        <p:blipFill>
+          <a:blip r:embed="rId1"/>
+          <a:stretch>
+            <a:fillRect/>
+          </a:stretch>
+        </p:blipFill>
+        <p:spPr>
+          <a:xfrm>
+            <a:off x="731520" y="2057400"/>
+            <a:ext cx="3566160" cy="2423160"/>
+          </a:xfrm>
+          <a:prstGeom prst="rect">
+            <a:avLst/>
+          </a:prstGeom>
+        </p:spPr>
+      </p:pic>
+      <p:sp>
+        <p:nvSpPr>
+          <p:cNvPr id="7" name="Text 4"/>
+          <p:cNvSpPr/>
+          <p:nvPr/>
+        </p:nvSpPr>
+        <p:spPr>
+          <a:xfrm>
+            <a:off x="457200" y="4507992"/>
+            <a:ext cx="4114800" cy="320040"/>
+          </a:xfrm>
+          <a:prstGeom prst="rect">
+            <a:avLst/>
+          </a:prstGeom>
+          <a:noFill/>
+          <a:ln/>
+        </p:spPr>
+        <p:txBody>
+          <a:bodyPr wrap="square" rtlCol="0" anchor="t"/>
+          <a:lstStyle/>
+          <a:p>
+            <a:pPr algn="ctr" indent="0" marL="0">
+              <a:buNone/>
+            </a:pPr>
+            <a:r>
+              <a:rPr lang="en-US" sz="1100" i="1" dirty="0">
+                <a:solidFill>
+                  <a:srgbClr val="757575"/>
+                </a:solidFill>
+                <a:latin typeface="Arial" pitchFamily="34" charset="0"/>
+                <a:ea typeface="Arial" pitchFamily="34" charset="-122"/>
+                <a:cs typeface="Arial" pitchFamily="34" charset="-120"/>
+              </a:rPr>
+              <a:t>Herramienta de mensaje. El tipo por defecto es "Llamada" (síncrono)</a:t>
+            </a:r>
+            <a:endParaRPr lang="en-US" sz="1100" dirty="0"/>
+          </a:p>
+        </p:txBody>
+      </p:sp>
+      <p:sp>
+        <p:nvSpPr>
+          <p:cNvPr id="8" name="Shape 5"/>
+          <p:cNvSpPr/>
+          <p:nvPr/>
+        </p:nvSpPr>
+        <p:spPr>
+          <a:xfrm>
+            <a:off x="4617720" y="2057400"/>
+            <a:ext cx="2423160" cy="2414016"/>
+          </a:xfrm>
+          <a:prstGeom prst="rect">
+            <a:avLst/>
+          </a:prstGeom>
+          <a:ln w="12700">
+            <a:solidFill>
+              <a:srgbClr val="EEEEEE"/>
+            </a:solidFill>
+            <a:prstDash val="solid"/>
+          </a:ln>
+        </p:spPr>
+      </p:sp>
+      <p:pic>
+        <p:nvPicPr>
+          <p:cNvPr id="9" name="Image 1" descr="C:/Users/Aitor/Documents/apuntes-profe/entornos-de-desarrollo/docs/tema6/img/secuencia-mensaje-simple.png">    </p:cNvPr>
+          <p:cNvPicPr>
+            <a:picLocks noChangeAspect="1"/>
+          </p:cNvPicPr>
+          <p:nvPr/>
+        </p:nvPicPr>
+        <p:blipFill>
+          <a:blip r:embed="rId2"/>
+          <a:stretch>
+            <a:fillRect/>
+          </a:stretch>
+        </p:blipFill>
+        <p:spPr>
+          <a:xfrm>
+            <a:off x="4617720" y="2057400"/>
+            <a:ext cx="2423160" cy="2414016"/>
+          </a:xfrm>
+          <a:prstGeom prst="rect">
+            <a:avLst/>
+          </a:prstGeom>
+        </p:spPr>
+      </p:pic>
+      <p:sp>
+        <p:nvSpPr>
+          <p:cNvPr id="10" name="Text 6"/>
+          <p:cNvSpPr/>
+          <p:nvPr/>
+        </p:nvSpPr>
+        <p:spPr>
+          <a:xfrm>
+            <a:off x="4343400" y="4498848"/>
+            <a:ext cx="2971800" cy="320040"/>
+          </a:xfrm>
+          <a:prstGeom prst="rect">
+            <a:avLst/>
+          </a:prstGeom>
+          <a:noFill/>
+          <a:ln/>
+        </p:spPr>
+        <p:txBody>
+          <a:bodyPr wrap="square" rtlCol="0" anchor="t"/>
+          <a:lstStyle/>
+          <a:p>
+            <a:pPr algn="ctr" indent="0" marL="0">
+              <a:buNone/>
+            </a:pPr>
+            <a:r>
+              <a:rPr lang="en-US" sz="1100" i="1" dirty="0">
+                <a:solidFill>
+                  <a:srgbClr val="757575"/>
+                </a:solidFill>
+                <a:latin typeface="Arial" pitchFamily="34" charset="0"/>
+                <a:ea typeface="Arial" pitchFamily="34" charset="-122"/>
+                <a:cs typeface="Arial" pitchFamily="34" charset="-120"/>
+              </a:rPr>
+              <a:t>Tipo "Simple": el emisor no espera respuesta (asíncrono)</a:t>
+            </a:r>
+            <a:endParaRPr lang="en-US" sz="1100" dirty="0"/>
+          </a:p>
+        </p:txBody>
+      </p:sp>
+      <p:sp>
+        <p:nvSpPr>
+          <p:cNvPr id="11" name="Shape 7"/>
+          <p:cNvSpPr/>
+          <p:nvPr/>
+        </p:nvSpPr>
+        <p:spPr>
+          <a:xfrm>
+            <a:off x="7360920" y="2057400"/>
+            <a:ext cx="2404872" cy="2368296"/>
+          </a:xfrm>
+          <a:prstGeom prst="rect">
+            <a:avLst/>
+          </a:prstGeom>
+          <a:ln w="12700">
+            <a:solidFill>
+              <a:srgbClr val="EEEEEE"/>
+            </a:solidFill>
+            <a:prstDash val="solid"/>
+          </a:ln>
+        </p:spPr>
+      </p:sp>
+      <p:pic>
+        <p:nvPicPr>
+          <p:cNvPr id="12" name="Image 2" descr="C:/Users/Aitor/Documents/apuntes-profe/entornos-de-desarrollo/docs/tema6/img/secuencia-mensaje-volver.png">    </p:cNvPr>
+          <p:cNvPicPr>
+            <a:picLocks noChangeAspect="1"/>
+          </p:cNvPicPr>
+          <p:nvPr/>
+        </p:nvPicPr>
+        <p:blipFill>
+          <a:blip r:embed="rId3"/>
+          <a:stretch>
+            <a:fillRect/>
+          </a:stretch>
+        </p:blipFill>
+        <p:spPr>
+          <a:xfrm>
+            <a:off x="7360920" y="2057400"/>
+            <a:ext cx="2404872" cy="2368296"/>
+          </a:xfrm>
+          <a:prstGeom prst="rect">
+            <a:avLst/>
+          </a:prstGeom>
+        </p:spPr>
+      </p:pic>
+      <p:sp>
+        <p:nvSpPr>
+          <p:cNvPr id="13" name="Text 8"/>
+          <p:cNvSpPr/>
+          <p:nvPr/>
+        </p:nvSpPr>
+        <p:spPr>
+          <a:xfrm>
+            <a:off x="7086600" y="4453128"/>
+            <a:ext cx="2953512" cy="320040"/>
+          </a:xfrm>
+          <a:prstGeom prst="rect">
+            <a:avLst/>
+          </a:prstGeom>
+          <a:noFill/>
+          <a:ln/>
+        </p:spPr>
+        <p:txBody>
+          <a:bodyPr wrap="square" rtlCol="0" anchor="t"/>
+          <a:lstStyle/>
+          <a:p>
+            <a:pPr algn="ctr" indent="0" marL="0">
+              <a:buNone/>
+            </a:pPr>
+            <a:r>
+              <a:rPr lang="en-US" sz="1100" i="1" dirty="0">
+                <a:solidFill>
+                  <a:srgbClr val="757575"/>
+                </a:solidFill>
+                <a:latin typeface="Arial" pitchFamily="34" charset="0"/>
+                <a:ea typeface="Arial" pitchFamily="34" charset="-122"/>
+                <a:cs typeface="Arial" pitchFamily="34" charset="-120"/>
+              </a:rPr>
+              <a:t>Tipo "Volver": discontinua con flecha, es la respuesta</a:t>
+            </a:r>
+            <a:endParaRPr lang="en-US" sz="1100" dirty="0"/>
+          </a:p>
+        </p:txBody>
+      </p:sp>
+      <p:sp>
+        <p:nvSpPr>
+          <p:cNvPr id="14" name="Text 9"/>
           <p:cNvSpPr/>
           <p:nvPr/>
         </p:nvSpPr>
@@ -7630,7 +13018,7 @@
                 <a:ea typeface="Arial" pitchFamily="34" charset="-122"/>
                 <a:cs typeface="Arial" pitchFamily="34" charset="-120"/>
               </a:rPr>
-              <a:t>De secuencia a comunicación (y vuelta)</a:t>
+              <a:t>En DIA — tipos de mensaje (II)</a:t>
             </a:r>
             <a:endParaRPr lang="en-US" sz="2300" dirty="0"/>
           </a:p>
@@ -7645,7 +13033,7 @@
         <p:spPr>
           <a:xfrm>
             <a:off x="548640" y="1051560"/>
-            <a:ext cx="5760720" cy="2926080"/>
+            <a:ext cx="11091672" cy="548640"/>
           </a:xfrm>
           <a:prstGeom prst="rect">
             <a:avLst/>
@@ -7672,55 +13060,37 @@
                 <a:ea typeface="Arial" pitchFamily="34" charset="-122"/>
                 <a:cs typeface="Arial" pitchFamily="34" charset="-120"/>
               </a:rPr>
-              <a:t>1. Coloca los objetos donde quieras (ya no importa el eje del tiempo) y une con una línea cada pareja que se envíe al menos un mensaje: esos son los canales.</a:t>
+              <a:t>•  Los mismos pasos sirven para creación y automensajes:</a:t>
             </a:r>
             <a:endParaRPr lang="en-US" sz="1500" dirty="0"/>
           </a:p>
-          <a:p>
-            <a:pPr indent="0" marL="0">
-              <a:spcAft>
-                <a:spcPts val="800"/>
-              </a:spcAft>
-              <a:buNone/>
-            </a:pPr>
-            <a:r>
-              <a:rPr lang="en-US" sz="1500" dirty="0">
-                <a:solidFill>
-                  <a:srgbClr val="212121"/>
-                </a:solidFill>
-                <a:latin typeface="Arial" pitchFamily="34" charset="0"/>
-                <a:ea typeface="Arial" pitchFamily="34" charset="-122"/>
-                <a:cs typeface="Arial" pitchFamily="34" charset="-120"/>
-              </a:rPr>
-              <a:t>2. Copia cada mensaje sobre su canal, como flecha con el nombre de la operación.</a:t>
-            </a:r>
-            <a:endParaRPr lang="en-US" sz="1500" dirty="0"/>
-          </a:p>
-          <a:p>
-            <a:pPr indent="0" marL="0">
-              <a:spcAft>
-                <a:spcPts val="800"/>
-              </a:spcAft>
-              <a:buNone/>
-            </a:pPr>
-            <a:r>
-              <a:rPr lang="en-US" sz="1500" dirty="0">
-                <a:solidFill>
-                  <a:srgbClr val="212121"/>
-                </a:solidFill>
-                <a:latin typeface="Arial" pitchFamily="34" charset="0"/>
-                <a:ea typeface="Arial" pitchFamily="34" charset="-122"/>
-                <a:cs typeface="Arial" pitchFamily="34" charset="-120"/>
-              </a:rPr>
-              <a:t>3. Numera los mensajes en el orden en que ocurrían en el de secuencia.</a:t>
-            </a:r>
-            <a:endParaRPr lang="en-US" sz="1500" dirty="0"/>
-          </a:p>
-        </p:txBody>
+        </p:txBody>
+      </p:sp>
+      <p:sp>
+        <p:nvSpPr>
+          <p:cNvPr id="5" name="Shape 3"/>
+          <p:cNvSpPr/>
+          <p:nvPr/>
+        </p:nvSpPr>
+        <p:spPr>
+          <a:xfrm>
+            <a:off x="2103120" y="2103120"/>
+            <a:ext cx="3246120" cy="3182112"/>
+          </a:xfrm>
+          <a:prstGeom prst="rect">
+            <a:avLst/>
+          </a:prstGeom>
+          <a:ln w="12700">
+            <a:solidFill>
+              <a:srgbClr val="EEEEEE"/>
+            </a:solidFill>
+            <a:prstDash val="solid"/>
+          </a:ln>
+        </p:spPr>
       </p:sp>
       <p:pic>
         <p:nvPicPr>
-          <p:cNvPr id="5" name="Image 0" descr="C:/Users/Aitor/Documents/apuntes-profe/entornos-de-desarrollo/docs/tema6/img/comunicacion-lavadora.png">    </p:cNvPr>
+          <p:cNvPr id="6" name="Image 0" descr="C:/Users/Aitor/Documents/apuntes-profe/entornos-de-desarrollo/docs/tema6/img/secuencia-mensaje-crear.png">    </p:cNvPr>
           <p:cNvPicPr>
             <a:picLocks noChangeAspect="1"/>
           </p:cNvPicPr>
@@ -7734,8 +13104,8 @@
         </p:blipFill>
         <p:spPr>
           <a:xfrm>
-            <a:off x="6583680" y="1051560"/>
-            <a:ext cx="5029200" cy="3108960"/>
+            <a:off x="2103120" y="2103120"/>
+            <a:ext cx="3246120" cy="3182112"/>
           </a:xfrm>
           <a:prstGeom prst="rect">
             <a:avLst/>
@@ -7744,39 +13114,14 @@
       </p:pic>
       <p:sp>
         <p:nvSpPr>
-          <p:cNvPr id="6" name="Shape 3"/>
-          <p:cNvSpPr/>
-          <p:nvPr/>
-        </p:nvSpPr>
-        <p:spPr>
-          <a:xfrm>
-            <a:off x="548640" y="4572000"/>
-            <a:ext cx="11091672" cy="1188720"/>
-          </a:xfrm>
-          <a:prstGeom prst="roundRect">
-            <a:avLst/>
-          </a:prstGeom>
-          <a:solidFill>
-            <a:srgbClr val="E0F2F1"/>
-          </a:solidFill>
-          <a:ln w="19050">
-            <a:solidFill>
-              <a:srgbClr val="009688"/>
-            </a:solidFill>
-            <a:prstDash val="solid"/>
-          </a:ln>
-        </p:spPr>
-      </p:sp>
-      <p:sp>
-        <p:nvSpPr>
           <p:cNvPr id="7" name="Text 4"/>
           <p:cNvSpPr/>
           <p:nvPr/>
         </p:nvSpPr>
         <p:spPr>
           <a:xfrm>
-            <a:off x="777240" y="4645152"/>
-            <a:ext cx="10634472" cy="1042416"/>
+            <a:off x="1828800" y="5312664"/>
+            <a:ext cx="3794760" cy="320040"/>
           </a:xfrm>
           <a:prstGeom prst="rect">
             <a:avLst/>
@@ -7785,30 +13130,115 @@
           <a:ln/>
         </p:spPr>
         <p:txBody>
-          <a:bodyPr wrap="square" rtlCol="0" anchor="ctr"/>
-          <a:lstStyle/>
-          <a:p>
-            <a:pPr indent="0" marL="0">
+          <a:bodyPr wrap="square" rtlCol="0" anchor="t"/>
+          <a:lstStyle/>
+          <a:p>
+            <a:pPr algn="ctr" indent="0" marL="0">
               <a:buNone/>
             </a:pPr>
             <a:r>
-              <a:rPr lang="en-US" sz="1400" dirty="0">
+              <a:rPr lang="en-US" sz="1100" i="1" dirty="0">
                 <a:solidFill>
-                  <a:srgbClr val="212121"/>
+                  <a:srgbClr val="757575"/>
                 </a:solidFill>
                 <a:latin typeface="Arial" pitchFamily="34" charset="0"/>
                 <a:ea typeface="Arial" pitchFamily="34" charset="-122"/>
                 <a:cs typeface="Arial" pitchFamily="34" charset="-120"/>
               </a:rPr>
-              <a:t>El paso inverso también funciona: la numeración te da el orden vertical. En la práctica, el de secuencia es más habitual; el de comunicación gana con muchos objetos, cuando lo que preocupa es la estructura de conexiones (p. ej., detectar que un objeto habla con demasiados).</a:t>
-            </a:r>
-            <a:endParaRPr lang="en-US" sz="1400" dirty="0"/>
-          </a:p>
-        </p:txBody>
-      </p:sp>
-      <p:sp>
-        <p:nvSpPr>
-          <p:cNvPr id="8" name="Text 5"/>
+              <a:t>Tipo "Crear": instancia un objeto nuevo junto al extremo receptor</a:t>
+            </a:r>
+            <a:endParaRPr lang="en-US" sz="1100" dirty="0"/>
+          </a:p>
+        </p:txBody>
+      </p:sp>
+      <p:sp>
+        <p:nvSpPr>
+          <p:cNvPr id="8" name="Shape 5"/>
+          <p:cNvSpPr/>
+          <p:nvPr/>
+        </p:nvSpPr>
+        <p:spPr>
+          <a:xfrm>
+            <a:off x="6035040" y="2103120"/>
+            <a:ext cx="3611880" cy="3163824"/>
+          </a:xfrm>
+          <a:prstGeom prst="rect">
+            <a:avLst/>
+          </a:prstGeom>
+          <a:ln w="12700">
+            <a:solidFill>
+              <a:srgbClr val="EEEEEE"/>
+            </a:solidFill>
+            <a:prstDash val="solid"/>
+          </a:ln>
+        </p:spPr>
+      </p:sp>
+      <p:pic>
+        <p:nvPicPr>
+          <p:cNvPr id="9" name="Image 1" descr="C:/Users/Aitor/Documents/apuntes-profe/entornos-de-desarrollo/docs/tema6/img/secuencia-mensaje-recursiva.png">    </p:cNvPr>
+          <p:cNvPicPr>
+            <a:picLocks noChangeAspect="1"/>
+          </p:cNvPicPr>
+          <p:nvPr/>
+        </p:nvPicPr>
+        <p:blipFill>
+          <a:blip r:embed="rId2"/>
+          <a:stretch>
+            <a:fillRect/>
+          </a:stretch>
+        </p:blipFill>
+        <p:spPr>
+          <a:xfrm>
+            <a:off x="6035040" y="2103120"/>
+            <a:ext cx="3611880" cy="3163824"/>
+          </a:xfrm>
+          <a:prstGeom prst="rect">
+            <a:avLst/>
+          </a:prstGeom>
+        </p:spPr>
+      </p:pic>
+      <p:sp>
+        <p:nvSpPr>
+          <p:cNvPr id="10" name="Text 6"/>
+          <p:cNvSpPr/>
+          <p:nvPr/>
+        </p:nvSpPr>
+        <p:spPr>
+          <a:xfrm>
+            <a:off x="5760720" y="5294376"/>
+            <a:ext cx="4160520" cy="320040"/>
+          </a:xfrm>
+          <a:prstGeom prst="rect">
+            <a:avLst/>
+          </a:prstGeom>
+          <a:noFill/>
+          <a:ln/>
+        </p:spPr>
+        <p:txBody>
+          <a:bodyPr wrap="square" rtlCol="0" anchor="t"/>
+          <a:lstStyle/>
+          <a:p>
+            <a:pPr algn="ctr" indent="0" marL="0">
+              <a:buNone/>
+            </a:pPr>
+            <a:r>
+              <a:rPr lang="en-US" sz="1100" i="1" dirty="0">
+                <a:solidFill>
+                  <a:srgbClr val="757575"/>
+                </a:solidFill>
+                <a:latin typeface="Arial" pitchFamily="34" charset="0"/>
+                <a:ea typeface="Arial" pitchFamily="34" charset="-122"/>
+                <a:cs typeface="Arial" pitchFamily="34" charset="-120"/>
+              </a:rPr>
+              <a:t>Tipo "Recursiva": la flecha sale y vuelve al mismo objeto</a:t>
+            </a:r>
+            <a:endParaRPr lang="en-US" sz="1100" dirty="0"/>
+          </a:p>
+        </p:txBody>
+      </p:sp>
+      <p:sp>
+        <p:nvSpPr>
+          <p:cNvPr id="11" name="Text 7"/>
           <p:cNvSpPr/>
           <p:nvPr/>
         </p:nvSpPr>
